--- a/e61 Projects/Presentations/QETA Post-Budget 2026.pptx
+++ b/e61 Projects/Presentations/QETA Post-Budget 2026.pptx
@@ -5,25 +5,27 @@
     <p:sldMasterId id="2147483660" r:id="rId4"/>
   </p:sldMasterIdLst>
   <p:notesMasterIdLst>
-    <p:notesMasterId r:id="rId13"/>
+    <p:notesMasterId r:id="rId15"/>
   </p:notesMasterIdLst>
   <p:handoutMasterIdLst>
-    <p:handoutMasterId r:id="rId14"/>
+    <p:handoutMasterId r:id="rId16"/>
   </p:handoutMasterIdLst>
   <p:sldIdLst>
     <p:sldId id="309" r:id="rId5"/>
     <p:sldId id="2147140428" r:id="rId6"/>
-    <p:sldId id="2147140429" r:id="rId7"/>
-    <p:sldId id="2147140434" r:id="rId8"/>
-    <p:sldId id="2147140433" r:id="rId9"/>
-    <p:sldId id="2147140435" r:id="rId10"/>
-    <p:sldId id="2147140432" r:id="rId11"/>
-    <p:sldId id="2147140431" r:id="rId12"/>
+    <p:sldId id="2147140436" r:id="rId7"/>
+    <p:sldId id="2147140429" r:id="rId8"/>
+    <p:sldId id="2147140434" r:id="rId9"/>
+    <p:sldId id="2147140437" r:id="rId10"/>
+    <p:sldId id="2147140433" r:id="rId11"/>
+    <p:sldId id="2147140435" r:id="rId12"/>
+    <p:sldId id="2147140432" r:id="rId13"/>
+    <p:sldId id="2147140431" r:id="rId14"/>
   </p:sldIdLst>
   <p:sldSz cx="12192000" cy="6858000"/>
   <p:notesSz cx="6858000" cy="9144000"/>
   <p:custDataLst>
-    <p:tags r:id="rId15"/>
+    <p:tags r:id="rId17"/>
   </p:custDataLst>
   <p:defaultTextStyle>
     <a:defPPr>
@@ -127,8 +129,10 @@
           <p14:sldIdLst>
             <p14:sldId id="309"/>
             <p14:sldId id="2147140428"/>
+            <p14:sldId id="2147140436"/>
             <p14:sldId id="2147140429"/>
             <p14:sldId id="2147140434"/>
+            <p14:sldId id="2147140437"/>
             <p14:sldId id="2147140433"/>
             <p14:sldId id="2147140435"/>
             <p14:sldId id="2147140432"/>
@@ -249,7 +253,7 @@
           <a:p>
             <a:fld id="{60F87968-E7C3-4FA2-86D7-7CFDDCA2896A}" type="datetimeFigureOut">
               <a:rPr lang="en-US" smtClean="0"/>
-              <a:t>8/2/2026</a:t>
+              <a:t>03-Aug-26</a:t>
             </a:fld>
             <a:endParaRPr lang="en-US"/>
           </a:p>
@@ -426,7 +430,7 @@
           <a:p>
             <a:fld id="{B416A7BE-E113-476D-8DE0-A6138461ACE1}" type="datetimeFigureOut">
               <a:rPr lang="en-US" smtClean="0"/>
-              <a:t>8/2/2026</a:t>
+              <a:t>03-Aug-26</a:t>
             </a:fld>
             <a:endParaRPr lang="en-US"/>
           </a:p>
@@ -20115,6 +20119,237 @@
 </p:sld>
 </file>
 
+<file path=ppt/slides/slide10.xml><?xml version="1.0" encoding="utf-8"?>
+<p:sld xmlns:a="http://schemas.openxmlformats.org/drawingml/2006/main" xmlns:r="http://schemas.openxmlformats.org/officeDocument/2006/relationships" xmlns:p="http://schemas.openxmlformats.org/presentationml/2006/main">
+  <p:cSld>
+    <p:spTree>
+      <p:nvGrpSpPr>
+        <p:cNvPr id="1" name="">
+          <a:extLst>
+            <a:ext uri="{FF2B5EF4-FFF2-40B4-BE49-F238E27FC236}">
+              <a16:creationId xmlns:a16="http://schemas.microsoft.com/office/drawing/2014/main" id="{E322D194-6FC4-F6C2-6304-FC462B0FCC6A}"/>
+            </a:ext>
+          </a:extLst>
+        </p:cNvPr>
+        <p:cNvGrpSpPr/>
+        <p:nvPr/>
+      </p:nvGrpSpPr>
+      <p:grpSpPr>
+        <a:xfrm>
+          <a:off x="0" y="0"/>
+          <a:ext cx="0" cy="0"/>
+          <a:chOff x="0" y="0"/>
+          <a:chExt cx="0" cy="0"/>
+        </a:xfrm>
+      </p:grpSpPr>
+      <p:graphicFrame>
+        <p:nvGraphicFramePr>
+          <p:cNvPr id="6" name="Object 5" hidden="1">
+            <a:extLst>
+              <a:ext uri="{FF2B5EF4-FFF2-40B4-BE49-F238E27FC236}">
+                <a16:creationId xmlns:a16="http://schemas.microsoft.com/office/drawing/2014/main" id="{1450181C-6C9A-9739-99CF-AD4C5359FD16}"/>
+              </a:ext>
+            </a:extLst>
+          </p:cNvPr>
+          <p:cNvGraphicFramePr>
+            <a:graphicFrameLocks noChangeAspect="1"/>
+          </p:cNvGraphicFramePr>
+          <p:nvPr>
+            <p:custDataLst>
+              <p:tags r:id="rId1"/>
+            </p:custDataLst>
+          </p:nvPr>
+        </p:nvGraphicFramePr>
+        <p:xfrm>
+          <a:off x="1588" y="1589"/>
+          <a:ext cx="1588" cy="1588"/>
+        </p:xfrm>
+        <a:graphic>
+          <a:graphicData uri="http://schemas.openxmlformats.org/presentationml/2006/ole">
+            <mc:AlternateContent xmlns:mc="http://schemas.openxmlformats.org/markup-compatibility/2006">
+              <mc:Choice xmlns:v="urn:schemas-microsoft-com:vml" Requires="v">
+                <p:oleObj name="think-cell Slide" r:id="rId3" imgW="395" imgH="394" progId="TCLayout.ActiveDocument.1">
+                  <p:embed/>
+                </p:oleObj>
+              </mc:Choice>
+              <mc:Fallback>
+                <p:oleObj name="think-cell Slide" r:id="rId3" imgW="395" imgH="394" progId="TCLayout.ActiveDocument.1">
+                  <p:embed/>
+                  <p:pic>
+                    <p:nvPicPr>
+                      <p:cNvPr id="6" name="Object 5" hidden="1">
+                        <a:extLst>
+                          <a:ext uri="{FF2B5EF4-FFF2-40B4-BE49-F238E27FC236}">
+                            <a16:creationId xmlns:a16="http://schemas.microsoft.com/office/drawing/2014/main" id="{1ABB9CBC-6DA6-9AFC-AFA6-E022FEC7F522}"/>
+                          </a:ext>
+                        </a:extLst>
+                      </p:cNvPr>
+                      <p:cNvPicPr/>
+                      <p:nvPr/>
+                    </p:nvPicPr>
+                    <p:blipFill>
+                      <a:blip r:embed="rId4"/>
+                      <a:stretch>
+                        <a:fillRect/>
+                      </a:stretch>
+                    </p:blipFill>
+                    <p:spPr>
+                      <a:xfrm>
+                        <a:off x="1588" y="1589"/>
+                        <a:ext cx="1588" cy="1588"/>
+                      </a:xfrm>
+                      <a:prstGeom prst="rect">
+                        <a:avLst/>
+                      </a:prstGeom>
+                    </p:spPr>
+                  </p:pic>
+                </p:oleObj>
+              </mc:Fallback>
+            </mc:AlternateContent>
+          </a:graphicData>
+        </a:graphic>
+      </p:graphicFrame>
+      <p:sp>
+        <p:nvSpPr>
+          <p:cNvPr id="4" name="Slide Number Placeholder 3">
+            <a:extLst>
+              <a:ext uri="{FF2B5EF4-FFF2-40B4-BE49-F238E27FC236}">
+                <a16:creationId xmlns:a16="http://schemas.microsoft.com/office/drawing/2014/main" id="{76CFAFAB-7D37-A92C-247B-126FAD1DACB9}"/>
+              </a:ext>
+            </a:extLst>
+          </p:cNvPr>
+          <p:cNvSpPr>
+            <a:spLocks noGrp="1"/>
+          </p:cNvSpPr>
+          <p:nvPr>
+            <p:ph type="sldNum" sz="quarter" idx="10"/>
+          </p:nvPr>
+        </p:nvSpPr>
+        <p:spPr/>
+        <p:txBody>
+          <a:bodyPr/>
+          <a:lstStyle/>
+          <a:p>
+            <a:fld id="{4F9AC08D-23A9-440E-BCB9-AA1E9877CC38}" type="slidenum">
+              <a:rPr lang="en-US" smtClean="0"/>
+              <a:pPr/>
+              <a:t>10</a:t>
+            </a:fld>
+            <a:endParaRPr lang="en-US"/>
+          </a:p>
+        </p:txBody>
+      </p:sp>
+      <p:sp>
+        <p:nvSpPr>
+          <p:cNvPr id="2" name="Title 1">
+            <a:extLst>
+              <a:ext uri="{FF2B5EF4-FFF2-40B4-BE49-F238E27FC236}">
+                <a16:creationId xmlns:a16="http://schemas.microsoft.com/office/drawing/2014/main" id="{E437A670-36AA-CC09-B296-4C4B661C527F}"/>
+              </a:ext>
+            </a:extLst>
+          </p:cNvPr>
+          <p:cNvSpPr>
+            <a:spLocks noGrp="1"/>
+          </p:cNvSpPr>
+          <p:nvPr>
+            <p:ph type="title"/>
+          </p:nvPr>
+        </p:nvSpPr>
+        <p:spPr/>
+        <p:txBody>
+          <a:bodyPr/>
+          <a:lstStyle/>
+          <a:p>
+            <a:r>
+              <a:rPr lang="en-US" dirty="0"/>
+              <a:t>Trade-offs</a:t>
+            </a:r>
+          </a:p>
+        </p:txBody>
+      </p:sp>
+      <p:sp>
+        <p:nvSpPr>
+          <p:cNvPr id="5" name="TextBox 4">
+            <a:extLst>
+              <a:ext uri="{FF2B5EF4-FFF2-40B4-BE49-F238E27FC236}">
+                <a16:creationId xmlns:a16="http://schemas.microsoft.com/office/drawing/2014/main" id="{B64BD812-C79A-FCEC-2246-F4850105B375}"/>
+              </a:ext>
+            </a:extLst>
+          </p:cNvPr>
+          <p:cNvSpPr txBox="1"/>
+          <p:nvPr/>
+        </p:nvSpPr>
+        <p:spPr>
+          <a:xfrm>
+            <a:off x="370417" y="1280818"/>
+            <a:ext cx="9285648" cy="369332"/>
+          </a:xfrm>
+          <a:prstGeom prst="rect">
+            <a:avLst/>
+          </a:prstGeom>
+          <a:noFill/>
+        </p:spPr>
+        <p:txBody>
+          <a:bodyPr wrap="square">
+            <a:spAutoFit/>
+          </a:bodyPr>
+          <a:lstStyle/>
+          <a:p>
+            <a:r>
+              <a:rPr lang="en-AU" b="1" dirty="0"/>
+              <a:t>Capital mobility and investment</a:t>
+            </a:r>
+          </a:p>
+        </p:txBody>
+      </p:sp>
+      <p:sp>
+        <p:nvSpPr>
+          <p:cNvPr id="7" name="TextBox 6">
+            <a:extLst>
+              <a:ext uri="{FF2B5EF4-FFF2-40B4-BE49-F238E27FC236}">
+                <a16:creationId xmlns:a16="http://schemas.microsoft.com/office/drawing/2014/main" id="{4941146A-F54E-1646-62E0-8A1933621468}"/>
+              </a:ext>
+            </a:extLst>
+          </p:cNvPr>
+          <p:cNvSpPr txBox="1"/>
+          <p:nvPr/>
+        </p:nvSpPr>
+        <p:spPr>
+          <a:xfrm>
+            <a:off x="370417" y="3656246"/>
+            <a:ext cx="9285648" cy="369332"/>
+          </a:xfrm>
+          <a:prstGeom prst="rect">
+            <a:avLst/>
+          </a:prstGeom>
+          <a:noFill/>
+        </p:spPr>
+        <p:txBody>
+          <a:bodyPr wrap="square">
+            <a:spAutoFit/>
+          </a:bodyPr>
+          <a:lstStyle/>
+          <a:p>
+            <a:r>
+              <a:rPr lang="en-AU" b="1" dirty="0"/>
+              <a:t>Compliance costs</a:t>
+            </a:r>
+          </a:p>
+        </p:txBody>
+      </p:sp>
+    </p:spTree>
+    <p:extLst>
+      <p:ext uri="{BB962C8B-B14F-4D97-AF65-F5344CB8AC3E}">
+        <p14:creationId xmlns:p14="http://schemas.microsoft.com/office/powerpoint/2010/main" val="163851469"/>
+      </p:ext>
+    </p:extLst>
+  </p:cSld>
+  <p:clrMapOvr>
+    <a:masterClrMapping/>
+  </p:clrMapOvr>
+</p:sld>
+</file>
+
 <file path=ppt/slides/slide2.xml><?xml version="1.0" encoding="utf-8"?>
 <p:sld xmlns:a="http://schemas.openxmlformats.org/drawingml/2006/main" xmlns:r="http://schemas.openxmlformats.org/officeDocument/2006/relationships" xmlns:p="http://schemas.openxmlformats.org/presentationml/2006/main">
   <p:cSld>
@@ -20312,8 +20547,8 @@
         </p:nvSpPr>
         <p:spPr>
           <a:xfrm>
-            <a:off x="651155" y="4742827"/>
-            <a:ext cx="10576505" cy="984885"/>
+            <a:off x="459131" y="1971169"/>
+            <a:ext cx="6060541" cy="3739485"/>
           </a:xfrm>
           <a:prstGeom prst="rect">
             <a:avLst/>
@@ -20361,6 +20596,60 @@
             </a:endParaRPr>
           </a:p>
           <a:p>
+            <a:pPr marL="800100" lvl="1" indent="-342900">
+              <a:spcAft>
+                <a:spcPts val="600"/>
+              </a:spcAft>
+              <a:buFont typeface="Arial" panose="020B0604020202020204" pitchFamily="34" charset="0"/>
+              <a:buChar char="•"/>
+            </a:pPr>
+            <a:r>
+              <a:rPr lang="en-AU" sz="1600" dirty="0">
+                <a:solidFill>
+                  <a:schemeClr val="bg1">
+                    <a:lumMod val="50000"/>
+                  </a:schemeClr>
+                </a:solidFill>
+              </a:rPr>
+              <a:t>Details are currently limited – but these savings were the main drivers of surplus returning.</a:t>
+            </a:r>
+          </a:p>
+          <a:p>
+            <a:pPr marL="800100" lvl="1" indent="-342900">
+              <a:spcAft>
+                <a:spcPts val="600"/>
+              </a:spcAft>
+              <a:buFont typeface="Arial" panose="020B0604020202020204" pitchFamily="34" charset="0"/>
+              <a:buChar char="•"/>
+            </a:pPr>
+            <a:r>
+              <a:rPr lang="en-AU" sz="1600" dirty="0">
+                <a:solidFill>
+                  <a:schemeClr val="bg1">
+                    <a:lumMod val="50000"/>
+                  </a:schemeClr>
+                </a:solidFill>
+              </a:rPr>
+              <a:t>Thriving kids program a significant part, however a lot of community and social support likely to be removed.</a:t>
+            </a:r>
+          </a:p>
+          <a:p>
+            <a:pPr marL="342900" indent="-342900">
+              <a:spcAft>
+                <a:spcPts val="600"/>
+              </a:spcAft>
+              <a:buFont typeface="+mj-lt"/>
+              <a:buAutoNum type="arabicPeriod"/>
+            </a:pPr>
+            <a:endParaRPr lang="en-AU" sz="1600" dirty="0">
+              <a:solidFill>
+                <a:schemeClr val="bg1">
+                  <a:lumMod val="50000"/>
+                </a:schemeClr>
+              </a:solidFill>
+            </a:endParaRPr>
+          </a:p>
+          <a:p>
             <a:pPr marL="342900" indent="-342900">
               <a:spcAft>
                 <a:spcPts val="600"/>
@@ -20379,44 +20668,77 @@
               <a:t>Tax reforms.</a:t>
             </a:r>
           </a:p>
-        </p:txBody>
-      </p:sp>
-      <p:sp>
-        <p:nvSpPr>
-          <p:cNvPr id="10" name="TextBox 9">
-            <a:extLst>
-              <a:ext uri="{FF2B5EF4-FFF2-40B4-BE49-F238E27FC236}">
-                <a16:creationId xmlns:a16="http://schemas.microsoft.com/office/drawing/2014/main" id="{64B9B88B-4DFF-F280-F5AC-E60B2D0EE1A0}"/>
-              </a:ext>
-            </a:extLst>
-          </p:cNvPr>
-          <p:cNvSpPr txBox="1"/>
-          <p:nvPr/>
-        </p:nvSpPr>
-        <p:spPr>
-          <a:xfrm>
-            <a:off x="250372" y="6093113"/>
-            <a:ext cx="10977288" cy="369332"/>
-          </a:xfrm>
-          <a:prstGeom prst="rect">
-            <a:avLst/>
-          </a:prstGeom>
-          <a:noFill/>
-        </p:spPr>
-        <p:txBody>
-          <a:bodyPr wrap="square">
-            <a:spAutoFit/>
-          </a:bodyPr>
-          <a:lstStyle/>
-          <a:p>
-            <a:pPr>
+          <a:p>
+            <a:pPr marL="342900" indent="-342900">
               <a:spcAft>
                 <a:spcPts val="600"/>
               </a:spcAft>
+              <a:buFont typeface="+mj-lt"/>
+              <a:buAutoNum type="arabicPeriod"/>
             </a:pPr>
-            <a:r>
-              <a:rPr lang="en-AU" dirty="0"/>
-              <a:t>Today’s focus is on a subset of the tax reforms – the changes to the taxation of capital gains.</a:t>
+            <a:endParaRPr lang="en-AU" sz="1600" dirty="0">
+              <a:solidFill>
+                <a:schemeClr val="bg1">
+                  <a:lumMod val="50000"/>
+                </a:schemeClr>
+              </a:solidFill>
+            </a:endParaRPr>
+          </a:p>
+          <a:p>
+            <a:pPr marL="800100" lvl="1" indent="-342900">
+              <a:spcAft>
+                <a:spcPts val="600"/>
+              </a:spcAft>
+              <a:buFont typeface="Arial" panose="020B0604020202020204" pitchFamily="34" charset="0"/>
+              <a:buChar char="•"/>
+            </a:pPr>
+            <a:r>
+              <a:rPr lang="en-AU" sz="1600" dirty="0">
+                <a:solidFill>
+                  <a:schemeClr val="bg1">
+                    <a:lumMod val="50000"/>
+                  </a:schemeClr>
+                </a:solidFill>
+              </a:rPr>
+              <a:t>WATO and the future taxation of labour income.</a:t>
+            </a:r>
+          </a:p>
+          <a:p>
+            <a:pPr marL="800100" lvl="1" indent="-342900">
+              <a:spcAft>
+                <a:spcPts val="600"/>
+              </a:spcAft>
+              <a:buFont typeface="Arial" panose="020B0604020202020204" pitchFamily="34" charset="0"/>
+              <a:buChar char="•"/>
+            </a:pPr>
+            <a:r>
+              <a:rPr lang="en-AU" sz="1600" dirty="0">
+                <a:solidFill>
+                  <a:schemeClr val="bg1">
+                    <a:lumMod val="50000"/>
+                  </a:schemeClr>
+                </a:solidFill>
+              </a:rPr>
+              <a:t>Liquidity and R&amp;D policies for small and young firms.</a:t>
+            </a:r>
+          </a:p>
+          <a:p>
+            <a:pPr marL="800100" lvl="1" indent="-342900">
+              <a:spcAft>
+                <a:spcPts val="600"/>
+              </a:spcAft>
+              <a:buFont typeface="Arial" panose="020B0604020202020204" pitchFamily="34" charset="0"/>
+              <a:buChar char="•"/>
+            </a:pPr>
+            <a:r>
+              <a:rPr lang="en-AU" sz="1600" b="1" dirty="0">
+                <a:solidFill>
+                  <a:schemeClr val="accent3">
+                    <a:lumMod val="50000"/>
+                  </a:schemeClr>
+                </a:solidFill>
+              </a:rPr>
+              <a:t>Capital gains and negative gearing.</a:t>
             </a:r>
           </a:p>
         </p:txBody>
@@ -20425,6 +20747,548 @@
     <p:extLst>
       <p:ext uri="{BB962C8B-B14F-4D97-AF65-F5344CB8AC3E}">
         <p14:creationId xmlns:p14="http://schemas.microsoft.com/office/powerpoint/2010/main" val="1207251420"/>
+      </p:ext>
+    </p:extLst>
+  </p:cSld>
+  <p:clrMapOvr>
+    <a:masterClrMapping/>
+  </p:clrMapOvr>
+  <p:timing>
+    <p:tnLst>
+      <p:par>
+        <p:cTn id="1" dur="indefinite" restart="never" nodeType="tmRoot">
+          <p:childTnLst>
+            <p:seq concurrent="1" nextAc="seek">
+              <p:cTn id="2" dur="indefinite" nodeType="mainSeq">
+                <p:childTnLst>
+                  <p:par>
+                    <p:cTn id="3" fill="hold">
+                      <p:stCondLst>
+                        <p:cond delay="indefinite"/>
+                      </p:stCondLst>
+                      <p:childTnLst>
+                        <p:par>
+                          <p:cTn id="4" fill="hold">
+                            <p:stCondLst>
+                              <p:cond delay="0"/>
+                            </p:stCondLst>
+                            <p:childTnLst>
+                              <p:par>
+                                <p:cTn id="5" presetID="1" presetClass="entr" presetSubtype="0" fill="hold" grpId="0" nodeType="clickEffect">
+                                  <p:stCondLst>
+                                    <p:cond delay="0"/>
+                                  </p:stCondLst>
+                                  <p:childTnLst>
+                                    <p:set>
+                                      <p:cBhvr>
+                                        <p:cTn id="6" dur="1" fill="hold">
+                                          <p:stCondLst>
+                                            <p:cond delay="0"/>
+                                          </p:stCondLst>
+                                        </p:cTn>
+                                        <p:tgtEl>
+                                          <p:spTgt spid="8"/>
+                                        </p:tgtEl>
+                                        <p:attrNameLst>
+                                          <p:attrName>style.visibility</p:attrName>
+                                        </p:attrNameLst>
+                                      </p:cBhvr>
+                                      <p:to>
+                                        <p:strVal val="visible"/>
+                                      </p:to>
+                                    </p:set>
+                                  </p:childTnLst>
+                                </p:cTn>
+                              </p:par>
+                            </p:childTnLst>
+                          </p:cTn>
+                        </p:par>
+                      </p:childTnLst>
+                    </p:cTn>
+                  </p:par>
+                </p:childTnLst>
+              </p:cTn>
+              <p:prevCondLst>
+                <p:cond evt="onPrev" delay="0">
+                  <p:tgtEl>
+                    <p:sldTgt/>
+                  </p:tgtEl>
+                </p:cond>
+              </p:prevCondLst>
+              <p:nextCondLst>
+                <p:cond evt="onNext" delay="0">
+                  <p:tgtEl>
+                    <p:sldTgt/>
+                  </p:tgtEl>
+                </p:cond>
+              </p:nextCondLst>
+            </p:seq>
+          </p:childTnLst>
+        </p:cTn>
+      </p:par>
+    </p:tnLst>
+    <p:bldLst>
+      <p:bldP spid="8" grpId="0"/>
+    </p:bldLst>
+  </p:timing>
+</p:sld>
+</file>
+
+<file path=ppt/slides/slide3.xml><?xml version="1.0" encoding="utf-8"?>
+<p:sld xmlns:a="http://schemas.openxmlformats.org/drawingml/2006/main" xmlns:r="http://schemas.openxmlformats.org/officeDocument/2006/relationships" xmlns:p="http://schemas.openxmlformats.org/presentationml/2006/main">
+  <p:cSld>
+    <p:spTree>
+      <p:nvGrpSpPr>
+        <p:cNvPr id="1" name="">
+          <a:extLst>
+            <a:ext uri="{FF2B5EF4-FFF2-40B4-BE49-F238E27FC236}">
+              <a16:creationId xmlns:a16="http://schemas.microsoft.com/office/drawing/2014/main" id="{258DA847-21CE-9729-974A-AFE855A24654}"/>
+            </a:ext>
+          </a:extLst>
+        </p:cNvPr>
+        <p:cNvGrpSpPr/>
+        <p:nvPr/>
+      </p:nvGrpSpPr>
+      <p:grpSpPr>
+        <a:xfrm>
+          <a:off x="0" y="0"/>
+          <a:ext cx="0" cy="0"/>
+          <a:chOff x="0" y="0"/>
+          <a:chExt cx="0" cy="0"/>
+        </a:xfrm>
+      </p:grpSpPr>
+      <p:graphicFrame>
+        <p:nvGraphicFramePr>
+          <p:cNvPr id="6" name="Object 5" hidden="1">
+            <a:extLst>
+              <a:ext uri="{FF2B5EF4-FFF2-40B4-BE49-F238E27FC236}">
+                <a16:creationId xmlns:a16="http://schemas.microsoft.com/office/drawing/2014/main" id="{53BDDBE8-1987-5384-B32F-56EFA0DF527A}"/>
+              </a:ext>
+            </a:extLst>
+          </p:cNvPr>
+          <p:cNvGraphicFramePr>
+            <a:graphicFrameLocks noChangeAspect="1"/>
+          </p:cNvGraphicFramePr>
+          <p:nvPr>
+            <p:custDataLst>
+              <p:tags r:id="rId1"/>
+            </p:custDataLst>
+          </p:nvPr>
+        </p:nvGraphicFramePr>
+        <p:xfrm>
+          <a:off x="1588" y="1589"/>
+          <a:ext cx="1588" cy="1588"/>
+        </p:xfrm>
+        <a:graphic>
+          <a:graphicData uri="http://schemas.openxmlformats.org/presentationml/2006/ole">
+            <mc:AlternateContent xmlns:mc="http://schemas.openxmlformats.org/markup-compatibility/2006">
+              <mc:Choice xmlns:v="urn:schemas-microsoft-com:vml" Requires="v">
+                <p:oleObj name="think-cell Slide" r:id="rId3" imgW="395" imgH="394" progId="TCLayout.ActiveDocument.1">
+                  <p:embed/>
+                </p:oleObj>
+              </mc:Choice>
+              <mc:Fallback>
+                <p:oleObj name="think-cell Slide" r:id="rId3" imgW="395" imgH="394" progId="TCLayout.ActiveDocument.1">
+                  <p:embed/>
+                  <p:pic>
+                    <p:nvPicPr>
+                      <p:cNvPr id="6" name="Object 5" hidden="1">
+                        <a:extLst>
+                          <a:ext uri="{FF2B5EF4-FFF2-40B4-BE49-F238E27FC236}">
+                            <a16:creationId xmlns:a16="http://schemas.microsoft.com/office/drawing/2014/main" id="{1ABB9CBC-6DA6-9AFC-AFA6-E022FEC7F522}"/>
+                          </a:ext>
+                        </a:extLst>
+                      </p:cNvPr>
+                      <p:cNvPicPr/>
+                      <p:nvPr/>
+                    </p:nvPicPr>
+                    <p:blipFill>
+                      <a:blip r:embed="rId4"/>
+                      <a:stretch>
+                        <a:fillRect/>
+                      </a:stretch>
+                    </p:blipFill>
+                    <p:spPr>
+                      <a:xfrm>
+                        <a:off x="1588" y="1589"/>
+                        <a:ext cx="1588" cy="1588"/>
+                      </a:xfrm>
+                      <a:prstGeom prst="rect">
+                        <a:avLst/>
+                      </a:prstGeom>
+                    </p:spPr>
+                  </p:pic>
+                </p:oleObj>
+              </mc:Fallback>
+            </mc:AlternateContent>
+          </a:graphicData>
+        </a:graphic>
+      </p:graphicFrame>
+      <p:sp>
+        <p:nvSpPr>
+          <p:cNvPr id="4" name="Slide Number Placeholder 3">
+            <a:extLst>
+              <a:ext uri="{FF2B5EF4-FFF2-40B4-BE49-F238E27FC236}">
+                <a16:creationId xmlns:a16="http://schemas.microsoft.com/office/drawing/2014/main" id="{2F82E212-2DF4-4F6B-87E8-43D37398DF18}"/>
+              </a:ext>
+            </a:extLst>
+          </p:cNvPr>
+          <p:cNvSpPr>
+            <a:spLocks noGrp="1"/>
+          </p:cNvSpPr>
+          <p:nvPr>
+            <p:ph type="sldNum" sz="quarter" idx="10"/>
+          </p:nvPr>
+        </p:nvSpPr>
+        <p:spPr/>
+        <p:txBody>
+          <a:bodyPr/>
+          <a:lstStyle/>
+          <a:p>
+            <a:fld id="{4F9AC08D-23A9-440E-BCB9-AA1E9877CC38}" type="slidenum">
+              <a:rPr lang="en-US" smtClean="0"/>
+              <a:pPr/>
+              <a:t>3</a:t>
+            </a:fld>
+            <a:endParaRPr lang="en-US"/>
+          </a:p>
+        </p:txBody>
+      </p:sp>
+      <p:sp>
+        <p:nvSpPr>
+          <p:cNvPr id="2" name="Title 1">
+            <a:extLst>
+              <a:ext uri="{FF2B5EF4-FFF2-40B4-BE49-F238E27FC236}">
+                <a16:creationId xmlns:a16="http://schemas.microsoft.com/office/drawing/2014/main" id="{C777D214-144D-E2E3-F1E8-57B65286698E}"/>
+              </a:ext>
+            </a:extLst>
+          </p:cNvPr>
+          <p:cNvSpPr>
+            <a:spLocks noGrp="1"/>
+          </p:cNvSpPr>
+          <p:nvPr>
+            <p:ph type="title"/>
+          </p:nvPr>
+        </p:nvSpPr>
+        <p:spPr/>
+        <p:txBody>
+          <a:bodyPr/>
+          <a:lstStyle/>
+          <a:p>
+            <a:r>
+              <a:rPr lang="en-US" dirty="0"/>
+              <a:t>Taxation of income</a:t>
+            </a:r>
+          </a:p>
+        </p:txBody>
+      </p:sp>
+      <p:sp>
+        <p:nvSpPr>
+          <p:cNvPr id="5" name="TextBox 4">
+            <a:extLst>
+              <a:ext uri="{FF2B5EF4-FFF2-40B4-BE49-F238E27FC236}">
+                <a16:creationId xmlns:a16="http://schemas.microsoft.com/office/drawing/2014/main" id="{27376E34-ED54-32D7-B50B-1E9101B4A63F}"/>
+              </a:ext>
+            </a:extLst>
+          </p:cNvPr>
+          <p:cNvSpPr txBox="1"/>
+          <p:nvPr/>
+        </p:nvSpPr>
+        <p:spPr>
+          <a:xfrm>
+            <a:off x="370417" y="1017088"/>
+            <a:ext cx="10903190" cy="369332"/>
+          </a:xfrm>
+          <a:prstGeom prst="rect">
+            <a:avLst/>
+          </a:prstGeom>
+          <a:noFill/>
+        </p:spPr>
+        <p:txBody>
+          <a:bodyPr wrap="square">
+            <a:spAutoFit/>
+          </a:bodyPr>
+          <a:lstStyle/>
+          <a:p>
+            <a:r>
+              <a:rPr lang="en-AU" dirty="0"/>
+              <a:t>Understanding taxation of capital gains requires thinking about </a:t>
+            </a:r>
+            <a:r>
+              <a:rPr lang="en-AU" i="1" dirty="0"/>
+              <a:t>income tax</a:t>
+            </a:r>
+            <a:r>
+              <a:rPr lang="en-AU" dirty="0"/>
+              <a:t>.</a:t>
+            </a:r>
+          </a:p>
+        </p:txBody>
+      </p:sp>
+      <p:sp>
+        <p:nvSpPr>
+          <p:cNvPr id="15" name="TextBox 14">
+            <a:extLst>
+              <a:ext uri="{FF2B5EF4-FFF2-40B4-BE49-F238E27FC236}">
+                <a16:creationId xmlns:a16="http://schemas.microsoft.com/office/drawing/2014/main" id="{2D214302-DD50-AE5C-904C-7E5F23089FDC}"/>
+              </a:ext>
+            </a:extLst>
+          </p:cNvPr>
+          <p:cNvSpPr txBox="1"/>
+          <p:nvPr/>
+        </p:nvSpPr>
+        <p:spPr>
+          <a:xfrm>
+            <a:off x="370417" y="2452412"/>
+            <a:ext cx="10903190" cy="646331"/>
+          </a:xfrm>
+          <a:prstGeom prst="rect">
+            <a:avLst/>
+          </a:prstGeom>
+          <a:noFill/>
+        </p:spPr>
+        <p:txBody>
+          <a:bodyPr wrap="square">
+            <a:spAutoFit/>
+          </a:bodyPr>
+          <a:lstStyle/>
+          <a:p>
+            <a:pPr marL="285750" indent="-285750">
+              <a:spcAft>
+                <a:spcPts val="600"/>
+              </a:spcAft>
+              <a:buFont typeface="Arial" panose="020B0604020202020204" pitchFamily="34" charset="0"/>
+              <a:buChar char="•"/>
+            </a:pPr>
+            <a:r>
+              <a:rPr lang="en-AU" dirty="0"/>
+              <a:t>Tax changes in the </a:t>
+            </a:r>
+            <a:r>
+              <a:rPr lang="en-AU" i="1" dirty="0"/>
+              <a:t>capacity to consume</a:t>
+            </a:r>
+            <a:r>
+              <a:rPr lang="en-AU" dirty="0"/>
+              <a:t> irrespective of how we do so (</a:t>
+            </a:r>
+            <a:r>
+              <a:rPr lang="en-AU" dirty="0">
+                <a:hlinkClick r:id="rId5"/>
+              </a:rPr>
+              <a:t>https://e61.in/e61-capital-income-tax-calculator/</a:t>
+            </a:r>
+            <a:r>
+              <a:rPr lang="en-AU" dirty="0"/>
+              <a:t>).</a:t>
+            </a:r>
+          </a:p>
+        </p:txBody>
+      </p:sp>
+      <p:sp>
+        <p:nvSpPr>
+          <p:cNvPr id="8" name="TextBox 7">
+            <a:extLst>
+              <a:ext uri="{FF2B5EF4-FFF2-40B4-BE49-F238E27FC236}">
+                <a16:creationId xmlns:a16="http://schemas.microsoft.com/office/drawing/2014/main" id="{B2B56CC1-6607-B13A-2A18-913AED79043A}"/>
+              </a:ext>
+            </a:extLst>
+          </p:cNvPr>
+          <p:cNvSpPr txBox="1"/>
+          <p:nvPr/>
+        </p:nvSpPr>
+        <p:spPr>
+          <a:xfrm>
+            <a:off x="370417" y="1492022"/>
+            <a:ext cx="10903190" cy="369332"/>
+          </a:xfrm>
+          <a:prstGeom prst="rect">
+            <a:avLst/>
+          </a:prstGeom>
+          <a:noFill/>
+        </p:spPr>
+        <p:txBody>
+          <a:bodyPr wrap="square">
+            <a:spAutoFit/>
+          </a:bodyPr>
+          <a:lstStyle/>
+          <a:p>
+            <a:r>
+              <a:rPr lang="en-AU" dirty="0"/>
+              <a:t>Tax capital like wages?</a:t>
+            </a:r>
+          </a:p>
+        </p:txBody>
+      </p:sp>
+      <p:sp>
+        <p:nvSpPr>
+          <p:cNvPr id="12" name="TextBox 11">
+            <a:extLst>
+              <a:ext uri="{FF2B5EF4-FFF2-40B4-BE49-F238E27FC236}">
+                <a16:creationId xmlns:a16="http://schemas.microsoft.com/office/drawing/2014/main" id="{20921FFC-FCA9-4528-4B62-F3467CF89EAD}"/>
+              </a:ext>
+            </a:extLst>
+          </p:cNvPr>
+          <p:cNvSpPr txBox="1"/>
+          <p:nvPr/>
+        </p:nvSpPr>
+        <p:spPr>
+          <a:xfrm>
+            <a:off x="370417" y="1996743"/>
+            <a:ext cx="10903190" cy="369332"/>
+          </a:xfrm>
+          <a:prstGeom prst="rect">
+            <a:avLst/>
+          </a:prstGeom>
+          <a:noFill/>
+        </p:spPr>
+        <p:txBody>
+          <a:bodyPr wrap="square">
+            <a:spAutoFit/>
+          </a:bodyPr>
+          <a:lstStyle/>
+          <a:p>
+            <a:r>
+              <a:rPr lang="en-AU" dirty="0"/>
+              <a:t>What is income?</a:t>
+            </a:r>
+          </a:p>
+        </p:txBody>
+      </p:sp>
+      <p:pic>
+        <p:nvPicPr>
+          <p:cNvPr id="7" name="Picture 6">
+            <a:extLst>
+              <a:ext uri="{FF2B5EF4-FFF2-40B4-BE49-F238E27FC236}">
+                <a16:creationId xmlns:a16="http://schemas.microsoft.com/office/drawing/2014/main" id="{6F11C591-ABB2-82C5-528D-CA60C1415F53}"/>
+              </a:ext>
+            </a:extLst>
+          </p:cNvPr>
+          <p:cNvPicPr>
+            <a:picLocks noChangeAspect="1"/>
+          </p:cNvPicPr>
+          <p:nvPr/>
+        </p:nvPicPr>
+        <p:blipFill>
+          <a:blip r:embed="rId6"/>
+          <a:stretch>
+            <a:fillRect/>
+          </a:stretch>
+        </p:blipFill>
+        <p:spPr>
+          <a:xfrm>
+            <a:off x="6915514" y="3582722"/>
+            <a:ext cx="3231820" cy="3160530"/>
+          </a:xfrm>
+          <a:prstGeom prst="rect">
+            <a:avLst/>
+          </a:prstGeom>
+        </p:spPr>
+      </p:pic>
+      <p:pic>
+        <p:nvPicPr>
+          <p:cNvPr id="10" name="Picture 9">
+            <a:extLst>
+              <a:ext uri="{FF2B5EF4-FFF2-40B4-BE49-F238E27FC236}">
+                <a16:creationId xmlns:a16="http://schemas.microsoft.com/office/drawing/2014/main" id="{00D472B1-9D68-5A5F-A34B-6BBE6CD334CB}"/>
+              </a:ext>
+            </a:extLst>
+          </p:cNvPr>
+          <p:cNvPicPr>
+            <a:picLocks noChangeAspect="1"/>
+          </p:cNvPicPr>
+          <p:nvPr/>
+        </p:nvPicPr>
+        <p:blipFill>
+          <a:blip r:embed="rId7"/>
+          <a:stretch>
+            <a:fillRect/>
+          </a:stretch>
+        </p:blipFill>
+        <p:spPr>
+          <a:xfrm>
+            <a:off x="1580473" y="3651566"/>
+            <a:ext cx="3186533" cy="3022842"/>
+          </a:xfrm>
+          <a:prstGeom prst="rect">
+            <a:avLst/>
+          </a:prstGeom>
+        </p:spPr>
+      </p:pic>
+      <p:sp>
+        <p:nvSpPr>
+          <p:cNvPr id="11" name="TextBox 10">
+            <a:extLst>
+              <a:ext uri="{FF2B5EF4-FFF2-40B4-BE49-F238E27FC236}">
+                <a16:creationId xmlns:a16="http://schemas.microsoft.com/office/drawing/2014/main" id="{62DD4D2D-A3CB-1416-C0FF-C490D822C783}"/>
+              </a:ext>
+            </a:extLst>
+          </p:cNvPr>
+          <p:cNvSpPr txBox="1"/>
+          <p:nvPr/>
+        </p:nvSpPr>
+        <p:spPr>
+          <a:xfrm>
+            <a:off x="2044666" y="3213390"/>
+            <a:ext cx="2071401" cy="369332"/>
+          </a:xfrm>
+          <a:prstGeom prst="rect">
+            <a:avLst/>
+          </a:prstGeom>
+          <a:noFill/>
+        </p:spPr>
+        <p:txBody>
+          <a:bodyPr wrap="none" rtlCol="0">
+            <a:spAutoFit/>
+          </a:bodyPr>
+          <a:lstStyle/>
+          <a:p>
+            <a:r>
+              <a:rPr lang="en-AU" b="1" dirty="0"/>
+              <a:t>Fixer-upper sale</a:t>
+            </a:r>
+          </a:p>
+        </p:txBody>
+      </p:sp>
+      <p:sp>
+        <p:nvSpPr>
+          <p:cNvPr id="14" name="TextBox 13">
+            <a:extLst>
+              <a:ext uri="{FF2B5EF4-FFF2-40B4-BE49-F238E27FC236}">
+                <a16:creationId xmlns:a16="http://schemas.microsoft.com/office/drawing/2014/main" id="{EDE1B8EB-BCC7-F68D-7B33-F4C6B61BB2FD}"/>
+              </a:ext>
+            </a:extLst>
+          </p:cNvPr>
+          <p:cNvSpPr txBox="1"/>
+          <p:nvPr/>
+        </p:nvSpPr>
+        <p:spPr>
+          <a:xfrm>
+            <a:off x="6686770" y="3217236"/>
+            <a:ext cx="3836307" cy="369332"/>
+          </a:xfrm>
+          <a:prstGeom prst="rect">
+            <a:avLst/>
+          </a:prstGeom>
+          <a:noFill/>
+        </p:spPr>
+        <p:txBody>
+          <a:bodyPr wrap="none" rtlCol="0">
+            <a:spAutoFit/>
+          </a:bodyPr>
+          <a:lstStyle/>
+          <a:p>
+            <a:r>
+              <a:rPr lang="en-AU" b="1" dirty="0"/>
+              <a:t>High inflation property investor</a:t>
+            </a:r>
+          </a:p>
+        </p:txBody>
+      </p:sp>
+    </p:spTree>
+    <p:extLst>
+      <p:ext uri="{BB962C8B-B14F-4D97-AF65-F5344CB8AC3E}">
+        <p14:creationId xmlns:p14="http://schemas.microsoft.com/office/powerpoint/2010/main" val="1512222959"/>
       </p:ext>
     </p:extLst>
   </p:cSld>
@@ -20510,7 +21374,196 @@
                                           </p:stCondLst>
                                         </p:cTn>
                                         <p:tgtEl>
+                                          <p:spTgt spid="12"/>
+                                        </p:tgtEl>
+                                        <p:attrNameLst>
+                                          <p:attrName>style.visibility</p:attrName>
+                                        </p:attrNameLst>
+                                      </p:cBhvr>
+                                      <p:to>
+                                        <p:strVal val="visible"/>
+                                      </p:to>
+                                    </p:set>
+                                  </p:childTnLst>
+                                </p:cTn>
+                              </p:par>
+                            </p:childTnLst>
+                          </p:cTn>
+                        </p:par>
+                      </p:childTnLst>
+                    </p:cTn>
+                  </p:par>
+                  <p:par>
+                    <p:cTn id="11" fill="hold">
+                      <p:stCondLst>
+                        <p:cond delay="indefinite"/>
+                      </p:stCondLst>
+                      <p:childTnLst>
+                        <p:par>
+                          <p:cTn id="12" fill="hold">
+                            <p:stCondLst>
+                              <p:cond delay="0"/>
+                            </p:stCondLst>
+                            <p:childTnLst>
+                              <p:par>
+                                <p:cTn id="13" presetID="1" presetClass="entr" presetSubtype="0" fill="hold" grpId="0" nodeType="clickEffect">
+                                  <p:stCondLst>
+                                    <p:cond delay="0"/>
+                                  </p:stCondLst>
+                                  <p:childTnLst>
+                                    <p:set>
+                                      <p:cBhvr>
+                                        <p:cTn id="14" dur="1" fill="hold">
+                                          <p:stCondLst>
+                                            <p:cond delay="0"/>
+                                          </p:stCondLst>
+                                        </p:cTn>
+                                        <p:tgtEl>
+                                          <p:spTgt spid="15"/>
+                                        </p:tgtEl>
+                                        <p:attrNameLst>
+                                          <p:attrName>style.visibility</p:attrName>
+                                        </p:attrNameLst>
+                                      </p:cBhvr>
+                                      <p:to>
+                                        <p:strVal val="visible"/>
+                                      </p:to>
+                                    </p:set>
+                                  </p:childTnLst>
+                                </p:cTn>
+                              </p:par>
+                            </p:childTnLst>
+                          </p:cTn>
+                        </p:par>
+                      </p:childTnLst>
+                    </p:cTn>
+                  </p:par>
+                  <p:par>
+                    <p:cTn id="15" fill="hold">
+                      <p:stCondLst>
+                        <p:cond delay="indefinite"/>
+                      </p:stCondLst>
+                      <p:childTnLst>
+                        <p:par>
+                          <p:cTn id="16" fill="hold">
+                            <p:stCondLst>
+                              <p:cond delay="0"/>
+                            </p:stCondLst>
+                            <p:childTnLst>
+                              <p:par>
+                                <p:cTn id="17" presetID="1" presetClass="entr" presetSubtype="0" fill="hold" grpId="0" nodeType="clickEffect">
+                                  <p:stCondLst>
+                                    <p:cond delay="0"/>
+                                  </p:stCondLst>
+                                  <p:childTnLst>
+                                    <p:set>
+                                      <p:cBhvr>
+                                        <p:cTn id="18" dur="1" fill="hold">
+                                          <p:stCondLst>
+                                            <p:cond delay="0"/>
+                                          </p:stCondLst>
+                                        </p:cTn>
+                                        <p:tgtEl>
+                                          <p:spTgt spid="11"/>
+                                        </p:tgtEl>
+                                        <p:attrNameLst>
+                                          <p:attrName>style.visibility</p:attrName>
+                                        </p:attrNameLst>
+                                      </p:cBhvr>
+                                      <p:to>
+                                        <p:strVal val="visible"/>
+                                      </p:to>
+                                    </p:set>
+                                  </p:childTnLst>
+                                </p:cTn>
+                              </p:par>
+                              <p:par>
+                                <p:cTn id="19" presetID="1" presetClass="entr" presetSubtype="0" fill="hold" nodeType="withEffect">
+                                  <p:stCondLst>
+                                    <p:cond delay="0"/>
+                                  </p:stCondLst>
+                                  <p:childTnLst>
+                                    <p:set>
+                                      <p:cBhvr>
+                                        <p:cTn id="20" dur="1" fill="hold">
+                                          <p:stCondLst>
+                                            <p:cond delay="0"/>
+                                          </p:stCondLst>
+                                        </p:cTn>
+                                        <p:tgtEl>
                                           <p:spTgt spid="10"/>
+                                        </p:tgtEl>
+                                        <p:attrNameLst>
+                                          <p:attrName>style.visibility</p:attrName>
+                                        </p:attrNameLst>
+                                      </p:cBhvr>
+                                      <p:to>
+                                        <p:strVal val="visible"/>
+                                      </p:to>
+                                    </p:set>
+                                  </p:childTnLst>
+                                </p:cTn>
+                              </p:par>
+                            </p:childTnLst>
+                          </p:cTn>
+                        </p:par>
+                      </p:childTnLst>
+                    </p:cTn>
+                  </p:par>
+                  <p:par>
+                    <p:cTn id="21" fill="hold">
+                      <p:stCondLst>
+                        <p:cond delay="indefinite"/>
+                      </p:stCondLst>
+                      <p:childTnLst>
+                        <p:par>
+                          <p:cTn id="22" fill="hold">
+                            <p:stCondLst>
+                              <p:cond delay="0"/>
+                            </p:stCondLst>
+                            <p:childTnLst>
+                              <p:par>
+                                <p:cTn id="23" presetID="1" presetClass="entr" presetSubtype="0" fill="hold" grpId="0" nodeType="clickEffect">
+                                  <p:stCondLst>
+                                    <p:cond delay="0"/>
+                                  </p:stCondLst>
+                                  <p:childTnLst>
+                                    <p:set>
+                                      <p:cBhvr>
+                                        <p:cTn id="24" dur="1" fill="hold">
+                                          <p:stCondLst>
+                                            <p:cond delay="0"/>
+                                          </p:stCondLst>
+                                        </p:cTn>
+                                        <p:tgtEl>
+                                          <p:spTgt spid="14"/>
+                                        </p:tgtEl>
+                                        <p:attrNameLst>
+                                          <p:attrName>style.visibility</p:attrName>
+                                        </p:attrNameLst>
+                                      </p:cBhvr>
+                                      <p:to>
+                                        <p:strVal val="visible"/>
+                                      </p:to>
+                                    </p:set>
+                                  </p:childTnLst>
+                                </p:cTn>
+                              </p:par>
+                              <p:par>
+                                <p:cTn id="25" presetID="1" presetClass="entr" presetSubtype="0" fill="hold" nodeType="withEffect">
+                                  <p:stCondLst>
+                                    <p:cond delay="0"/>
+                                  </p:stCondLst>
+                                  <p:childTnLst>
+                                    <p:set>
+                                      <p:cBhvr>
+                                        <p:cTn id="26" dur="1" fill="hold">
+                                          <p:stCondLst>
+                                            <p:cond delay="0"/>
+                                          </p:stCondLst>
+                                        </p:cTn>
+                                        <p:tgtEl>
+                                          <p:spTgt spid="7"/>
                                         </p:tgtEl>
                                         <p:attrNameLst>
                                           <p:attrName>style.visibility</p:attrName>
@@ -20551,14 +21604,17 @@
       </p:par>
     </p:tnLst>
     <p:bldLst>
+      <p:bldP spid="15" grpId="0"/>
       <p:bldP spid="8" grpId="0"/>
-      <p:bldP spid="10" grpId="0"/>
+      <p:bldP spid="12" grpId="0"/>
+      <p:bldP spid="11" grpId="0"/>
+      <p:bldP spid="14" grpId="0"/>
     </p:bldLst>
   </p:timing>
 </p:sld>
 </file>
 
-<file path=ppt/slides/slide3.xml><?xml version="1.0" encoding="utf-8"?>
+<file path=ppt/slides/slide4.xml><?xml version="1.0" encoding="utf-8"?>
 <p:sld xmlns:a="http://schemas.openxmlformats.org/drawingml/2006/main" xmlns:r="http://schemas.openxmlformats.org/officeDocument/2006/relationships" xmlns:p="http://schemas.openxmlformats.org/presentationml/2006/main">
   <p:cSld>
     <p:spTree>
@@ -20672,7 +21728,7 @@
             <a:fld id="{4F9AC08D-23A9-440E-BCB9-AA1E9877CC38}" type="slidenum">
               <a:rPr lang="en-US" smtClean="0"/>
               <a:pPr/>
-              <a:t>3</a:t>
+              <a:t>4</a:t>
             </a:fld>
             <a:endParaRPr lang="en-US"/>
           </a:p>
@@ -20908,8 +21964,18 @@
               <a:buChar char="•"/>
             </a:pPr>
             <a:r>
+              <a:rPr lang="en-AU" b="1" dirty="0">
+                <a:solidFill>
+                  <a:schemeClr val="accent3">
+                    <a:lumMod val="75000"/>
+                  </a:schemeClr>
+                </a:solidFill>
+              </a:rPr>
+              <a:t>Inflation</a:t>
+            </a:r>
+            <a:r>
               <a:rPr lang="en-AU" dirty="0"/>
-              <a:t>Inflation reduces the value of nominal savings – not income.</a:t>
+              <a:t> reduces the value of nominal savings – not income.</a:t>
             </a:r>
           </a:p>
           <a:p>
@@ -20919,7 +21985,22 @@
             </a:pPr>
             <a:r>
               <a:rPr lang="en-AU" dirty="0"/>
-              <a:t>A “normal rate of return” compensates for deferring consumption – necessary to maintain present value of savings, so not income.</a:t>
+              <a:t>A </a:t>
+            </a:r>
+            <a:r>
+              <a:rPr lang="en-AU" b="1" dirty="0">
+                <a:solidFill>
+                  <a:schemeClr val="accent3">
+                    <a:lumMod val="60000"/>
+                    <a:lumOff val="40000"/>
+                  </a:schemeClr>
+                </a:solidFill>
+              </a:rPr>
+              <a:t>normal rate of return</a:t>
+            </a:r>
+            <a:r>
+              <a:rPr lang="en-AU" dirty="0"/>
+              <a:t> compensates for deferring consumption – necessary to maintain present value of savings, so not income.</a:t>
             </a:r>
           </a:p>
         </p:txBody>
@@ -20992,7 +22073,13 @@
               <a:t>Hard to create the </a:t>
             </a:r>
             <a:r>
-              <a:rPr lang="en-AU" i="1" dirty="0"/>
+              <a:rPr lang="en-AU" b="1" dirty="0">
+                <a:solidFill>
+                  <a:schemeClr val="accent4">
+                    <a:lumMod val="75000"/>
+                  </a:schemeClr>
+                </a:solidFill>
+              </a:rPr>
               <a:t>redistribution</a:t>
             </a:r>
             <a:r>
@@ -21012,10 +22099,180 @@
   <p:clrMapOvr>
     <a:masterClrMapping/>
   </p:clrMapOvr>
+  <p:timing>
+    <p:tnLst>
+      <p:par>
+        <p:cTn id="1" dur="indefinite" restart="never" nodeType="tmRoot">
+          <p:childTnLst>
+            <p:seq concurrent="1" nextAc="seek">
+              <p:cTn id="2" dur="indefinite" nodeType="mainSeq">
+                <p:childTnLst>
+                  <p:par>
+                    <p:cTn id="3" fill="hold">
+                      <p:stCondLst>
+                        <p:cond delay="indefinite"/>
+                      </p:stCondLst>
+                      <p:childTnLst>
+                        <p:par>
+                          <p:cTn id="4" fill="hold">
+                            <p:stCondLst>
+                              <p:cond delay="0"/>
+                            </p:stCondLst>
+                            <p:childTnLst>
+                              <p:par>
+                                <p:cTn id="5" presetID="1" presetClass="entr" presetSubtype="0" fill="hold" grpId="0" nodeType="clickEffect">
+                                  <p:stCondLst>
+                                    <p:cond delay="0"/>
+                                  </p:stCondLst>
+                                  <p:childTnLst>
+                                    <p:set>
+                                      <p:cBhvr>
+                                        <p:cTn id="6" dur="1" fill="hold">
+                                          <p:stCondLst>
+                                            <p:cond delay="0"/>
+                                          </p:stCondLst>
+                                        </p:cTn>
+                                        <p:tgtEl>
+                                          <p:spTgt spid="19"/>
+                                        </p:tgtEl>
+                                        <p:attrNameLst>
+                                          <p:attrName>style.visibility</p:attrName>
+                                        </p:attrNameLst>
+                                      </p:cBhvr>
+                                      <p:to>
+                                        <p:strVal val="visible"/>
+                                      </p:to>
+                                    </p:set>
+                                  </p:childTnLst>
+                                </p:cTn>
+                              </p:par>
+                            </p:childTnLst>
+                          </p:cTn>
+                        </p:par>
+                      </p:childTnLst>
+                    </p:cTn>
+                  </p:par>
+                  <p:par>
+                    <p:cTn id="7" fill="hold">
+                      <p:stCondLst>
+                        <p:cond delay="indefinite"/>
+                      </p:stCondLst>
+                      <p:childTnLst>
+                        <p:par>
+                          <p:cTn id="8" fill="hold">
+                            <p:stCondLst>
+                              <p:cond delay="0"/>
+                            </p:stCondLst>
+                            <p:childTnLst>
+                              <p:par>
+                                <p:cTn id="9" presetID="1" presetClass="entr" presetSubtype="0" fill="hold" grpId="0" nodeType="clickEffect">
+                                  <p:stCondLst>
+                                    <p:cond delay="0"/>
+                                  </p:stCondLst>
+                                  <p:childTnLst>
+                                    <p:set>
+                                      <p:cBhvr>
+                                        <p:cTn id="10" dur="1" fill="hold">
+                                          <p:stCondLst>
+                                            <p:cond delay="0"/>
+                                          </p:stCondLst>
+                                        </p:cTn>
+                                        <p:tgtEl>
+                                          <p:spTgt spid="21"/>
+                                        </p:tgtEl>
+                                        <p:attrNameLst>
+                                          <p:attrName>style.visibility</p:attrName>
+                                        </p:attrNameLst>
+                                      </p:cBhvr>
+                                      <p:to>
+                                        <p:strVal val="visible"/>
+                                      </p:to>
+                                    </p:set>
+                                  </p:childTnLst>
+                                </p:cTn>
+                              </p:par>
+                            </p:childTnLst>
+                          </p:cTn>
+                        </p:par>
+                      </p:childTnLst>
+                    </p:cTn>
+                  </p:par>
+                  <p:par>
+                    <p:cTn id="11" fill="hold">
+                      <p:stCondLst>
+                        <p:cond delay="indefinite"/>
+                      </p:stCondLst>
+                      <p:childTnLst>
+                        <p:par>
+                          <p:cTn id="12" fill="hold">
+                            <p:stCondLst>
+                              <p:cond delay="0"/>
+                            </p:stCondLst>
+                            <p:childTnLst>
+                              <p:par>
+                                <p:cTn id="13" presetID="1" presetClass="entr" presetSubtype="0" fill="hold" grpId="0" nodeType="clickEffect">
+                                  <p:stCondLst>
+                                    <p:cond delay="0"/>
+                                  </p:stCondLst>
+                                  <p:childTnLst>
+                                    <p:set>
+                                      <p:cBhvr>
+                                        <p:cTn id="14" dur="1" fill="hold">
+                                          <p:stCondLst>
+                                            <p:cond delay="0"/>
+                                          </p:stCondLst>
+                                        </p:cTn>
+                                        <p:tgtEl>
+                                          <p:spTgt spid="23"/>
+                                        </p:tgtEl>
+                                        <p:attrNameLst>
+                                          <p:attrName>style.visibility</p:attrName>
+                                        </p:attrNameLst>
+                                      </p:cBhvr>
+                                      <p:to>
+                                        <p:strVal val="visible"/>
+                                      </p:to>
+                                    </p:set>
+                                  </p:childTnLst>
+                                </p:cTn>
+                              </p:par>
+                            </p:childTnLst>
+                          </p:cTn>
+                        </p:par>
+                      </p:childTnLst>
+                    </p:cTn>
+                  </p:par>
+                </p:childTnLst>
+              </p:cTn>
+              <p:prevCondLst>
+                <p:cond evt="onPrev" delay="0">
+                  <p:tgtEl>
+                    <p:sldTgt/>
+                  </p:tgtEl>
+                </p:cond>
+              </p:prevCondLst>
+              <p:nextCondLst>
+                <p:cond evt="onNext" delay="0">
+                  <p:tgtEl>
+                    <p:sldTgt/>
+                  </p:tgtEl>
+                </p:cond>
+              </p:nextCondLst>
+            </p:seq>
+          </p:childTnLst>
+        </p:cTn>
+      </p:par>
+    </p:tnLst>
+    <p:bldLst>
+      <p:bldP spid="19" grpId="0"/>
+      <p:bldP spid="21" grpId="0"/>
+      <p:bldP spid="23" grpId="0"/>
+    </p:bldLst>
+  </p:timing>
 </p:sld>
 </file>
 
-<file path=ppt/slides/slide4.xml><?xml version="1.0" encoding="utf-8"?>
+<file path=ppt/slides/slide5.xml><?xml version="1.0" encoding="utf-8"?>
 <p:sld xmlns:a="http://schemas.openxmlformats.org/drawingml/2006/main" xmlns:r="http://schemas.openxmlformats.org/officeDocument/2006/relationships" xmlns:p="http://schemas.openxmlformats.org/presentationml/2006/main">
   <p:cSld>
     <p:spTree>
@@ -21129,7 +22386,7 @@
             <a:fld id="{4F9AC08D-23A9-440E-BCB9-AA1E9877CC38}" type="slidenum">
               <a:rPr lang="en-US" smtClean="0"/>
               <a:pPr/>
-              <a:t>4</a:t>
+              <a:t>5</a:t>
             </a:fld>
             <a:endParaRPr lang="en-US"/>
           </a:p>
@@ -21151,7 +22408,12 @@
             <p:ph type="title"/>
           </p:nvPr>
         </p:nvSpPr>
-        <p:spPr/>
+        <p:spPr>
+          <a:xfrm>
+            <a:off x="366317" y="417443"/>
+            <a:ext cx="11459365" cy="700597"/>
+          </a:xfrm>
+        </p:spPr>
         <p:txBody>
           <a:bodyPr/>
           <a:lstStyle/>
@@ -21193,7 +22455,15 @@
           <a:p>
             <a:r>
               <a:rPr lang="en-AU" dirty="0"/>
-              <a:t>XXX</a:t>
+              <a:t>A </a:t>
+            </a:r>
+            <a:r>
+              <a:rPr lang="en-AU" b="1" dirty="0"/>
+              <a:t>capital gain</a:t>
+            </a:r>
+            <a:r>
+              <a:rPr lang="en-AU" dirty="0"/>
+              <a:t> is an additional form of capital income.</a:t>
             </a:r>
           </a:p>
         </p:txBody>
@@ -21212,8 +22482,8 @@
         </p:nvSpPr>
         <p:spPr>
           <a:xfrm>
-            <a:off x="370417" y="1915554"/>
-            <a:ext cx="10903190" cy="369332"/>
+            <a:off x="370417" y="1753005"/>
+            <a:ext cx="10903190" cy="1354217"/>
           </a:xfrm>
           <a:prstGeom prst="rect">
             <a:avLst/>
@@ -21235,11 +22505,148 @@
             </a:pPr>
             <a:r>
               <a:rPr lang="en-AU" dirty="0"/>
-              <a:t>XXX</a:t>
-            </a:r>
-          </a:p>
-        </p:txBody>
-      </p:sp>
+              <a:t>Like other capital income, some of it is not “income”.</a:t>
+            </a:r>
+          </a:p>
+          <a:p>
+            <a:pPr marL="285750" indent="-285750">
+              <a:spcAft>
+                <a:spcPts val="600"/>
+              </a:spcAft>
+              <a:buFont typeface="Arial" panose="020B0604020202020204" pitchFamily="34" charset="0"/>
+              <a:buChar char="•"/>
+            </a:pPr>
+            <a:r>
+              <a:rPr lang="en-AU" dirty="0"/>
+              <a:t>Is taxed on </a:t>
+            </a:r>
+            <a:r>
+              <a:rPr lang="en-AU" i="1" dirty="0"/>
+              <a:t>realisation</a:t>
+            </a:r>
+            <a:r>
+              <a:rPr lang="en-AU" dirty="0"/>
+              <a:t> – this gives capital gain a </a:t>
+            </a:r>
+            <a:r>
+              <a:rPr lang="en-AU" i="1" dirty="0"/>
+              <a:t>deferral benefit</a:t>
+            </a:r>
+            <a:r>
+              <a:rPr lang="en-AU" dirty="0"/>
+              <a:t> relative to other capital income currently.</a:t>
+            </a:r>
+          </a:p>
+          <a:p>
+            <a:pPr marL="285750" indent="-285750">
+              <a:spcAft>
+                <a:spcPts val="600"/>
+              </a:spcAft>
+              <a:buFont typeface="Arial" panose="020B0604020202020204" pitchFamily="34" charset="0"/>
+              <a:buChar char="•"/>
+            </a:pPr>
+            <a:r>
+              <a:rPr lang="en-AU" dirty="0"/>
+              <a:t>Due to progressive taxes, capital gains are taxed at a higher rate than if they were taxed each year.</a:t>
+            </a:r>
+          </a:p>
+        </p:txBody>
+      </p:sp>
+      <p:pic>
+        <p:nvPicPr>
+          <p:cNvPr id="13" name="Picture 12">
+            <a:extLst>
+              <a:ext uri="{FF2B5EF4-FFF2-40B4-BE49-F238E27FC236}">
+                <a16:creationId xmlns:a16="http://schemas.microsoft.com/office/drawing/2014/main" id="{891CCE7A-AAB1-252E-14B3-083B876784B8}"/>
+              </a:ext>
+            </a:extLst>
+          </p:cNvPr>
+          <p:cNvPicPr>
+            <a:picLocks noChangeAspect="1"/>
+          </p:cNvPicPr>
+          <p:nvPr/>
+        </p:nvPicPr>
+        <p:blipFill>
+          <a:blip r:embed="rId5"/>
+          <a:stretch>
+            <a:fillRect/>
+          </a:stretch>
+        </p:blipFill>
+        <p:spPr>
+          <a:xfrm>
+            <a:off x="1070337" y="3776219"/>
+            <a:ext cx="2689676" cy="2761488"/>
+          </a:xfrm>
+          <a:prstGeom prst="rect">
+            <a:avLst/>
+          </a:prstGeom>
+        </p:spPr>
+      </p:pic>
+      <p:sp>
+        <p:nvSpPr>
+          <p:cNvPr id="14" name="TextBox 13">
+            <a:extLst>
+              <a:ext uri="{FF2B5EF4-FFF2-40B4-BE49-F238E27FC236}">
+                <a16:creationId xmlns:a16="http://schemas.microsoft.com/office/drawing/2014/main" id="{FE6224D3-A789-2D19-E3B3-23F3CA04F22A}"/>
+              </a:ext>
+            </a:extLst>
+          </p:cNvPr>
+          <p:cNvSpPr txBox="1"/>
+          <p:nvPr/>
+        </p:nvSpPr>
+        <p:spPr>
+          <a:xfrm>
+            <a:off x="501029" y="3324282"/>
+            <a:ext cx="3828292" cy="369332"/>
+          </a:xfrm>
+          <a:prstGeom prst="rect">
+            <a:avLst/>
+          </a:prstGeom>
+          <a:noFill/>
+        </p:spPr>
+        <p:txBody>
+          <a:bodyPr wrap="none" rtlCol="0">
+            <a:spAutoFit/>
+          </a:bodyPr>
+          <a:lstStyle/>
+          <a:p>
+            <a:r>
+              <a:rPr lang="en-AU" b="1" dirty="0"/>
+              <a:t>Discount and income averaging</a:t>
+            </a:r>
+          </a:p>
+        </p:txBody>
+      </p:sp>
+      <p:pic>
+        <p:nvPicPr>
+          <p:cNvPr id="17" name="Picture 16">
+            <a:extLst>
+              <a:ext uri="{FF2B5EF4-FFF2-40B4-BE49-F238E27FC236}">
+                <a16:creationId xmlns:a16="http://schemas.microsoft.com/office/drawing/2014/main" id="{BA824E8A-2E3C-9E88-48F6-48A4CCCFB24C}"/>
+              </a:ext>
+            </a:extLst>
+          </p:cNvPr>
+          <p:cNvPicPr>
+            <a:picLocks noChangeAspect="1"/>
+          </p:cNvPicPr>
+          <p:nvPr/>
+        </p:nvPicPr>
+        <p:blipFill>
+          <a:blip r:embed="rId6"/>
+          <a:stretch>
+            <a:fillRect/>
+          </a:stretch>
+        </p:blipFill>
+        <p:spPr>
+          <a:xfrm>
+            <a:off x="5087714" y="3324282"/>
+            <a:ext cx="5549934" cy="3411716"/>
+          </a:xfrm>
+          <a:prstGeom prst="rect">
+            <a:avLst/>
+          </a:prstGeom>
+        </p:spPr>
+      </p:pic>
     </p:spTree>
     <p:extLst>
       <p:ext uri="{BB962C8B-B14F-4D97-AF65-F5344CB8AC3E}">
@@ -21253,7 +22660,300 @@
 </p:sld>
 </file>
 
-<file path=ppt/slides/slide5.xml><?xml version="1.0" encoding="utf-8"?>
+<file path=ppt/slides/slide6.xml><?xml version="1.0" encoding="utf-8"?>
+<p:sld xmlns:a="http://schemas.openxmlformats.org/drawingml/2006/main" xmlns:r="http://schemas.openxmlformats.org/officeDocument/2006/relationships" xmlns:p="http://schemas.openxmlformats.org/presentationml/2006/main">
+  <p:cSld>
+    <p:spTree>
+      <p:nvGrpSpPr>
+        <p:cNvPr id="1" name="">
+          <a:extLst>
+            <a:ext uri="{FF2B5EF4-FFF2-40B4-BE49-F238E27FC236}">
+              <a16:creationId xmlns:a16="http://schemas.microsoft.com/office/drawing/2014/main" id="{252266E1-9BB6-69EC-BC38-9E70064D07B5}"/>
+            </a:ext>
+          </a:extLst>
+        </p:cNvPr>
+        <p:cNvGrpSpPr/>
+        <p:nvPr/>
+      </p:nvGrpSpPr>
+      <p:grpSpPr>
+        <a:xfrm>
+          <a:off x="0" y="0"/>
+          <a:ext cx="0" cy="0"/>
+          <a:chOff x="0" y="0"/>
+          <a:chExt cx="0" cy="0"/>
+        </a:xfrm>
+      </p:grpSpPr>
+      <p:graphicFrame>
+        <p:nvGraphicFramePr>
+          <p:cNvPr id="6" name="Object 5" hidden="1">
+            <a:extLst>
+              <a:ext uri="{FF2B5EF4-FFF2-40B4-BE49-F238E27FC236}">
+                <a16:creationId xmlns:a16="http://schemas.microsoft.com/office/drawing/2014/main" id="{1DBAA6C6-2754-C040-35B8-5A27FEF7FFEE}"/>
+              </a:ext>
+            </a:extLst>
+          </p:cNvPr>
+          <p:cNvGraphicFramePr>
+            <a:graphicFrameLocks noChangeAspect="1"/>
+          </p:cNvGraphicFramePr>
+          <p:nvPr>
+            <p:custDataLst>
+              <p:tags r:id="rId1"/>
+            </p:custDataLst>
+          </p:nvPr>
+        </p:nvGraphicFramePr>
+        <p:xfrm>
+          <a:off x="1588" y="1589"/>
+          <a:ext cx="1588" cy="1588"/>
+        </p:xfrm>
+        <a:graphic>
+          <a:graphicData uri="http://schemas.openxmlformats.org/presentationml/2006/ole">
+            <mc:AlternateContent xmlns:mc="http://schemas.openxmlformats.org/markup-compatibility/2006">
+              <mc:Choice xmlns:v="urn:schemas-microsoft-com:vml" Requires="v">
+                <p:oleObj name="think-cell Slide" r:id="rId3" imgW="395" imgH="394" progId="TCLayout.ActiveDocument.1">
+                  <p:embed/>
+                </p:oleObj>
+              </mc:Choice>
+              <mc:Fallback>
+                <p:oleObj name="think-cell Slide" r:id="rId3" imgW="395" imgH="394" progId="TCLayout.ActiveDocument.1">
+                  <p:embed/>
+                  <p:pic>
+                    <p:nvPicPr>
+                      <p:cNvPr id="6" name="Object 5" hidden="1">
+                        <a:extLst>
+                          <a:ext uri="{FF2B5EF4-FFF2-40B4-BE49-F238E27FC236}">
+                            <a16:creationId xmlns:a16="http://schemas.microsoft.com/office/drawing/2014/main" id="{57999A48-644A-84C4-4CD8-E08838BD39F0}"/>
+                          </a:ext>
+                        </a:extLst>
+                      </p:cNvPr>
+                      <p:cNvPicPr/>
+                      <p:nvPr/>
+                    </p:nvPicPr>
+                    <p:blipFill>
+                      <a:blip r:embed="rId4"/>
+                      <a:stretch>
+                        <a:fillRect/>
+                      </a:stretch>
+                    </p:blipFill>
+                    <p:spPr>
+                      <a:xfrm>
+                        <a:off x="1588" y="1589"/>
+                        <a:ext cx="1588" cy="1588"/>
+                      </a:xfrm>
+                      <a:prstGeom prst="rect">
+                        <a:avLst/>
+                      </a:prstGeom>
+                    </p:spPr>
+                  </p:pic>
+                </p:oleObj>
+              </mc:Fallback>
+            </mc:AlternateContent>
+          </a:graphicData>
+        </a:graphic>
+      </p:graphicFrame>
+      <p:sp>
+        <p:nvSpPr>
+          <p:cNvPr id="4" name="Slide Number Placeholder 3">
+            <a:extLst>
+              <a:ext uri="{FF2B5EF4-FFF2-40B4-BE49-F238E27FC236}">
+                <a16:creationId xmlns:a16="http://schemas.microsoft.com/office/drawing/2014/main" id="{5F6A11A9-AE2C-8B9B-B067-1AD180B87655}"/>
+              </a:ext>
+            </a:extLst>
+          </p:cNvPr>
+          <p:cNvSpPr>
+            <a:spLocks noGrp="1"/>
+          </p:cNvSpPr>
+          <p:nvPr>
+            <p:ph type="sldNum" sz="quarter" idx="10"/>
+          </p:nvPr>
+        </p:nvSpPr>
+        <p:spPr/>
+        <p:txBody>
+          <a:bodyPr/>
+          <a:lstStyle/>
+          <a:p>
+            <a:fld id="{4F9AC08D-23A9-440E-BCB9-AA1E9877CC38}" type="slidenum">
+              <a:rPr lang="en-US" smtClean="0"/>
+              <a:pPr/>
+              <a:t>6</a:t>
+            </a:fld>
+            <a:endParaRPr lang="en-US"/>
+          </a:p>
+        </p:txBody>
+      </p:sp>
+      <p:sp>
+        <p:nvSpPr>
+          <p:cNvPr id="2" name="Title 1">
+            <a:extLst>
+              <a:ext uri="{FF2B5EF4-FFF2-40B4-BE49-F238E27FC236}">
+                <a16:creationId xmlns:a16="http://schemas.microsoft.com/office/drawing/2014/main" id="{E2A03D88-7EBA-06B5-8DF5-2FD9B6BAC1BF}"/>
+              </a:ext>
+            </a:extLst>
+          </p:cNvPr>
+          <p:cNvSpPr>
+            <a:spLocks noGrp="1"/>
+          </p:cNvSpPr>
+          <p:nvPr>
+            <p:ph type="title"/>
+          </p:nvPr>
+        </p:nvSpPr>
+        <p:spPr>
+          <a:xfrm>
+            <a:off x="366317" y="417443"/>
+            <a:ext cx="11459365" cy="700597"/>
+          </a:xfrm>
+        </p:spPr>
+        <p:txBody>
+          <a:bodyPr/>
+          <a:lstStyle/>
+          <a:p>
+            <a:r>
+              <a:rPr lang="en-US" dirty="0"/>
+              <a:t>What are capital gains and negative gearing</a:t>
+            </a:r>
+          </a:p>
+        </p:txBody>
+      </p:sp>
+      <p:sp>
+        <p:nvSpPr>
+          <p:cNvPr id="7" name="TextBox 6">
+            <a:extLst>
+              <a:ext uri="{FF2B5EF4-FFF2-40B4-BE49-F238E27FC236}">
+                <a16:creationId xmlns:a16="http://schemas.microsoft.com/office/drawing/2014/main" id="{84A129AD-2B6B-9AE6-3396-03F985A8D50A}"/>
+              </a:ext>
+            </a:extLst>
+          </p:cNvPr>
+          <p:cNvSpPr txBox="1"/>
+          <p:nvPr/>
+        </p:nvSpPr>
+        <p:spPr>
+          <a:xfrm>
+            <a:off x="366317" y="1225989"/>
+            <a:ext cx="10903190" cy="646331"/>
+          </a:xfrm>
+          <a:prstGeom prst="rect">
+            <a:avLst/>
+          </a:prstGeom>
+          <a:noFill/>
+        </p:spPr>
+        <p:txBody>
+          <a:bodyPr wrap="square">
+            <a:spAutoFit/>
+          </a:bodyPr>
+          <a:lstStyle/>
+          <a:p>
+            <a:r>
+              <a:rPr lang="en-AU" b="1" dirty="0"/>
+              <a:t>Negative gearing </a:t>
+            </a:r>
+            <a:r>
+              <a:rPr lang="en-AU" dirty="0"/>
+              <a:t>is when annual revenue for an asset in a year is less than the costs, due to </a:t>
+            </a:r>
+            <a:r>
+              <a:rPr lang="en-AU" u="sng" dirty="0"/>
+              <a:t>borrowing expenses</a:t>
+            </a:r>
+            <a:r>
+              <a:rPr lang="en-AU" dirty="0"/>
+              <a:t>.</a:t>
+            </a:r>
+          </a:p>
+        </p:txBody>
+      </p:sp>
+      <p:sp>
+        <p:nvSpPr>
+          <p:cNvPr id="11" name="TextBox 10">
+            <a:extLst>
+              <a:ext uri="{FF2B5EF4-FFF2-40B4-BE49-F238E27FC236}">
+                <a16:creationId xmlns:a16="http://schemas.microsoft.com/office/drawing/2014/main" id="{DC27FA5D-F220-4D4A-FCAC-E17BAB5EC449}"/>
+              </a:ext>
+            </a:extLst>
+          </p:cNvPr>
+          <p:cNvSpPr txBox="1"/>
+          <p:nvPr/>
+        </p:nvSpPr>
+        <p:spPr>
+          <a:xfrm>
+            <a:off x="366317" y="1932024"/>
+            <a:ext cx="10903190" cy="646331"/>
+          </a:xfrm>
+          <a:prstGeom prst="rect">
+            <a:avLst/>
+          </a:prstGeom>
+          <a:noFill/>
+        </p:spPr>
+        <p:txBody>
+          <a:bodyPr wrap="square">
+            <a:spAutoFit/>
+          </a:bodyPr>
+          <a:lstStyle/>
+          <a:p>
+            <a:pPr marL="285750" indent="-285750">
+              <a:spcAft>
+                <a:spcPts val="600"/>
+              </a:spcAft>
+              <a:buFont typeface="Arial" panose="020B0604020202020204" pitchFamily="34" charset="0"/>
+              <a:buChar char="•"/>
+            </a:pPr>
+            <a:r>
+              <a:rPr lang="en-AU" dirty="0"/>
+              <a:t>Only allow expenses related to </a:t>
+            </a:r>
+            <a:r>
+              <a:rPr lang="en-AU" b="1" dirty="0"/>
+              <a:t>taxed</a:t>
+            </a:r>
+            <a:r>
+              <a:rPr lang="en-AU" dirty="0"/>
+              <a:t> income. Allowing deductibility of inflation component of interest inconsistent with discount/indexation.</a:t>
+            </a:r>
+          </a:p>
+        </p:txBody>
+      </p:sp>
+      <p:pic>
+        <p:nvPicPr>
+          <p:cNvPr id="8" name="Picture 7">
+            <a:extLst>
+              <a:ext uri="{FF2B5EF4-FFF2-40B4-BE49-F238E27FC236}">
+                <a16:creationId xmlns:a16="http://schemas.microsoft.com/office/drawing/2014/main" id="{A7DFB417-5F2A-3774-B220-2EE6592A2354}"/>
+              </a:ext>
+            </a:extLst>
+          </p:cNvPr>
+          <p:cNvPicPr>
+            <a:picLocks noChangeAspect="1"/>
+          </p:cNvPicPr>
+          <p:nvPr/>
+        </p:nvPicPr>
+        <p:blipFill>
+          <a:blip r:embed="rId5"/>
+          <a:stretch>
+            <a:fillRect/>
+          </a:stretch>
+        </p:blipFill>
+        <p:spPr>
+          <a:xfrm>
+            <a:off x="1563475" y="2879227"/>
+            <a:ext cx="5175654" cy="3521779"/>
+          </a:xfrm>
+          <a:prstGeom prst="rect">
+            <a:avLst/>
+          </a:prstGeom>
+        </p:spPr>
+      </p:pic>
+    </p:spTree>
+    <p:extLst>
+      <p:ext uri="{BB962C8B-B14F-4D97-AF65-F5344CB8AC3E}">
+        <p14:creationId xmlns:p14="http://schemas.microsoft.com/office/powerpoint/2010/main" val="537513866"/>
+      </p:ext>
+    </p:extLst>
+  </p:cSld>
+  <p:clrMapOvr>
+    <a:masterClrMapping/>
+  </p:clrMapOvr>
+</p:sld>
+</file>
+
+<file path=ppt/slides/slide7.xml><?xml version="1.0" encoding="utf-8"?>
 <p:sld xmlns:a="http://schemas.openxmlformats.org/drawingml/2006/main" xmlns:r="http://schemas.openxmlformats.org/officeDocument/2006/relationships" xmlns:p="http://schemas.openxmlformats.org/presentationml/2006/main">
   <p:cSld>
     <p:spTree>
@@ -21367,7 +23067,7 @@
             <a:fld id="{4F9AC08D-23A9-440E-BCB9-AA1E9877CC38}" type="slidenum">
               <a:rPr lang="en-US" smtClean="0"/>
               <a:pPr/>
-              <a:t>5</a:t>
+              <a:t>7</a:t>
             </a:fld>
             <a:endParaRPr lang="en-US"/>
           </a:p>
@@ -21436,41 +23136,78 @@
           </a:p>
         </p:txBody>
       </p:sp>
-      <p:sp>
-        <p:nvSpPr>
-          <p:cNvPr id="19" name="TextBox 18">
-            <a:extLst>
-              <a:ext uri="{FF2B5EF4-FFF2-40B4-BE49-F238E27FC236}">
-                <a16:creationId xmlns:a16="http://schemas.microsoft.com/office/drawing/2014/main" id="{57BA199E-4B63-5D8C-D4A1-90B7085DDCDF}"/>
-              </a:ext>
-            </a:extLst>
-          </p:cNvPr>
-          <p:cNvSpPr txBox="1"/>
+      <p:pic>
+        <p:nvPicPr>
+          <p:cNvPr id="7" name="Picture 6">
+            <a:extLst>
+              <a:ext uri="{FF2B5EF4-FFF2-40B4-BE49-F238E27FC236}">
+                <a16:creationId xmlns:a16="http://schemas.microsoft.com/office/drawing/2014/main" id="{A4AD3668-7AF6-B38C-C0AC-E0CC5C6EDCCD}"/>
+              </a:ext>
+            </a:extLst>
+          </p:cNvPr>
+          <p:cNvPicPr>
+            <a:picLocks noChangeAspect="1"/>
+          </p:cNvPicPr>
           <p:nvPr/>
-        </p:nvSpPr>
-        <p:spPr>
-          <a:xfrm>
-            <a:off x="370417" y="3837361"/>
-            <a:ext cx="10903190" cy="369332"/>
-          </a:xfrm>
-          <a:prstGeom prst="rect">
-            <a:avLst/>
-          </a:prstGeom>
-          <a:noFill/>
-        </p:spPr>
-        <p:txBody>
-          <a:bodyPr wrap="square">
-            <a:spAutoFit/>
-          </a:bodyPr>
-          <a:lstStyle/>
-          <a:p>
-            <a:r>
-              <a:rPr lang="en-AU" b="1" dirty="0"/>
-              <a:t>Vertical inequity</a:t>
-            </a:r>
-          </a:p>
-        </p:txBody>
-      </p:sp>
+        </p:nvPicPr>
+        <p:blipFill>
+          <a:blip r:embed="rId5">
+            <a:extLst>
+              <a:ext uri="{28A0092B-C50C-407E-A947-70E740481C1C}">
+                <a14:useLocalDpi xmlns:a14="http://schemas.microsoft.com/office/drawing/2010/main" val="0"/>
+              </a:ext>
+            </a:extLst>
+          </a:blip>
+          <a:stretch>
+            <a:fillRect/>
+          </a:stretch>
+        </p:blipFill>
+        <p:spPr>
+          <a:xfrm>
+            <a:off x="6096000" y="1527822"/>
+            <a:ext cx="4270248" cy="5009885"/>
+          </a:xfrm>
+          <a:prstGeom prst="rect">
+            <a:avLst/>
+          </a:prstGeom>
+        </p:spPr>
+      </p:pic>
+      <p:pic>
+        <p:nvPicPr>
+          <p:cNvPr id="9" name="Picture 8">
+            <a:extLst>
+              <a:ext uri="{FF2B5EF4-FFF2-40B4-BE49-F238E27FC236}">
+                <a16:creationId xmlns:a16="http://schemas.microsoft.com/office/drawing/2014/main" id="{07631548-956F-C20E-8497-007ECEE3B4B2}"/>
+              </a:ext>
+            </a:extLst>
+          </p:cNvPr>
+          <p:cNvPicPr>
+            <a:picLocks noChangeAspect="1"/>
+          </p:cNvPicPr>
+          <p:nvPr/>
+        </p:nvPicPr>
+        <p:blipFill>
+          <a:blip r:embed="rId6">
+            <a:extLst>
+              <a:ext uri="{28A0092B-C50C-407E-A947-70E740481C1C}">
+                <a14:useLocalDpi xmlns:a14="http://schemas.microsoft.com/office/drawing/2010/main" val="0"/>
+              </a:ext>
+            </a:extLst>
+          </a:blip>
+          <a:stretch>
+            <a:fillRect/>
+          </a:stretch>
+        </p:blipFill>
+        <p:spPr>
+          <a:xfrm>
+            <a:off x="506237" y="1609124"/>
+            <a:ext cx="4397555" cy="4992624"/>
+          </a:xfrm>
+          <a:prstGeom prst="rect">
+            <a:avLst/>
+          </a:prstGeom>
+        </p:spPr>
+      </p:pic>
     </p:spTree>
     <p:extLst>
       <p:ext uri="{BB962C8B-B14F-4D97-AF65-F5344CB8AC3E}">
@@ -21484,7 +23221,7 @@
 </p:sld>
 </file>
 
-<file path=ppt/slides/slide6.xml><?xml version="1.0" encoding="utf-8"?>
+<file path=ppt/slides/slide8.xml><?xml version="1.0" encoding="utf-8"?>
 <p:sld xmlns:a="http://schemas.openxmlformats.org/drawingml/2006/main" xmlns:r="http://schemas.openxmlformats.org/officeDocument/2006/relationships" xmlns:p="http://schemas.openxmlformats.org/presentationml/2006/main">
   <p:cSld>
     <p:spTree>
@@ -21598,7 +23335,7 @@
             <a:fld id="{4F9AC08D-23A9-440E-BCB9-AA1E9877CC38}" type="slidenum">
               <a:rPr lang="en-US" smtClean="0"/>
               <a:pPr/>
-              <a:t>6</a:t>
+              <a:t>8</a:t>
             </a:fld>
             <a:endParaRPr lang="en-US"/>
           </a:p>
@@ -21620,7 +23357,12 @@
             <p:ph type="title"/>
           </p:nvPr>
         </p:nvSpPr>
-        <p:spPr/>
+        <p:spPr>
+          <a:xfrm>
+            <a:off x="170835" y="183592"/>
+            <a:ext cx="11459365" cy="700597"/>
+          </a:xfrm>
+        </p:spPr>
         <p:txBody>
           <a:bodyPr/>
           <a:lstStyle/>
@@ -21646,8 +23388,8 @@
         </p:nvSpPr>
         <p:spPr>
           <a:xfrm>
-            <a:off x="370417" y="1166613"/>
-            <a:ext cx="10903190" cy="369332"/>
+            <a:off x="448922" y="3969238"/>
+            <a:ext cx="10903190" cy="2308324"/>
           </a:xfrm>
           <a:prstGeom prst="rect">
             <a:avLst/>
@@ -21665,8 +23407,184 @@
               <a:t>Incentive to borrow too much</a:t>
             </a:r>
           </a:p>
-        </p:txBody>
-      </p:sp>
+          <a:p>
+            <a:endParaRPr lang="en-AU" b="1" dirty="0"/>
+          </a:p>
+          <a:p>
+            <a:r>
+              <a:rPr lang="en-AU" dirty="0"/>
+              <a:t>Increasing leverage allows an investor to</a:t>
+            </a:r>
+            <a:br>
+              <a:rPr lang="en-AU" dirty="0"/>
+            </a:br>
+            <a:r>
+              <a:rPr lang="en-AU" dirty="0"/>
+              <a:t>increase their return on equity (</a:t>
+            </a:r>
+            <a:r>
+              <a:rPr lang="en-AU" dirty="0" err="1"/>
+              <a:t>RoE</a:t>
+            </a:r>
+            <a:r>
+              <a:rPr lang="en-AU" dirty="0"/>
+              <a:t>) post-tax</a:t>
+            </a:r>
+            <a:br>
+              <a:rPr lang="en-AU" dirty="0"/>
+            </a:br>
+            <a:r>
+              <a:rPr lang="en-AU" dirty="0"/>
+              <a:t>by more than the pre-tax increase.</a:t>
+            </a:r>
+            <a:br>
+              <a:rPr lang="en-AU" dirty="0"/>
+            </a:br>
+            <a:br>
+              <a:rPr lang="en-AU" dirty="0"/>
+            </a:br>
+            <a:r>
+              <a:rPr lang="en-AU" dirty="0"/>
+              <a:t>-&gt; Can turn a pre-tax negative return </a:t>
+            </a:r>
+            <a:br>
+              <a:rPr lang="en-AU" dirty="0"/>
+            </a:br>
+            <a:r>
+              <a:rPr lang="en-AU" dirty="0"/>
+              <a:t>	positive post-tax</a:t>
+            </a:r>
+          </a:p>
+        </p:txBody>
+      </p:sp>
+      <p:sp>
+        <p:nvSpPr>
+          <p:cNvPr id="5" name="TextBox 4">
+            <a:extLst>
+              <a:ext uri="{FF2B5EF4-FFF2-40B4-BE49-F238E27FC236}">
+                <a16:creationId xmlns:a16="http://schemas.microsoft.com/office/drawing/2014/main" id="{777EE279-9661-A311-8659-5454251A6A6B}"/>
+              </a:ext>
+            </a:extLst>
+          </p:cNvPr>
+          <p:cNvSpPr txBox="1"/>
+          <p:nvPr/>
+        </p:nvSpPr>
+        <p:spPr>
+          <a:xfrm>
+            <a:off x="448922" y="1066059"/>
+            <a:ext cx="10903190" cy="2031325"/>
+          </a:xfrm>
+          <a:prstGeom prst="rect">
+            <a:avLst/>
+          </a:prstGeom>
+          <a:noFill/>
+        </p:spPr>
+        <p:txBody>
+          <a:bodyPr wrap="square">
+            <a:spAutoFit/>
+          </a:bodyPr>
+          <a:lstStyle/>
+          <a:p>
+            <a:r>
+              <a:rPr lang="en-AU" b="1" dirty="0"/>
+              <a:t>Vertical inequity</a:t>
+            </a:r>
+          </a:p>
+          <a:p>
+            <a:endParaRPr lang="en-AU" b="1" dirty="0"/>
+          </a:p>
+          <a:p>
+            <a:r>
+              <a:rPr lang="en-AU" dirty="0"/>
+              <a:t>Capital gains tend to go to this with high</a:t>
+            </a:r>
+            <a:br>
+              <a:rPr lang="en-AU" dirty="0"/>
+            </a:br>
+            <a:r>
+              <a:rPr lang="en-AU" dirty="0"/>
+              <a:t>decade-long income.</a:t>
+            </a:r>
+            <a:br>
+              <a:rPr lang="en-AU" dirty="0"/>
+            </a:br>
+            <a:br>
+              <a:rPr lang="en-AU" dirty="0"/>
+            </a:br>
+            <a:r>
+              <a:rPr lang="en-AU" dirty="0"/>
+              <a:t>Implies that the tax-system may be less</a:t>
+            </a:r>
+            <a:br>
+              <a:rPr lang="en-AU" dirty="0"/>
+            </a:br>
+            <a:r>
+              <a:rPr lang="en-AU" dirty="0"/>
+              <a:t>progressive than intended.</a:t>
+            </a:r>
+          </a:p>
+        </p:txBody>
+      </p:sp>
+      <p:pic>
+        <p:nvPicPr>
+          <p:cNvPr id="10" name="Picture 9">
+            <a:extLst>
+              <a:ext uri="{FF2B5EF4-FFF2-40B4-BE49-F238E27FC236}">
+                <a16:creationId xmlns:a16="http://schemas.microsoft.com/office/drawing/2014/main" id="{62FF6502-0844-D9C2-CA51-89A9D1CC01EB}"/>
+              </a:ext>
+            </a:extLst>
+          </p:cNvPr>
+          <p:cNvPicPr>
+            <a:picLocks noChangeAspect="1"/>
+          </p:cNvPicPr>
+          <p:nvPr/>
+        </p:nvPicPr>
+        <p:blipFill>
+          <a:blip r:embed="rId5"/>
+          <a:stretch>
+            <a:fillRect/>
+          </a:stretch>
+        </p:blipFill>
+        <p:spPr>
+          <a:xfrm>
+            <a:off x="5900518" y="748680"/>
+            <a:ext cx="5847913" cy="2791800"/>
+          </a:xfrm>
+          <a:prstGeom prst="rect">
+            <a:avLst/>
+          </a:prstGeom>
+        </p:spPr>
+      </p:pic>
+      <p:pic>
+        <p:nvPicPr>
+          <p:cNvPr id="12" name="Picture 11">
+            <a:extLst>
+              <a:ext uri="{FF2B5EF4-FFF2-40B4-BE49-F238E27FC236}">
+                <a16:creationId xmlns:a16="http://schemas.microsoft.com/office/drawing/2014/main" id="{8832AF59-CB4C-D06E-09F1-F3CA011577CB}"/>
+              </a:ext>
+            </a:extLst>
+          </p:cNvPr>
+          <p:cNvPicPr>
+            <a:picLocks noChangeAspect="1"/>
+          </p:cNvPicPr>
+          <p:nvPr/>
+        </p:nvPicPr>
+        <p:blipFill>
+          <a:blip r:embed="rId6"/>
+          <a:stretch>
+            <a:fillRect/>
+          </a:stretch>
+        </p:blipFill>
+        <p:spPr>
+          <a:xfrm>
+            <a:off x="6777849" y="3787368"/>
+            <a:ext cx="3743848" cy="2681662"/>
+          </a:xfrm>
+          <a:prstGeom prst="rect">
+            <a:avLst/>
+          </a:prstGeom>
+        </p:spPr>
+      </p:pic>
     </p:spTree>
     <p:extLst>
       <p:ext uri="{BB962C8B-B14F-4D97-AF65-F5344CB8AC3E}">
@@ -21677,10 +23595,115 @@
   <p:clrMapOvr>
     <a:masterClrMapping/>
   </p:clrMapOvr>
+  <p:timing>
+    <p:tnLst>
+      <p:par>
+        <p:cTn id="1" dur="indefinite" restart="never" nodeType="tmRoot">
+          <p:childTnLst>
+            <p:seq concurrent="1" nextAc="seek">
+              <p:cTn id="2" dur="indefinite" nodeType="mainSeq">
+                <p:childTnLst>
+                  <p:par>
+                    <p:cTn id="3" fill="hold">
+                      <p:stCondLst>
+                        <p:cond delay="indefinite"/>
+                      </p:stCondLst>
+                      <p:childTnLst>
+                        <p:par>
+                          <p:cTn id="4" fill="hold">
+                            <p:stCondLst>
+                              <p:cond delay="0"/>
+                            </p:stCondLst>
+                            <p:childTnLst>
+                              <p:par>
+                                <p:cTn id="5" presetID="1" presetClass="entr" presetSubtype="0" fill="hold" grpId="0" nodeType="clickEffect">
+                                  <p:stCondLst>
+                                    <p:cond delay="0"/>
+                                  </p:stCondLst>
+                                  <p:childTnLst>
+                                    <p:set>
+                                      <p:cBhvr>
+                                        <p:cTn id="6" dur="1" fill="hold">
+                                          <p:stCondLst>
+                                            <p:cond delay="0"/>
+                                          </p:stCondLst>
+                                        </p:cTn>
+                                        <p:tgtEl>
+                                          <p:spTgt spid="17"/>
+                                        </p:tgtEl>
+                                        <p:attrNameLst>
+                                          <p:attrName>style.visibility</p:attrName>
+                                        </p:attrNameLst>
+                                      </p:cBhvr>
+                                      <p:to>
+                                        <p:strVal val="visible"/>
+                                      </p:to>
+                                    </p:set>
+                                  </p:childTnLst>
+                                </p:cTn>
+                              </p:par>
+                              <p:par>
+                                <p:cTn id="7" presetID="1" presetClass="entr" presetSubtype="0" fill="hold" nodeType="withEffect">
+                                  <p:stCondLst>
+                                    <p:cond delay="0"/>
+                                  </p:stCondLst>
+                                  <p:childTnLst>
+                                    <p:set>
+                                      <p:cBhvr>
+                                        <p:cTn id="8" dur="1" fill="hold">
+                                          <p:stCondLst>
+                                            <p:cond delay="0"/>
+                                          </p:stCondLst>
+                                        </p:cTn>
+                                        <p:tgtEl>
+                                          <p:spTgt spid="12"/>
+                                        </p:tgtEl>
+                                        <p:attrNameLst>
+                                          <p:attrName>style.visibility</p:attrName>
+                                        </p:attrNameLst>
+                                      </p:cBhvr>
+                                      <p:to>
+                                        <p:strVal val="visible"/>
+                                      </p:to>
+                                    </p:set>
+                                  </p:childTnLst>
+                                </p:cTn>
+                              </p:par>
+                            </p:childTnLst>
+                          </p:cTn>
+                        </p:par>
+                      </p:childTnLst>
+                    </p:cTn>
+                  </p:par>
+                </p:childTnLst>
+              </p:cTn>
+              <p:prevCondLst>
+                <p:cond evt="onPrev" delay="0">
+                  <p:tgtEl>
+                    <p:sldTgt/>
+                  </p:tgtEl>
+                </p:cond>
+              </p:prevCondLst>
+              <p:nextCondLst>
+                <p:cond evt="onNext" delay="0">
+                  <p:tgtEl>
+                    <p:sldTgt/>
+                  </p:tgtEl>
+                </p:cond>
+              </p:nextCondLst>
+            </p:seq>
+          </p:childTnLst>
+        </p:cTn>
+      </p:par>
+    </p:tnLst>
+    <p:bldLst>
+      <p:bldP spid="17" grpId="0"/>
+    </p:bldLst>
+  </p:timing>
 </p:sld>
 </file>
 
-<file path=ppt/slides/slide7.xml><?xml version="1.0" encoding="utf-8"?>
+<file path=ppt/slides/slide9.xml><?xml version="1.0" encoding="utf-8"?>
 <p:sld xmlns:a="http://schemas.openxmlformats.org/drawingml/2006/main" xmlns:r="http://schemas.openxmlformats.org/officeDocument/2006/relationships" xmlns:p="http://schemas.openxmlformats.org/presentationml/2006/main">
   <p:cSld>
     <p:spTree>
@@ -21794,7 +23817,7 @@
             <a:fld id="{4F9AC08D-23A9-440E-BCB9-AA1E9877CC38}" type="slidenum">
               <a:rPr lang="en-US" smtClean="0"/>
               <a:pPr/>
-              <a:t>7</a:t>
+              <a:t>9</a:t>
             </a:fld>
             <a:endParaRPr lang="en-US"/>
           </a:p>
@@ -21926,202 +23949,6 @@
     <p:extLst>
       <p:ext uri="{BB962C8B-B14F-4D97-AF65-F5344CB8AC3E}">
         <p14:creationId xmlns:p14="http://schemas.microsoft.com/office/powerpoint/2010/main" val="2584866806"/>
-      </p:ext>
-    </p:extLst>
-  </p:cSld>
-  <p:clrMapOvr>
-    <a:masterClrMapping/>
-  </p:clrMapOvr>
-</p:sld>
-</file>
-
-<file path=ppt/slides/slide8.xml><?xml version="1.0" encoding="utf-8"?>
-<p:sld xmlns:a="http://schemas.openxmlformats.org/drawingml/2006/main" xmlns:r="http://schemas.openxmlformats.org/officeDocument/2006/relationships" xmlns:p="http://schemas.openxmlformats.org/presentationml/2006/main">
-  <p:cSld>
-    <p:spTree>
-      <p:nvGrpSpPr>
-        <p:cNvPr id="1" name="">
-          <a:extLst>
-            <a:ext uri="{FF2B5EF4-FFF2-40B4-BE49-F238E27FC236}">
-              <a16:creationId xmlns:a16="http://schemas.microsoft.com/office/drawing/2014/main" id="{E322D194-6FC4-F6C2-6304-FC462B0FCC6A}"/>
-            </a:ext>
-          </a:extLst>
-        </p:cNvPr>
-        <p:cNvGrpSpPr/>
-        <p:nvPr/>
-      </p:nvGrpSpPr>
-      <p:grpSpPr>
-        <a:xfrm>
-          <a:off x="0" y="0"/>
-          <a:ext cx="0" cy="0"/>
-          <a:chOff x="0" y="0"/>
-          <a:chExt cx="0" cy="0"/>
-        </a:xfrm>
-      </p:grpSpPr>
-      <p:graphicFrame>
-        <p:nvGraphicFramePr>
-          <p:cNvPr id="6" name="Object 5" hidden="1">
-            <a:extLst>
-              <a:ext uri="{FF2B5EF4-FFF2-40B4-BE49-F238E27FC236}">
-                <a16:creationId xmlns:a16="http://schemas.microsoft.com/office/drawing/2014/main" id="{1450181C-6C9A-9739-99CF-AD4C5359FD16}"/>
-              </a:ext>
-            </a:extLst>
-          </p:cNvPr>
-          <p:cNvGraphicFramePr>
-            <a:graphicFrameLocks noChangeAspect="1"/>
-          </p:cNvGraphicFramePr>
-          <p:nvPr>
-            <p:custDataLst>
-              <p:tags r:id="rId1"/>
-            </p:custDataLst>
-          </p:nvPr>
-        </p:nvGraphicFramePr>
-        <p:xfrm>
-          <a:off x="1588" y="1589"/>
-          <a:ext cx="1588" cy="1588"/>
-        </p:xfrm>
-        <a:graphic>
-          <a:graphicData uri="http://schemas.openxmlformats.org/presentationml/2006/ole">
-            <mc:AlternateContent xmlns:mc="http://schemas.openxmlformats.org/markup-compatibility/2006">
-              <mc:Choice xmlns:v="urn:schemas-microsoft-com:vml" Requires="v">
-                <p:oleObj name="think-cell Slide" r:id="rId3" imgW="395" imgH="394" progId="TCLayout.ActiveDocument.1">
-                  <p:embed/>
-                </p:oleObj>
-              </mc:Choice>
-              <mc:Fallback>
-                <p:oleObj name="think-cell Slide" r:id="rId3" imgW="395" imgH="394" progId="TCLayout.ActiveDocument.1">
-                  <p:embed/>
-                  <p:pic>
-                    <p:nvPicPr>
-                      <p:cNvPr id="6" name="Object 5" hidden="1">
-                        <a:extLst>
-                          <a:ext uri="{FF2B5EF4-FFF2-40B4-BE49-F238E27FC236}">
-                            <a16:creationId xmlns:a16="http://schemas.microsoft.com/office/drawing/2014/main" id="{1ABB9CBC-6DA6-9AFC-AFA6-E022FEC7F522}"/>
-                          </a:ext>
-                        </a:extLst>
-                      </p:cNvPr>
-                      <p:cNvPicPr/>
-                      <p:nvPr/>
-                    </p:nvPicPr>
-                    <p:blipFill>
-                      <a:blip r:embed="rId4"/>
-                      <a:stretch>
-                        <a:fillRect/>
-                      </a:stretch>
-                    </p:blipFill>
-                    <p:spPr>
-                      <a:xfrm>
-                        <a:off x="1588" y="1589"/>
-                        <a:ext cx="1588" cy="1588"/>
-                      </a:xfrm>
-                      <a:prstGeom prst="rect">
-                        <a:avLst/>
-                      </a:prstGeom>
-                    </p:spPr>
-                  </p:pic>
-                </p:oleObj>
-              </mc:Fallback>
-            </mc:AlternateContent>
-          </a:graphicData>
-        </a:graphic>
-      </p:graphicFrame>
-      <p:sp>
-        <p:nvSpPr>
-          <p:cNvPr id="4" name="Slide Number Placeholder 3">
-            <a:extLst>
-              <a:ext uri="{FF2B5EF4-FFF2-40B4-BE49-F238E27FC236}">
-                <a16:creationId xmlns:a16="http://schemas.microsoft.com/office/drawing/2014/main" id="{76CFAFAB-7D37-A92C-247B-126FAD1DACB9}"/>
-              </a:ext>
-            </a:extLst>
-          </p:cNvPr>
-          <p:cNvSpPr>
-            <a:spLocks noGrp="1"/>
-          </p:cNvSpPr>
-          <p:nvPr>
-            <p:ph type="sldNum" sz="quarter" idx="10"/>
-          </p:nvPr>
-        </p:nvSpPr>
-        <p:spPr/>
-        <p:txBody>
-          <a:bodyPr/>
-          <a:lstStyle/>
-          <a:p>
-            <a:fld id="{4F9AC08D-23A9-440E-BCB9-AA1E9877CC38}" type="slidenum">
-              <a:rPr lang="en-US" smtClean="0"/>
-              <a:pPr/>
-              <a:t>8</a:t>
-            </a:fld>
-            <a:endParaRPr lang="en-US"/>
-          </a:p>
-        </p:txBody>
-      </p:sp>
-      <p:sp>
-        <p:nvSpPr>
-          <p:cNvPr id="2" name="Title 1">
-            <a:extLst>
-              <a:ext uri="{FF2B5EF4-FFF2-40B4-BE49-F238E27FC236}">
-                <a16:creationId xmlns:a16="http://schemas.microsoft.com/office/drawing/2014/main" id="{E437A670-36AA-CC09-B296-4C4B661C527F}"/>
-              </a:ext>
-            </a:extLst>
-          </p:cNvPr>
-          <p:cNvSpPr>
-            <a:spLocks noGrp="1"/>
-          </p:cNvSpPr>
-          <p:nvPr>
-            <p:ph type="title"/>
-          </p:nvPr>
-        </p:nvSpPr>
-        <p:spPr/>
-        <p:txBody>
-          <a:bodyPr/>
-          <a:lstStyle/>
-          <a:p>
-            <a:r>
-              <a:rPr lang="en-US" dirty="0"/>
-              <a:t>Trade-offs</a:t>
-            </a:r>
-          </a:p>
-        </p:txBody>
-      </p:sp>
-      <p:sp>
-        <p:nvSpPr>
-          <p:cNvPr id="5" name="TextBox 4">
-            <a:extLst>
-              <a:ext uri="{FF2B5EF4-FFF2-40B4-BE49-F238E27FC236}">
-                <a16:creationId xmlns:a16="http://schemas.microsoft.com/office/drawing/2014/main" id="{B64BD812-C79A-FCEC-2246-F4850105B375}"/>
-              </a:ext>
-            </a:extLst>
-          </p:cNvPr>
-          <p:cNvSpPr txBox="1"/>
-          <p:nvPr/>
-        </p:nvSpPr>
-        <p:spPr>
-          <a:xfrm>
-            <a:off x="370417" y="1280818"/>
-            <a:ext cx="9285648" cy="369332"/>
-          </a:xfrm>
-          <a:prstGeom prst="rect">
-            <a:avLst/>
-          </a:prstGeom>
-          <a:noFill/>
-        </p:spPr>
-        <p:txBody>
-          <a:bodyPr wrap="square">
-            <a:spAutoFit/>
-          </a:bodyPr>
-          <a:lstStyle/>
-          <a:p>
-            <a:r>
-              <a:rPr lang="en-AU" dirty="0"/>
-              <a:t>XXX</a:t>
-            </a:r>
-          </a:p>
-        </p:txBody>
-      </p:sp>
-    </p:spTree>
-    <p:extLst>
-      <p:ext uri="{BB962C8B-B14F-4D97-AF65-F5344CB8AC3E}">
-        <p14:creationId xmlns:p14="http://schemas.microsoft.com/office/powerpoint/2010/main" val="163851469"/>
       </p:ext>
     </p:extLst>
   </p:cSld>
@@ -22301,6 +24128,18 @@
 </file>
 
 <file path=ppt/tags/tag35.xml><?xml version="1.0" encoding="utf-8"?>
+<p:tagLst xmlns:a="http://schemas.openxmlformats.org/drawingml/2006/main" xmlns:r="http://schemas.openxmlformats.org/officeDocument/2006/relationships" xmlns:p="http://schemas.openxmlformats.org/presentationml/2006/main">
+  <p:tag name="THINKCELLSHAPEDONOTDELETE" val="thinkcellActiveDocDoNotDelete"/>
+</p:tagLst>
+</file>
+
+<file path=ppt/tags/tag36.xml><?xml version="1.0" encoding="utf-8"?>
+<p:tagLst xmlns:a="http://schemas.openxmlformats.org/drawingml/2006/main" xmlns:r="http://schemas.openxmlformats.org/officeDocument/2006/relationships" xmlns:p="http://schemas.openxmlformats.org/presentationml/2006/main">
+  <p:tag name="THINKCELLSHAPEDONOTDELETE" val="thinkcellActiveDocDoNotDelete"/>
+</p:tagLst>
+</file>
+
+<file path=ppt/tags/tag37.xml><?xml version="1.0" encoding="utf-8"?>
 <p:tagLst xmlns:a="http://schemas.openxmlformats.org/drawingml/2006/main" xmlns:r="http://schemas.openxmlformats.org/officeDocument/2006/relationships" xmlns:p="http://schemas.openxmlformats.org/presentationml/2006/main">
   <p:tag name="THINKCELLSHAPEDONOTDELETE" val="thinkcellActiveDocDoNotDelete"/>
 </p:tagLst>
@@ -23244,15 +25083,6 @@
 </file>
 
 <file path=customXml/item1.xml><?xml version="1.0" encoding="utf-8"?>
-<?mso-contentType ?>
-<FormTemplates xmlns="http://schemas.microsoft.com/sharepoint/v3/contenttype/forms">
-  <Display>DocumentLibraryForm</Display>
-  <Edit>DocumentLibraryForm</Edit>
-  <New>DocumentLibraryForm</New>
-</FormTemplates>
-</file>
-
-<file path=customXml/item2.xml><?xml version="1.0" encoding="utf-8"?>
 <ct:contentTypeSchema xmlns:ct="http://schemas.microsoft.com/office/2006/metadata/contentType" xmlns:ma="http://schemas.microsoft.com/office/2006/metadata/properties/metaAttributes" ct:_="" ma:_="" ma:contentTypeName="Document" ma:contentTypeID="0x010100E38A1619F266734FBC2B48FB95398739" ma:contentTypeVersion="18" ma:contentTypeDescription="Create a new document." ma:contentTypeScope="" ma:versionID="8dc4163b27f0ec44a22c6d7358323f5f">
   <xsd:schema xmlns:xsd="http://www.w3.org/2001/XMLSchema" xmlns:xs="http://www.w3.org/2001/XMLSchema" xmlns:p="http://schemas.microsoft.com/office/2006/metadata/properties" xmlns:ns2="aa802c90-64f7-4260-a678-c5c09559402a" xmlns:ns3="d4025935-85eb-43e8-ab32-734675053e7f" targetNamespace="http://schemas.microsoft.com/office/2006/metadata/properties" ma:root="true" ma:fieldsID="a1176a965c39d1ac1c7d6ef690b32559" ns2:_="" ns3:_="">
     <xsd:import namespace="aa802c90-64f7-4260-a678-c5c09559402a"/>
@@ -23507,6 +25337,15 @@
 </ct:contentTypeSchema>
 </file>
 
+<file path=customXml/item2.xml><?xml version="1.0" encoding="utf-8"?>
+<?mso-contentType ?>
+<FormTemplates xmlns="http://schemas.microsoft.com/sharepoint/v3/contenttype/forms">
+  <Display>DocumentLibraryForm</Display>
+  <Edit>DocumentLibraryForm</Edit>
+  <New>DocumentLibraryForm</New>
+</FormTemplates>
+</file>
+
 <file path=customXml/item3.xml><?xml version="1.0" encoding="utf-8"?>
 <p:properties xmlns:p="http://schemas.microsoft.com/office/2006/metadata/properties" xmlns:xsi="http://www.w3.org/2001/XMLSchema-instance" xmlns:pc="http://schemas.microsoft.com/office/infopath/2007/PartnerControls">
   <documentManagement>
@@ -23519,14 +25358,6 @@
 </file>
 
 <file path=customXml/itemProps1.xml><?xml version="1.0" encoding="utf-8"?>
-<ds:datastoreItem xmlns:ds="http://schemas.openxmlformats.org/officeDocument/2006/customXml" ds:itemID="{529E81E1-445C-4E91-8E35-C5BD736A3B77}">
-  <ds:schemaRefs>
-    <ds:schemaRef ds:uri="http://schemas.microsoft.com/sharepoint/v3/contenttype/forms"/>
-  </ds:schemaRefs>
-</ds:datastoreItem>
-</file>
-
-<file path=customXml/itemProps2.xml><?xml version="1.0" encoding="utf-8"?>
 <ds:datastoreItem xmlns:ds="http://schemas.openxmlformats.org/officeDocument/2006/customXml" ds:itemID="{C54E5144-405F-49D2-89C0-6C01A508B471}">
   <ds:schemaRefs>
     <ds:schemaRef ds:uri="http://schemas.microsoft.com/office/2006/metadata/contentType"/>
@@ -23541,6 +25372,14 @@
     <ds:schemaRef ds:uri="http://purl.org/dc/elements/1.1/"/>
     <ds:schemaRef ds:uri="http://purl.org/dc/terms/"/>
     <ds:schemaRef ds:uri="http://schemas.microsoft.com/internal/obd"/>
+  </ds:schemaRefs>
+</ds:datastoreItem>
+</file>
+
+<file path=customXml/itemProps2.xml><?xml version="1.0" encoding="utf-8"?>
+<ds:datastoreItem xmlns:ds="http://schemas.openxmlformats.org/officeDocument/2006/customXml" ds:itemID="{529E81E1-445C-4E91-8E35-C5BD736A3B77}">
+  <ds:schemaRefs>
+    <ds:schemaRef ds:uri="http://schemas.microsoft.com/sharepoint/v3/contenttype/forms"/>
   </ds:schemaRefs>
 </ds:datastoreItem>
 </file>

--- a/e61 Projects/Presentations/QETA Post-Budget 2026.pptx
+++ b/e61 Projects/Presentations/QETA Post-Budget 2026.pptx
@@ -253,7 +253,7 @@
           <a:p>
             <a:fld id="{60F87968-E7C3-4FA2-86D7-7CFDDCA2896A}" type="datetimeFigureOut">
               <a:rPr lang="en-US" smtClean="0"/>
-              <a:t>03-Aug-26</a:t>
+              <a:t>04-Aug-26</a:t>
             </a:fld>
             <a:endParaRPr lang="en-US"/>
           </a:p>
@@ -430,7 +430,7 @@
           <a:p>
             <a:fld id="{B416A7BE-E113-476D-8DE0-A6138461ACE1}" type="datetimeFigureOut">
               <a:rPr lang="en-US" smtClean="0"/>
-              <a:t>03-Aug-26</a:t>
+              <a:t>04-Aug-26</a:t>
             </a:fld>
             <a:endParaRPr lang="en-US"/>
           </a:p>
@@ -20486,7 +20486,12 @@
             <p:ph type="title"/>
           </p:nvPr>
         </p:nvSpPr>
-        <p:spPr/>
+        <p:spPr>
+          <a:xfrm>
+            <a:off x="370417" y="403873"/>
+            <a:ext cx="11459365" cy="700597"/>
+          </a:xfrm>
+        </p:spPr>
         <p:txBody>
           <a:bodyPr/>
           <a:lstStyle/>
@@ -20512,7 +20517,7 @@
         </p:nvSpPr>
         <p:spPr>
           <a:xfrm>
-            <a:off x="362218" y="1130288"/>
+            <a:off x="370417" y="991947"/>
             <a:ext cx="9681210" cy="646331"/>
           </a:xfrm>
           <a:prstGeom prst="rect">
@@ -20528,7 +20533,43 @@
           <a:p>
             <a:r>
               <a:rPr lang="en-AU" dirty="0"/>
-              <a:t>Budget 2026 took place given rising concerns about fiscal sustainability, intergenerational equity, and productivity growth – three topics that are closely linked.</a:t>
+              <a:t>Budget 2026 took place given rising concerns about </a:t>
+            </a:r>
+            <a:r>
+              <a:rPr lang="en-AU" dirty="0">
+                <a:solidFill>
+                  <a:schemeClr val="accent3"/>
+                </a:solidFill>
+              </a:rPr>
+              <a:t>fiscal sustainability</a:t>
+            </a:r>
+            <a:r>
+              <a:rPr lang="en-AU" dirty="0"/>
+              <a:t>, </a:t>
+            </a:r>
+            <a:r>
+              <a:rPr lang="en-AU" dirty="0">
+                <a:solidFill>
+                  <a:schemeClr val="accent5"/>
+                </a:solidFill>
+              </a:rPr>
+              <a:t>intergenerational equity</a:t>
+            </a:r>
+            <a:r>
+              <a:rPr lang="en-AU" dirty="0"/>
+              <a:t>, and </a:t>
+            </a:r>
+            <a:r>
+              <a:rPr lang="en-AU" dirty="0">
+                <a:solidFill>
+                  <a:schemeClr val="accent1"/>
+                </a:solidFill>
+              </a:rPr>
+              <a:t>productivity growth</a:t>
+            </a:r>
+            <a:r>
+              <a:rPr lang="en-AU" dirty="0"/>
+              <a:t> – three topics that are closely linked.</a:t>
             </a:r>
           </a:p>
         </p:txBody>
@@ -20547,8 +20588,8 @@
         </p:nvSpPr>
         <p:spPr>
           <a:xfrm>
-            <a:off x="459131" y="1971169"/>
-            <a:ext cx="6060541" cy="3739485"/>
+            <a:off x="362219" y="1988227"/>
+            <a:ext cx="5809982" cy="4308872"/>
           </a:xfrm>
           <a:prstGeom prst="rect">
             <a:avLst/>
@@ -20569,6 +20610,16 @@
               <a:buAutoNum type="arabicPeriod"/>
             </a:pPr>
             <a:r>
+              <a:rPr lang="en-AU" sz="1600" b="1" dirty="0">
+                <a:solidFill>
+                  <a:schemeClr val="bg1">
+                    <a:lumMod val="50000"/>
+                  </a:schemeClr>
+                </a:solidFill>
+              </a:rPr>
+              <a:t>NDIS reforms</a:t>
+            </a:r>
+            <a:r>
               <a:rPr lang="en-AU" sz="1600" dirty="0">
                 <a:solidFill>
                   <a:schemeClr val="bg1">
@@ -20576,7 +20627,7 @@
                   </a:schemeClr>
                 </a:solidFill>
               </a:rPr>
-              <a:t>NDIS reforms.</a:t>
+              <a:t>.</a:t>
             </a:r>
           </a:p>
           <a:p>
@@ -20658,6 +20709,16 @@
               <a:buAutoNum type="arabicPeriod"/>
             </a:pPr>
             <a:r>
+              <a:rPr lang="en-AU" sz="1600" b="1" dirty="0">
+                <a:solidFill>
+                  <a:schemeClr val="bg1">
+                    <a:lumMod val="50000"/>
+                  </a:schemeClr>
+                </a:solidFill>
+              </a:rPr>
+              <a:t>Tax reforms</a:t>
+            </a:r>
+            <a:r>
               <a:rPr lang="en-AU" sz="1600" dirty="0">
                 <a:solidFill>
                   <a:schemeClr val="bg1">
@@ -20665,7 +20726,7 @@
                   </a:schemeClr>
                 </a:solidFill>
               </a:rPr>
-              <a:t>Tax reforms.</a:t>
+              <a:t>.</a:t>
             </a:r>
           </a:p>
           <a:p>
@@ -20731,6 +20792,25 @@
               <a:buChar char="•"/>
             </a:pPr>
             <a:r>
+              <a:rPr lang="en-AU" sz="1600" dirty="0">
+                <a:solidFill>
+                  <a:schemeClr val="bg1">
+                    <a:lumMod val="50000"/>
+                  </a:schemeClr>
+                </a:solidFill>
+              </a:rPr>
+              <a:t>Minimum trust tax rate.</a:t>
+            </a:r>
+          </a:p>
+          <a:p>
+            <a:pPr marL="800100" lvl="1" indent="-342900">
+              <a:spcAft>
+                <a:spcPts val="600"/>
+              </a:spcAft>
+              <a:buFont typeface="Arial" panose="020B0604020202020204" pitchFamily="34" charset="0"/>
+              <a:buChar char="•"/>
+            </a:pPr>
+            <a:r>
               <a:rPr lang="en-AU" sz="1600" b="1" dirty="0">
                 <a:solidFill>
                   <a:schemeClr val="accent3">
@@ -20743,6 +20823,36 @@
           </a:p>
         </p:txBody>
       </p:sp>
+      <p:pic>
+        <p:nvPicPr>
+          <p:cNvPr id="7" name="Picture 6">
+            <a:extLst>
+              <a:ext uri="{FF2B5EF4-FFF2-40B4-BE49-F238E27FC236}">
+                <a16:creationId xmlns:a16="http://schemas.microsoft.com/office/drawing/2014/main" id="{6A1C9893-42F1-9C15-105C-9F675CD7A59A}"/>
+              </a:ext>
+            </a:extLst>
+          </p:cNvPr>
+          <p:cNvPicPr>
+            <a:picLocks noChangeAspect="1"/>
+          </p:cNvPicPr>
+          <p:nvPr/>
+        </p:nvPicPr>
+        <p:blipFill>
+          <a:blip r:embed="rId5"/>
+          <a:stretch>
+            <a:fillRect/>
+          </a:stretch>
+        </p:blipFill>
+        <p:spPr>
+          <a:xfrm>
+            <a:off x="6254497" y="1629743"/>
+            <a:ext cx="5341423" cy="4702674"/>
+          </a:xfrm>
+          <a:prstGeom prst="rect">
+            <a:avLst/>
+          </a:prstGeom>
+        </p:spPr>
+      </p:pic>
     </p:spTree>
     <p:extLst>
       <p:ext uri="{BB962C8B-B14F-4D97-AF65-F5344CB8AC3E}">
@@ -21015,7 +21125,11 @@
               <a:t>Understanding taxation of capital gains requires thinking about </a:t>
             </a:r>
             <a:r>
-              <a:rPr lang="en-AU" i="1" dirty="0"/>
+              <a:rPr lang="en-AU" b="1" i="1" dirty="0">
+                <a:solidFill>
+                  <a:schemeClr val="accent2"/>
+                </a:solidFill>
+              </a:rPr>
               <a:t>income tax</a:t>
             </a:r>
             <a:r>
@@ -21115,7 +21229,7 @@
           <a:p>
             <a:r>
               <a:rPr lang="en-AU" dirty="0"/>
-              <a:t>Tax capital like wages?</a:t>
+              <a:t>Tax capital like wages? Intergenerational equity? Equity-efficiency trade-off.</a:t>
             </a:r>
           </a:p>
         </p:txBody>
@@ -21885,7 +21999,7 @@
           <a:p>
             <a:r>
               <a:rPr lang="en-AU" dirty="0"/>
-              <a:t>Tax capital like wages?</a:t>
+              <a:t>Tax capital like wages? Intergenerational equity? Equity-efficiency trade-off.</a:t>
             </a:r>
           </a:p>
         </p:txBody>
@@ -22657,6 +22771,202 @@
   <p:clrMapOvr>
     <a:masterClrMapping/>
   </p:clrMapOvr>
+  <p:timing>
+    <p:tnLst>
+      <p:par>
+        <p:cTn id="1" dur="indefinite" restart="never" nodeType="tmRoot">
+          <p:childTnLst>
+            <p:seq concurrent="1" nextAc="seek">
+              <p:cTn id="2" dur="indefinite" nodeType="mainSeq">
+                <p:childTnLst>
+                  <p:par>
+                    <p:cTn id="3" fill="hold">
+                      <p:stCondLst>
+                        <p:cond delay="indefinite"/>
+                      </p:stCondLst>
+                      <p:childTnLst>
+                        <p:par>
+                          <p:cTn id="4" fill="hold">
+                            <p:stCondLst>
+                              <p:cond delay="0"/>
+                            </p:stCondLst>
+                            <p:childTnLst>
+                              <p:par>
+                                <p:cTn id="5" presetID="1" presetClass="entr" presetSubtype="0" fill="hold" grpId="0" nodeType="clickEffect">
+                                  <p:stCondLst>
+                                    <p:cond delay="0"/>
+                                  </p:stCondLst>
+                                  <p:childTnLst>
+                                    <p:set>
+                                      <p:cBhvr>
+                                        <p:cTn id="6" dur="1" fill="hold">
+                                          <p:stCondLst>
+                                            <p:cond delay="0"/>
+                                          </p:stCondLst>
+                                        </p:cTn>
+                                        <p:tgtEl>
+                                          <p:spTgt spid="15"/>
+                                        </p:tgtEl>
+                                        <p:attrNameLst>
+                                          <p:attrName>style.visibility</p:attrName>
+                                        </p:attrNameLst>
+                                      </p:cBhvr>
+                                      <p:to>
+                                        <p:strVal val="visible"/>
+                                      </p:to>
+                                    </p:set>
+                                  </p:childTnLst>
+                                </p:cTn>
+                              </p:par>
+                            </p:childTnLst>
+                          </p:cTn>
+                        </p:par>
+                      </p:childTnLst>
+                    </p:cTn>
+                  </p:par>
+                  <p:par>
+                    <p:cTn id="7" fill="hold">
+                      <p:stCondLst>
+                        <p:cond delay="indefinite"/>
+                      </p:stCondLst>
+                      <p:childTnLst>
+                        <p:par>
+                          <p:cTn id="8" fill="hold">
+                            <p:stCondLst>
+                              <p:cond delay="0"/>
+                            </p:stCondLst>
+                            <p:childTnLst>
+                              <p:par>
+                                <p:cTn id="9" presetID="1" presetClass="entr" presetSubtype="0" fill="hold" grpId="0" nodeType="clickEffect">
+                                  <p:stCondLst>
+                                    <p:cond delay="0"/>
+                                  </p:stCondLst>
+                                  <p:childTnLst>
+                                    <p:set>
+                                      <p:cBhvr>
+                                        <p:cTn id="10" dur="1" fill="hold">
+                                          <p:stCondLst>
+                                            <p:cond delay="0"/>
+                                          </p:stCondLst>
+                                        </p:cTn>
+                                        <p:tgtEl>
+                                          <p:spTgt spid="14"/>
+                                        </p:tgtEl>
+                                        <p:attrNameLst>
+                                          <p:attrName>style.visibility</p:attrName>
+                                        </p:attrNameLst>
+                                      </p:cBhvr>
+                                      <p:to>
+                                        <p:strVal val="visible"/>
+                                      </p:to>
+                                    </p:set>
+                                  </p:childTnLst>
+                                </p:cTn>
+                              </p:par>
+                              <p:par>
+                                <p:cTn id="11" presetID="1" presetClass="entr" presetSubtype="0" fill="hold" nodeType="withEffect">
+                                  <p:stCondLst>
+                                    <p:cond delay="0"/>
+                                  </p:stCondLst>
+                                  <p:childTnLst>
+                                    <p:set>
+                                      <p:cBhvr>
+                                        <p:cTn id="12" dur="1" fill="hold">
+                                          <p:stCondLst>
+                                            <p:cond delay="0"/>
+                                          </p:stCondLst>
+                                        </p:cTn>
+                                        <p:tgtEl>
+                                          <p:spTgt spid="13"/>
+                                        </p:tgtEl>
+                                        <p:attrNameLst>
+                                          <p:attrName>style.visibility</p:attrName>
+                                        </p:attrNameLst>
+                                      </p:cBhvr>
+                                      <p:to>
+                                        <p:strVal val="visible"/>
+                                      </p:to>
+                                    </p:set>
+                                  </p:childTnLst>
+                                </p:cTn>
+                              </p:par>
+                            </p:childTnLst>
+                          </p:cTn>
+                        </p:par>
+                      </p:childTnLst>
+                    </p:cTn>
+                  </p:par>
+                  <p:par>
+                    <p:cTn id="13" fill="hold">
+                      <p:stCondLst>
+                        <p:cond delay="indefinite"/>
+                      </p:stCondLst>
+                      <p:childTnLst>
+                        <p:par>
+                          <p:cTn id="14" fill="hold">
+                            <p:stCondLst>
+                              <p:cond delay="0"/>
+                            </p:stCondLst>
+                            <p:childTnLst>
+                              <p:par>
+                                <p:cTn id="15" presetID="1" presetClass="entr" presetSubtype="0" fill="hold" nodeType="clickEffect">
+                                  <p:stCondLst>
+                                    <p:cond delay="0"/>
+                                  </p:stCondLst>
+                                  <p:childTnLst>
+                                    <p:set>
+                                      <p:cBhvr>
+                                        <p:cTn id="16" dur="1" fill="hold">
+                                          <p:stCondLst>
+                                            <p:cond delay="0"/>
+                                          </p:stCondLst>
+                                        </p:cTn>
+                                        <p:tgtEl>
+                                          <p:spTgt spid="17"/>
+                                        </p:tgtEl>
+                                        <p:attrNameLst>
+                                          <p:attrName>style.visibility</p:attrName>
+                                        </p:attrNameLst>
+                                      </p:cBhvr>
+                                      <p:to>
+                                        <p:strVal val="visible"/>
+                                      </p:to>
+                                    </p:set>
+                                  </p:childTnLst>
+                                </p:cTn>
+                              </p:par>
+                            </p:childTnLst>
+                          </p:cTn>
+                        </p:par>
+                      </p:childTnLst>
+                    </p:cTn>
+                  </p:par>
+                </p:childTnLst>
+              </p:cTn>
+              <p:prevCondLst>
+                <p:cond evt="onPrev" delay="0">
+                  <p:tgtEl>
+                    <p:sldTgt/>
+                  </p:tgtEl>
+                </p:cond>
+              </p:prevCondLst>
+              <p:nextCondLst>
+                <p:cond evt="onNext" delay="0">
+                  <p:tgtEl>
+                    <p:sldTgt/>
+                  </p:tgtEl>
+                </p:cond>
+              </p:nextCondLst>
+            </p:seq>
+          </p:childTnLst>
+        </p:cTn>
+      </p:par>
+    </p:tnLst>
+    <p:bldLst>
+      <p:bldP spid="15" grpId="0"/>
+      <p:bldP spid="14" grpId="0"/>
+    </p:bldLst>
+  </p:timing>
 </p:sld>
 </file>
 
@@ -22950,6 +23260,129 @@
   <p:clrMapOvr>
     <a:masterClrMapping/>
   </p:clrMapOvr>
+  <p:timing>
+    <p:tnLst>
+      <p:par>
+        <p:cTn id="1" dur="indefinite" restart="never" nodeType="tmRoot">
+          <p:childTnLst>
+            <p:seq concurrent="1" nextAc="seek">
+              <p:cTn id="2" dur="indefinite" nodeType="mainSeq">
+                <p:childTnLst>
+                  <p:par>
+                    <p:cTn id="3" fill="hold">
+                      <p:stCondLst>
+                        <p:cond delay="indefinite"/>
+                      </p:stCondLst>
+                      <p:childTnLst>
+                        <p:par>
+                          <p:cTn id="4" fill="hold">
+                            <p:stCondLst>
+                              <p:cond delay="0"/>
+                            </p:stCondLst>
+                            <p:childTnLst>
+                              <p:par>
+                                <p:cTn id="5" presetID="1" presetClass="entr" presetSubtype="0" fill="hold" grpId="0" nodeType="clickEffect">
+                                  <p:stCondLst>
+                                    <p:cond delay="0"/>
+                                  </p:stCondLst>
+                                  <p:childTnLst>
+                                    <p:set>
+                                      <p:cBhvr>
+                                        <p:cTn id="6" dur="1" fill="hold">
+                                          <p:stCondLst>
+                                            <p:cond delay="0"/>
+                                          </p:stCondLst>
+                                        </p:cTn>
+                                        <p:tgtEl>
+                                          <p:spTgt spid="11"/>
+                                        </p:tgtEl>
+                                        <p:attrNameLst>
+                                          <p:attrName>style.visibility</p:attrName>
+                                        </p:attrNameLst>
+                                      </p:cBhvr>
+                                      <p:to>
+                                        <p:strVal val="visible"/>
+                                      </p:to>
+                                    </p:set>
+                                  </p:childTnLst>
+                                </p:cTn>
+                              </p:par>
+                            </p:childTnLst>
+                          </p:cTn>
+                        </p:par>
+                      </p:childTnLst>
+                    </p:cTn>
+                  </p:par>
+                  <p:par>
+                    <p:cTn id="7" fill="hold">
+                      <p:stCondLst>
+                        <p:cond delay="indefinite"/>
+                      </p:stCondLst>
+                      <p:childTnLst>
+                        <p:par>
+                          <p:cTn id="8" fill="hold">
+                            <p:stCondLst>
+                              <p:cond delay="0"/>
+                            </p:stCondLst>
+                            <p:childTnLst>
+                              <p:par>
+                                <p:cTn id="9" presetID="1" presetClass="entr" presetSubtype="0" fill="hold" nodeType="clickEffect">
+                                  <p:stCondLst>
+                                    <p:cond delay="0"/>
+                                  </p:stCondLst>
+                                  <p:childTnLst>
+                                    <p:set>
+                                      <p:cBhvr>
+                                        <p:cTn id="10" dur="1" fill="hold">
+                                          <p:stCondLst>
+                                            <p:cond delay="0"/>
+                                          </p:stCondLst>
+                                        </p:cTn>
+                                        <p:tgtEl>
+                                          <p:spTgt spid="8"/>
+                                        </p:tgtEl>
+                                        <p:attrNameLst>
+                                          <p:attrName>style.visibility</p:attrName>
+                                        </p:attrNameLst>
+                                      </p:cBhvr>
+                                      <p:to>
+                                        <p:strVal val="visible"/>
+                                      </p:to>
+                                    </p:set>
+                                  </p:childTnLst>
+                                </p:cTn>
+                              </p:par>
+                            </p:childTnLst>
+                          </p:cTn>
+                        </p:par>
+                      </p:childTnLst>
+                    </p:cTn>
+                  </p:par>
+                </p:childTnLst>
+              </p:cTn>
+              <p:prevCondLst>
+                <p:cond evt="onPrev" delay="0">
+                  <p:tgtEl>
+                    <p:sldTgt/>
+                  </p:tgtEl>
+                </p:cond>
+              </p:prevCondLst>
+              <p:nextCondLst>
+                <p:cond evt="onNext" delay="0">
+                  <p:tgtEl>
+                    <p:sldTgt/>
+                  </p:tgtEl>
+                </p:cond>
+              </p:nextCondLst>
+            </p:seq>
+          </p:childTnLst>
+        </p:cTn>
+      </p:par>
+    </p:tnLst>
+    <p:bldLst>
+      <p:bldP spid="11" grpId="0"/>
+    </p:bldLst>
+  </p:timing>
 </p:sld>
 </file>
 
@@ -23900,8 +24333,8 @@
         </p:nvSpPr>
         <p:spPr>
           <a:xfrm>
-            <a:off x="370417" y="4645780"/>
-            <a:ext cx="10903190" cy="923330"/>
+            <a:off x="370417" y="4615785"/>
+            <a:ext cx="10903190" cy="1477328"/>
           </a:xfrm>
           <a:prstGeom prst="rect">
             <a:avLst/>
@@ -23919,7 +24352,13 @@
               <a:buChar char="•"/>
             </a:pPr>
             <a:r>
-              <a:rPr lang="en-AU" dirty="0"/>
+              <a:rPr lang="en-AU" dirty="0">
+                <a:solidFill>
+                  <a:schemeClr val="bg1">
+                    <a:lumMod val="50000"/>
+                  </a:schemeClr>
+                </a:solidFill>
+              </a:rPr>
               <a:t>Asymmetric treatment of losses.</a:t>
             </a:r>
           </a:p>
@@ -23929,8 +24368,54 @@
               <a:buChar char="•"/>
             </a:pPr>
             <a:r>
-              <a:rPr lang="en-AU" dirty="0"/>
-              <a:t>No “income averaging”.</a:t>
+              <a:rPr lang="en-AU" dirty="0">
+                <a:solidFill>
+                  <a:schemeClr val="bg1">
+                    <a:lumMod val="50000"/>
+                  </a:schemeClr>
+                </a:solidFill>
+              </a:rPr>
+              <a:t>No “income averaging” – over-taxation of </a:t>
+            </a:r>
+            <a:r>
+              <a:rPr lang="en-AU" i="1" dirty="0">
+                <a:solidFill>
+                  <a:schemeClr val="bg1">
+                    <a:lumMod val="50000"/>
+                  </a:schemeClr>
+                </a:solidFill>
+              </a:rPr>
+              <a:t>lumpy</a:t>
+            </a:r>
+            <a:r>
+              <a:rPr lang="en-AU" dirty="0">
+                <a:solidFill>
+                  <a:schemeClr val="bg1">
+                    <a:lumMod val="50000"/>
+                  </a:schemeClr>
+                </a:solidFill>
+              </a:rPr>
+              <a:t> income such as capital gains, incentives for </a:t>
+            </a:r>
+            <a:r>
+              <a:rPr lang="en-AU" b="1" dirty="0">
+                <a:solidFill>
+                  <a:schemeClr val="bg1">
+                    <a:lumMod val="50000"/>
+                  </a:schemeClr>
+                </a:solidFill>
+              </a:rPr>
+              <a:t>strategic timing</a:t>
+            </a:r>
+            <a:r>
+              <a:rPr lang="en-AU" dirty="0">
+                <a:solidFill>
+                  <a:schemeClr val="bg1">
+                    <a:lumMod val="50000"/>
+                  </a:schemeClr>
+                </a:solidFill>
+              </a:rPr>
+              <a:t>.</a:t>
             </a:r>
           </a:p>
           <a:p>
@@ -23939,12 +24424,114 @@
               <a:buChar char="•"/>
             </a:pPr>
             <a:r>
+              <a:rPr lang="en-AU" dirty="0">
+                <a:solidFill>
+                  <a:schemeClr val="bg1">
+                    <a:lumMod val="50000"/>
+                  </a:schemeClr>
+                </a:solidFill>
+              </a:rPr>
+              <a:t>Minimum rates.</a:t>
+            </a:r>
+          </a:p>
+          <a:p>
+            <a:pPr marL="285750" indent="-285750">
+              <a:buFont typeface="Arial" panose="020B0604020202020204" pitchFamily="34" charset="0"/>
+              <a:buChar char="•"/>
+            </a:pPr>
+            <a:r>
+              <a:rPr lang="en-AU" dirty="0">
+                <a:solidFill>
+                  <a:schemeClr val="bg1">
+                    <a:lumMod val="50000"/>
+                  </a:schemeClr>
+                </a:solidFill>
+              </a:rPr>
+              <a:t>Is inflation the correct discount rate?</a:t>
+            </a:r>
+          </a:p>
+        </p:txBody>
+      </p:sp>
+      <p:sp>
+        <p:nvSpPr>
+          <p:cNvPr id="5" name="TextBox 4">
+            <a:extLst>
+              <a:ext uri="{FF2B5EF4-FFF2-40B4-BE49-F238E27FC236}">
+                <a16:creationId xmlns:a16="http://schemas.microsoft.com/office/drawing/2014/main" id="{43CEC6B1-AB69-4D14-F097-692DA7803FD7}"/>
+              </a:ext>
+            </a:extLst>
+          </p:cNvPr>
+          <p:cNvSpPr txBox="1"/>
+          <p:nvPr/>
+        </p:nvSpPr>
+        <p:spPr>
+          <a:xfrm>
+            <a:off x="1010497" y="6179029"/>
+            <a:ext cx="10903190" cy="369332"/>
+          </a:xfrm>
+          <a:prstGeom prst="rect">
+            <a:avLst/>
+          </a:prstGeom>
+          <a:noFill/>
+        </p:spPr>
+        <p:txBody>
+          <a:bodyPr wrap="square">
+            <a:spAutoFit/>
+          </a:bodyPr>
+          <a:lstStyle/>
+          <a:p>
+            <a:r>
               <a:rPr lang="en-AU" dirty="0"/>
-              <a:t>Minimum rates.</a:t>
-            </a:r>
-          </a:p>
-        </p:txBody>
-      </p:sp>
+              <a:t>Consistency would also discount other capital income.</a:t>
+            </a:r>
+          </a:p>
+        </p:txBody>
+      </p:sp>
+      <p:cxnSp>
+        <p:nvCxnSpPr>
+          <p:cNvPr id="9" name="Straight Arrow Connector 8">
+            <a:extLst>
+              <a:ext uri="{FF2B5EF4-FFF2-40B4-BE49-F238E27FC236}">
+                <a16:creationId xmlns:a16="http://schemas.microsoft.com/office/drawing/2014/main" id="{B661409E-E106-1978-75B5-B45A4E581F6F}"/>
+              </a:ext>
+            </a:extLst>
+          </p:cNvPr>
+          <p:cNvCxnSpPr/>
+          <p:nvPr/>
+        </p:nvCxnSpPr>
+        <p:spPr>
+          <a:xfrm>
+            <a:off x="512064" y="6395097"/>
+            <a:ext cx="411480" cy="0"/>
+          </a:xfrm>
+          <a:prstGeom prst="straightConnector1">
+            <a:avLst/>
+          </a:prstGeom>
+          <a:ln w="38100">
+            <a:solidFill>
+              <a:schemeClr val="tx1"/>
+            </a:solidFill>
+            <a:prstDash val="solid"/>
+            <a:headEnd type="none" w="med" len="med"/>
+            <a:tailEnd type="triangle"/>
+          </a:ln>
+          <a:effectLst/>
+        </p:spPr>
+        <p:style>
+          <a:lnRef idx="2">
+            <a:schemeClr val="accent1"/>
+          </a:lnRef>
+          <a:fillRef idx="0">
+            <a:schemeClr val="accent1"/>
+          </a:fillRef>
+          <a:effectRef idx="1">
+            <a:schemeClr val="accent1"/>
+          </a:effectRef>
+          <a:fontRef idx="minor">
+            <a:schemeClr val="tx1"/>
+          </a:fontRef>
+        </p:style>
+      </p:cxnSp>
     </p:spTree>
     <p:extLst>
       <p:ext uri="{BB962C8B-B14F-4D97-AF65-F5344CB8AC3E}">
@@ -25083,6 +25670,15 @@
 </file>
 
 <file path=customXml/item1.xml><?xml version="1.0" encoding="utf-8"?>
+<?mso-contentType ?>
+<FormTemplates xmlns="http://schemas.microsoft.com/sharepoint/v3/contenttype/forms">
+  <Display>DocumentLibraryForm</Display>
+  <Edit>DocumentLibraryForm</Edit>
+  <New>DocumentLibraryForm</New>
+</FormTemplates>
+</file>
+
+<file path=customXml/item2.xml><?xml version="1.0" encoding="utf-8"?>
 <ct:contentTypeSchema xmlns:ct="http://schemas.microsoft.com/office/2006/metadata/contentType" xmlns:ma="http://schemas.microsoft.com/office/2006/metadata/properties/metaAttributes" ct:_="" ma:_="" ma:contentTypeName="Document" ma:contentTypeID="0x010100E38A1619F266734FBC2B48FB95398739" ma:contentTypeVersion="18" ma:contentTypeDescription="Create a new document." ma:contentTypeScope="" ma:versionID="8dc4163b27f0ec44a22c6d7358323f5f">
   <xsd:schema xmlns:xsd="http://www.w3.org/2001/XMLSchema" xmlns:xs="http://www.w3.org/2001/XMLSchema" xmlns:p="http://schemas.microsoft.com/office/2006/metadata/properties" xmlns:ns2="aa802c90-64f7-4260-a678-c5c09559402a" xmlns:ns3="d4025935-85eb-43e8-ab32-734675053e7f" targetNamespace="http://schemas.microsoft.com/office/2006/metadata/properties" ma:root="true" ma:fieldsID="a1176a965c39d1ac1c7d6ef690b32559" ns2:_="" ns3:_="">
     <xsd:import namespace="aa802c90-64f7-4260-a678-c5c09559402a"/>
@@ -25337,15 +25933,6 @@
 </ct:contentTypeSchema>
 </file>
 
-<file path=customXml/item2.xml><?xml version="1.0" encoding="utf-8"?>
-<?mso-contentType ?>
-<FormTemplates xmlns="http://schemas.microsoft.com/sharepoint/v3/contenttype/forms">
-  <Display>DocumentLibraryForm</Display>
-  <Edit>DocumentLibraryForm</Edit>
-  <New>DocumentLibraryForm</New>
-</FormTemplates>
-</file>
-
 <file path=customXml/item3.xml><?xml version="1.0" encoding="utf-8"?>
 <p:properties xmlns:p="http://schemas.microsoft.com/office/2006/metadata/properties" xmlns:xsi="http://www.w3.org/2001/XMLSchema-instance" xmlns:pc="http://schemas.microsoft.com/office/infopath/2007/PartnerControls">
   <documentManagement>
@@ -25358,6 +25945,14 @@
 </file>
 
 <file path=customXml/itemProps1.xml><?xml version="1.0" encoding="utf-8"?>
+<ds:datastoreItem xmlns:ds="http://schemas.openxmlformats.org/officeDocument/2006/customXml" ds:itemID="{529E81E1-445C-4E91-8E35-C5BD736A3B77}">
+  <ds:schemaRefs>
+    <ds:schemaRef ds:uri="http://schemas.microsoft.com/sharepoint/v3/contenttype/forms"/>
+  </ds:schemaRefs>
+</ds:datastoreItem>
+</file>
+
+<file path=customXml/itemProps2.xml><?xml version="1.0" encoding="utf-8"?>
 <ds:datastoreItem xmlns:ds="http://schemas.openxmlformats.org/officeDocument/2006/customXml" ds:itemID="{C54E5144-405F-49D2-89C0-6C01A508B471}">
   <ds:schemaRefs>
     <ds:schemaRef ds:uri="http://schemas.microsoft.com/office/2006/metadata/contentType"/>
@@ -25372,14 +25967,6 @@
     <ds:schemaRef ds:uri="http://purl.org/dc/elements/1.1/"/>
     <ds:schemaRef ds:uri="http://purl.org/dc/terms/"/>
     <ds:schemaRef ds:uri="http://schemas.microsoft.com/internal/obd"/>
-  </ds:schemaRefs>
-</ds:datastoreItem>
-</file>
-
-<file path=customXml/itemProps2.xml><?xml version="1.0" encoding="utf-8"?>
-<ds:datastoreItem xmlns:ds="http://schemas.openxmlformats.org/officeDocument/2006/customXml" ds:itemID="{529E81E1-445C-4E91-8E35-C5BD736A3B77}">
-  <ds:schemaRefs>
-    <ds:schemaRef ds:uri="http://schemas.microsoft.com/sharepoint/v3/contenttype/forms"/>
   </ds:schemaRefs>
 </ds:datastoreItem>
 </file>

--- a/e61 Projects/Presentations/QETA Post-Budget 2026.pptx
+++ b/e61 Projects/Presentations/QETA Post-Budget 2026.pptx
@@ -253,7 +253,7 @@
           <a:p>
             <a:fld id="{60F87968-E7C3-4FA2-86D7-7CFDDCA2896A}" type="datetimeFigureOut">
               <a:rPr lang="en-US" smtClean="0"/>
-              <a:t>04-Aug-26</a:t>
+              <a:t>8/5/2026</a:t>
             </a:fld>
             <a:endParaRPr lang="en-US"/>
           </a:p>
@@ -430,7 +430,7 @@
           <a:p>
             <a:fld id="{B416A7BE-E113-476D-8DE0-A6138461ACE1}" type="datetimeFigureOut">
               <a:rPr lang="en-US" smtClean="0"/>
-              <a:t>04-Aug-26</a:t>
+              <a:t>8/4/2026</a:t>
             </a:fld>
             <a:endParaRPr lang="en-US"/>
           </a:p>
@@ -20337,6 +20337,258 @@
           </a:p>
         </p:txBody>
       </p:sp>
+      <p:sp>
+        <p:nvSpPr>
+          <p:cNvPr id="3" name="TextBox 2">
+            <a:extLst>
+              <a:ext uri="{FF2B5EF4-FFF2-40B4-BE49-F238E27FC236}">
+                <a16:creationId xmlns:a16="http://schemas.microsoft.com/office/drawing/2014/main" id="{7707045B-159B-4AEA-D823-8650ED4F9BDA}"/>
+              </a:ext>
+            </a:extLst>
+          </p:cNvPr>
+          <p:cNvSpPr txBox="1"/>
+          <p:nvPr/>
+        </p:nvSpPr>
+        <p:spPr>
+          <a:xfrm>
+            <a:off x="366317" y="1932024"/>
+            <a:ext cx="10903190" cy="369332"/>
+          </a:xfrm>
+          <a:prstGeom prst="rect">
+            <a:avLst/>
+          </a:prstGeom>
+          <a:noFill/>
+        </p:spPr>
+        <p:txBody>
+          <a:bodyPr wrap="square">
+            <a:spAutoFit/>
+          </a:bodyPr>
+          <a:lstStyle/>
+          <a:p>
+            <a:pPr marL="285750" indent="-285750">
+              <a:spcAft>
+                <a:spcPts val="600"/>
+              </a:spcAft>
+              <a:buFont typeface="Arial" panose="020B0604020202020204" pitchFamily="34" charset="0"/>
+              <a:buChar char="•"/>
+            </a:pPr>
+            <a:r>
+              <a:rPr lang="en-AU" dirty="0"/>
+              <a:t>Changing residence shifts “passive” capital gains.</a:t>
+            </a:r>
+          </a:p>
+        </p:txBody>
+      </p:sp>
+      <p:sp>
+        <p:nvSpPr>
+          <p:cNvPr id="8" name="TextBox 7">
+            <a:extLst>
+              <a:ext uri="{FF2B5EF4-FFF2-40B4-BE49-F238E27FC236}">
+                <a16:creationId xmlns:a16="http://schemas.microsoft.com/office/drawing/2014/main" id="{D652F60F-C2A6-071E-A516-545C9B0ADB16}"/>
+              </a:ext>
+            </a:extLst>
+          </p:cNvPr>
+          <p:cNvSpPr txBox="1"/>
+          <p:nvPr/>
+        </p:nvSpPr>
+        <p:spPr>
+          <a:xfrm>
+            <a:off x="427277" y="4212483"/>
+            <a:ext cx="10903190" cy="369332"/>
+          </a:xfrm>
+          <a:prstGeom prst="rect">
+            <a:avLst/>
+          </a:prstGeom>
+          <a:noFill/>
+        </p:spPr>
+        <p:txBody>
+          <a:bodyPr wrap="square">
+            <a:spAutoFit/>
+          </a:bodyPr>
+          <a:lstStyle/>
+          <a:p>
+            <a:pPr marL="285750" indent="-285750">
+              <a:spcAft>
+                <a:spcPts val="600"/>
+              </a:spcAft>
+              <a:buFont typeface="Arial" panose="020B0604020202020204" pitchFamily="34" charset="0"/>
+              <a:buChar char="•"/>
+            </a:pPr>
+            <a:r>
+              <a:rPr lang="en-AU" dirty="0"/>
+              <a:t>Different rules for different assets.</a:t>
+            </a:r>
+          </a:p>
+        </p:txBody>
+      </p:sp>
+      <p:sp>
+        <p:nvSpPr>
+          <p:cNvPr id="9" name="TextBox 8">
+            <a:extLst>
+              <a:ext uri="{FF2B5EF4-FFF2-40B4-BE49-F238E27FC236}">
+                <a16:creationId xmlns:a16="http://schemas.microsoft.com/office/drawing/2014/main" id="{771E2808-E6EC-5ECA-D2BC-3A590A1A43DF}"/>
+              </a:ext>
+            </a:extLst>
+          </p:cNvPr>
+          <p:cNvSpPr txBox="1"/>
+          <p:nvPr/>
+        </p:nvSpPr>
+        <p:spPr>
+          <a:xfrm>
+            <a:off x="427277" y="4693236"/>
+            <a:ext cx="10903190" cy="369332"/>
+          </a:xfrm>
+          <a:prstGeom prst="rect">
+            <a:avLst/>
+          </a:prstGeom>
+          <a:noFill/>
+        </p:spPr>
+        <p:txBody>
+          <a:bodyPr wrap="square">
+            <a:spAutoFit/>
+          </a:bodyPr>
+          <a:lstStyle/>
+          <a:p>
+            <a:pPr marL="285750" indent="-285750">
+              <a:spcAft>
+                <a:spcPts val="600"/>
+              </a:spcAft>
+              <a:buFont typeface="Arial" panose="020B0604020202020204" pitchFamily="34" charset="0"/>
+              <a:buChar char="•"/>
+            </a:pPr>
+            <a:r>
+              <a:rPr lang="en-AU" dirty="0"/>
+              <a:t>Complicated minimum tax rules (especially alongside trusts).</a:t>
+            </a:r>
+          </a:p>
+        </p:txBody>
+      </p:sp>
+      <p:sp>
+        <p:nvSpPr>
+          <p:cNvPr id="10" name="TextBox 9">
+            <a:extLst>
+              <a:ext uri="{FF2B5EF4-FFF2-40B4-BE49-F238E27FC236}">
+                <a16:creationId xmlns:a16="http://schemas.microsoft.com/office/drawing/2014/main" id="{74B6A6AB-A021-7E47-B30F-1C109BAA96F7}"/>
+              </a:ext>
+            </a:extLst>
+          </p:cNvPr>
+          <p:cNvSpPr txBox="1"/>
+          <p:nvPr/>
+        </p:nvSpPr>
+        <p:spPr>
+          <a:xfrm>
+            <a:off x="427277" y="5247978"/>
+            <a:ext cx="10903190" cy="369332"/>
+          </a:xfrm>
+          <a:prstGeom prst="rect">
+            <a:avLst/>
+          </a:prstGeom>
+          <a:noFill/>
+        </p:spPr>
+        <p:txBody>
+          <a:bodyPr wrap="square">
+            <a:spAutoFit/>
+          </a:bodyPr>
+          <a:lstStyle/>
+          <a:p>
+            <a:pPr marL="285750" indent="-285750">
+              <a:spcAft>
+                <a:spcPts val="600"/>
+              </a:spcAft>
+              <a:buFont typeface="Arial" panose="020B0604020202020204" pitchFamily="34" charset="0"/>
+              <a:buChar char="•"/>
+            </a:pPr>
+            <a:r>
+              <a:rPr lang="en-AU" dirty="0"/>
+              <a:t>Transitional valuations.</a:t>
+            </a:r>
+          </a:p>
+        </p:txBody>
+      </p:sp>
+      <p:sp>
+        <p:nvSpPr>
+          <p:cNvPr id="11" name="TextBox 10">
+            <a:extLst>
+              <a:ext uri="{FF2B5EF4-FFF2-40B4-BE49-F238E27FC236}">
+                <a16:creationId xmlns:a16="http://schemas.microsoft.com/office/drawing/2014/main" id="{0868751C-401B-6A3C-AE41-159621942661}"/>
+              </a:ext>
+            </a:extLst>
+          </p:cNvPr>
+          <p:cNvSpPr txBox="1"/>
+          <p:nvPr/>
+        </p:nvSpPr>
+        <p:spPr>
+          <a:xfrm>
+            <a:off x="366317" y="2398544"/>
+            <a:ext cx="10903190" cy="369332"/>
+          </a:xfrm>
+          <a:prstGeom prst="rect">
+            <a:avLst/>
+          </a:prstGeom>
+          <a:noFill/>
+        </p:spPr>
+        <p:txBody>
+          <a:bodyPr wrap="square">
+            <a:spAutoFit/>
+          </a:bodyPr>
+          <a:lstStyle/>
+          <a:p>
+            <a:pPr marL="285750" indent="-285750">
+              <a:spcAft>
+                <a:spcPts val="600"/>
+              </a:spcAft>
+              <a:buFont typeface="Arial" panose="020B0604020202020204" pitchFamily="34" charset="0"/>
+              <a:buChar char="•"/>
+            </a:pPr>
+            <a:r>
+              <a:rPr lang="en-AU" dirty="0"/>
+              <a:t>Mobile ideas and finance can move.</a:t>
+            </a:r>
+          </a:p>
+        </p:txBody>
+      </p:sp>
+      <p:sp>
+        <p:nvSpPr>
+          <p:cNvPr id="12" name="TextBox 11">
+            <a:extLst>
+              <a:ext uri="{FF2B5EF4-FFF2-40B4-BE49-F238E27FC236}">
+                <a16:creationId xmlns:a16="http://schemas.microsoft.com/office/drawing/2014/main" id="{B6E91D39-9DAC-6049-C189-73F1B1845722}"/>
+              </a:ext>
+            </a:extLst>
+          </p:cNvPr>
+          <p:cNvSpPr txBox="1"/>
+          <p:nvPr/>
+        </p:nvSpPr>
+        <p:spPr>
+          <a:xfrm>
+            <a:off x="366317" y="2879297"/>
+            <a:ext cx="10903190" cy="369332"/>
+          </a:xfrm>
+          <a:prstGeom prst="rect">
+            <a:avLst/>
+          </a:prstGeom>
+          <a:noFill/>
+        </p:spPr>
+        <p:txBody>
+          <a:bodyPr wrap="square">
+            <a:spAutoFit/>
+          </a:bodyPr>
+          <a:lstStyle/>
+          <a:p>
+            <a:pPr marL="285750" indent="-285750">
+              <a:spcAft>
+                <a:spcPts val="600"/>
+              </a:spcAft>
+              <a:buFont typeface="Arial" panose="020B0604020202020204" pitchFamily="34" charset="0"/>
+              <a:buChar char="•"/>
+            </a:pPr>
+            <a:r>
+              <a:rPr lang="en-AU" dirty="0"/>
+              <a:t>Domestic value-add is less mobile.</a:t>
+            </a:r>
+          </a:p>
+        </p:txBody>
+      </p:sp>
     </p:spTree>
     <p:extLst>
       <p:ext uri="{BB962C8B-B14F-4D97-AF65-F5344CB8AC3E}">
@@ -20347,6 +20599,314 @@
   <p:clrMapOvr>
     <a:masterClrMapping/>
   </p:clrMapOvr>
+  <p:timing>
+    <p:tnLst>
+      <p:par>
+        <p:cTn id="1" dur="indefinite" restart="never" nodeType="tmRoot">
+          <p:childTnLst>
+            <p:seq concurrent="1" nextAc="seek">
+              <p:cTn id="2" dur="indefinite" nodeType="mainSeq">
+                <p:childTnLst>
+                  <p:par>
+                    <p:cTn id="3" fill="hold">
+                      <p:stCondLst>
+                        <p:cond delay="indefinite"/>
+                      </p:stCondLst>
+                      <p:childTnLst>
+                        <p:par>
+                          <p:cTn id="4" fill="hold">
+                            <p:stCondLst>
+                              <p:cond delay="0"/>
+                            </p:stCondLst>
+                            <p:childTnLst>
+                              <p:par>
+                                <p:cTn id="5" presetID="1" presetClass="entr" presetSubtype="0" fill="hold" grpId="0" nodeType="clickEffect">
+                                  <p:stCondLst>
+                                    <p:cond delay="0"/>
+                                  </p:stCondLst>
+                                  <p:childTnLst>
+                                    <p:set>
+                                      <p:cBhvr>
+                                        <p:cTn id="6" dur="1" fill="hold">
+                                          <p:stCondLst>
+                                            <p:cond delay="0"/>
+                                          </p:stCondLst>
+                                        </p:cTn>
+                                        <p:tgtEl>
+                                          <p:spTgt spid="3"/>
+                                        </p:tgtEl>
+                                        <p:attrNameLst>
+                                          <p:attrName>style.visibility</p:attrName>
+                                        </p:attrNameLst>
+                                      </p:cBhvr>
+                                      <p:to>
+                                        <p:strVal val="visible"/>
+                                      </p:to>
+                                    </p:set>
+                                  </p:childTnLst>
+                                </p:cTn>
+                              </p:par>
+                            </p:childTnLst>
+                          </p:cTn>
+                        </p:par>
+                      </p:childTnLst>
+                    </p:cTn>
+                  </p:par>
+                  <p:par>
+                    <p:cTn id="7" fill="hold">
+                      <p:stCondLst>
+                        <p:cond delay="indefinite"/>
+                      </p:stCondLst>
+                      <p:childTnLst>
+                        <p:par>
+                          <p:cTn id="8" fill="hold">
+                            <p:stCondLst>
+                              <p:cond delay="0"/>
+                            </p:stCondLst>
+                            <p:childTnLst>
+                              <p:par>
+                                <p:cTn id="9" presetID="1" presetClass="entr" presetSubtype="0" fill="hold" grpId="0" nodeType="clickEffect">
+                                  <p:stCondLst>
+                                    <p:cond delay="0"/>
+                                  </p:stCondLst>
+                                  <p:childTnLst>
+                                    <p:set>
+                                      <p:cBhvr>
+                                        <p:cTn id="10" dur="1" fill="hold">
+                                          <p:stCondLst>
+                                            <p:cond delay="0"/>
+                                          </p:stCondLst>
+                                        </p:cTn>
+                                        <p:tgtEl>
+                                          <p:spTgt spid="8"/>
+                                        </p:tgtEl>
+                                        <p:attrNameLst>
+                                          <p:attrName>style.visibility</p:attrName>
+                                        </p:attrNameLst>
+                                      </p:cBhvr>
+                                      <p:to>
+                                        <p:strVal val="visible"/>
+                                      </p:to>
+                                    </p:set>
+                                  </p:childTnLst>
+                                </p:cTn>
+                              </p:par>
+                            </p:childTnLst>
+                          </p:cTn>
+                        </p:par>
+                      </p:childTnLst>
+                    </p:cTn>
+                  </p:par>
+                  <p:par>
+                    <p:cTn id="11" fill="hold">
+                      <p:stCondLst>
+                        <p:cond delay="indefinite"/>
+                      </p:stCondLst>
+                      <p:childTnLst>
+                        <p:par>
+                          <p:cTn id="12" fill="hold">
+                            <p:stCondLst>
+                              <p:cond delay="0"/>
+                            </p:stCondLst>
+                            <p:childTnLst>
+                              <p:par>
+                                <p:cTn id="13" presetID="1" presetClass="entr" presetSubtype="0" fill="hold" grpId="0" nodeType="clickEffect">
+                                  <p:stCondLst>
+                                    <p:cond delay="0"/>
+                                  </p:stCondLst>
+                                  <p:childTnLst>
+                                    <p:set>
+                                      <p:cBhvr>
+                                        <p:cTn id="14" dur="1" fill="hold">
+                                          <p:stCondLst>
+                                            <p:cond delay="0"/>
+                                          </p:stCondLst>
+                                        </p:cTn>
+                                        <p:tgtEl>
+                                          <p:spTgt spid="9"/>
+                                        </p:tgtEl>
+                                        <p:attrNameLst>
+                                          <p:attrName>style.visibility</p:attrName>
+                                        </p:attrNameLst>
+                                      </p:cBhvr>
+                                      <p:to>
+                                        <p:strVal val="visible"/>
+                                      </p:to>
+                                    </p:set>
+                                  </p:childTnLst>
+                                </p:cTn>
+                              </p:par>
+                            </p:childTnLst>
+                          </p:cTn>
+                        </p:par>
+                      </p:childTnLst>
+                    </p:cTn>
+                  </p:par>
+                  <p:par>
+                    <p:cTn id="15" fill="hold">
+                      <p:stCondLst>
+                        <p:cond delay="indefinite"/>
+                      </p:stCondLst>
+                      <p:childTnLst>
+                        <p:par>
+                          <p:cTn id="16" fill="hold">
+                            <p:stCondLst>
+                              <p:cond delay="0"/>
+                            </p:stCondLst>
+                            <p:childTnLst>
+                              <p:par>
+                                <p:cTn id="17" presetID="1" presetClass="entr" presetSubtype="0" fill="hold" grpId="0" nodeType="clickEffect">
+                                  <p:stCondLst>
+                                    <p:cond delay="0"/>
+                                  </p:stCondLst>
+                                  <p:childTnLst>
+                                    <p:set>
+                                      <p:cBhvr>
+                                        <p:cTn id="18" dur="1" fill="hold">
+                                          <p:stCondLst>
+                                            <p:cond delay="0"/>
+                                          </p:stCondLst>
+                                        </p:cTn>
+                                        <p:tgtEl>
+                                          <p:spTgt spid="10"/>
+                                        </p:tgtEl>
+                                        <p:attrNameLst>
+                                          <p:attrName>style.visibility</p:attrName>
+                                        </p:attrNameLst>
+                                      </p:cBhvr>
+                                      <p:to>
+                                        <p:strVal val="visible"/>
+                                      </p:to>
+                                    </p:set>
+                                  </p:childTnLst>
+                                </p:cTn>
+                              </p:par>
+                            </p:childTnLst>
+                          </p:cTn>
+                        </p:par>
+                      </p:childTnLst>
+                    </p:cTn>
+                  </p:par>
+                  <p:par>
+                    <p:cTn id="19" fill="hold">
+                      <p:stCondLst>
+                        <p:cond delay="indefinite"/>
+                      </p:stCondLst>
+                      <p:childTnLst>
+                        <p:par>
+                          <p:cTn id="20" fill="hold">
+                            <p:stCondLst>
+                              <p:cond delay="0"/>
+                            </p:stCondLst>
+                            <p:childTnLst>
+                              <p:par>
+                                <p:cTn id="21" presetID="1" presetClass="entr" presetSubtype="0" fill="hold" grpId="0" nodeType="clickEffect">
+                                  <p:stCondLst>
+                                    <p:cond delay="0"/>
+                                  </p:stCondLst>
+                                  <p:childTnLst>
+                                    <p:set>
+                                      <p:cBhvr>
+                                        <p:cTn id="22" dur="1" fill="hold">
+                                          <p:stCondLst>
+                                            <p:cond delay="0"/>
+                                          </p:stCondLst>
+                                        </p:cTn>
+                                        <p:tgtEl>
+                                          <p:spTgt spid="11"/>
+                                        </p:tgtEl>
+                                        <p:attrNameLst>
+                                          <p:attrName>style.visibility</p:attrName>
+                                        </p:attrNameLst>
+                                      </p:cBhvr>
+                                      <p:to>
+                                        <p:strVal val="visible"/>
+                                      </p:to>
+                                    </p:set>
+                                  </p:childTnLst>
+                                </p:cTn>
+                              </p:par>
+                            </p:childTnLst>
+                          </p:cTn>
+                        </p:par>
+                      </p:childTnLst>
+                    </p:cTn>
+                  </p:par>
+                  <p:par>
+                    <p:cTn id="23" fill="hold">
+                      <p:stCondLst>
+                        <p:cond delay="indefinite"/>
+                      </p:stCondLst>
+                      <p:childTnLst>
+                        <p:par>
+                          <p:cTn id="24" fill="hold">
+                            <p:stCondLst>
+                              <p:cond delay="0"/>
+                            </p:stCondLst>
+                            <p:childTnLst>
+                              <p:par>
+                                <p:cTn id="25" presetID="1" presetClass="entr" presetSubtype="0" fill="hold" grpId="0" nodeType="clickEffect">
+                                  <p:stCondLst>
+                                    <p:cond delay="0"/>
+                                  </p:stCondLst>
+                                  <p:childTnLst>
+                                    <p:set>
+                                      <p:cBhvr>
+                                        <p:cTn id="26" dur="1" fill="hold">
+                                          <p:stCondLst>
+                                            <p:cond delay="0"/>
+                                          </p:stCondLst>
+                                        </p:cTn>
+                                        <p:tgtEl>
+                                          <p:spTgt spid="12"/>
+                                        </p:tgtEl>
+                                        <p:attrNameLst>
+                                          <p:attrName>style.visibility</p:attrName>
+                                        </p:attrNameLst>
+                                      </p:cBhvr>
+                                      <p:to>
+                                        <p:strVal val="visible"/>
+                                      </p:to>
+                                    </p:set>
+                                  </p:childTnLst>
+                                </p:cTn>
+                              </p:par>
+                            </p:childTnLst>
+                          </p:cTn>
+                        </p:par>
+                      </p:childTnLst>
+                    </p:cTn>
+                  </p:par>
+                </p:childTnLst>
+              </p:cTn>
+              <p:prevCondLst>
+                <p:cond evt="onPrev" delay="0">
+                  <p:tgtEl>
+                    <p:sldTgt/>
+                  </p:tgtEl>
+                </p:cond>
+              </p:prevCondLst>
+              <p:nextCondLst>
+                <p:cond evt="onNext" delay="0">
+                  <p:tgtEl>
+                    <p:sldTgt/>
+                  </p:tgtEl>
+                </p:cond>
+              </p:nextCondLst>
+            </p:seq>
+          </p:childTnLst>
+        </p:cTn>
+      </p:par>
+    </p:tnLst>
+    <p:bldLst>
+      <p:bldP spid="3" grpId="0"/>
+      <p:bldP spid="8" grpId="0"/>
+      <p:bldP spid="9" grpId="0"/>
+      <p:bldP spid="10" grpId="0"/>
+      <p:bldP spid="11" grpId="0"/>
+      <p:bldP spid="12" grpId="0"/>
+    </p:bldLst>
+  </p:timing>
 </p:sld>
 </file>
 
@@ -22619,7 +23179,7 @@
             </a:pPr>
             <a:r>
               <a:rPr lang="en-AU" dirty="0"/>
-              <a:t>Like other capital income, some of it is not “income”.</a:t>
+              <a:t>Like other capital income, some of the dollar amount is not “income”.</a:t>
             </a:r>
           </a:p>
           <a:p>
@@ -23242,7 +23802,7 @@
         </p:blipFill>
         <p:spPr>
           <a:xfrm>
-            <a:off x="1563475" y="2879227"/>
+            <a:off x="2772635" y="2791943"/>
             <a:ext cx="5175654" cy="3521779"/>
           </a:xfrm>
           <a:prstGeom prst="rect">
@@ -24298,7 +24858,7 @@
         </p:nvSpPr>
         <p:spPr>
           <a:xfrm>
-            <a:off x="370417" y="4127170"/>
+            <a:off x="370417" y="1062478"/>
             <a:ext cx="10903190" cy="369332"/>
           </a:xfrm>
           <a:prstGeom prst="rect">
@@ -24314,7 +24874,7 @@
           <a:p>
             <a:r>
               <a:rPr lang="en-AU" b="1" dirty="0"/>
-              <a:t>It was not clear these reforms should increase revenue.</a:t>
+              <a:t>It was not clear these reforms should increase revenue – but it does.</a:t>
             </a:r>
           </a:p>
         </p:txBody>
@@ -24333,8 +24893,8 @@
         </p:nvSpPr>
         <p:spPr>
           <a:xfrm>
-            <a:off x="370417" y="4615785"/>
-            <a:ext cx="10903190" cy="1477328"/>
+            <a:off x="370417" y="4489738"/>
+            <a:ext cx="8310677" cy="369332"/>
           </a:xfrm>
           <a:prstGeom prst="rect">
             <a:avLst/>
@@ -24359,43 +24919,7 @@
                   </a:schemeClr>
                 </a:solidFill>
               </a:rPr>
-              <a:t>Asymmetric treatment of losses.</a:t>
-            </a:r>
-          </a:p>
-          <a:p>
-            <a:pPr marL="285750" indent="-285750">
-              <a:buFont typeface="Arial" panose="020B0604020202020204" pitchFamily="34" charset="0"/>
-              <a:buChar char="•"/>
-            </a:pPr>
-            <a:r>
-              <a:rPr lang="en-AU" dirty="0">
-                <a:solidFill>
-                  <a:schemeClr val="bg1">
-                    <a:lumMod val="50000"/>
-                  </a:schemeClr>
-                </a:solidFill>
-              </a:rPr>
-              <a:t>No “income averaging” – over-taxation of </a:t>
-            </a:r>
-            <a:r>
-              <a:rPr lang="en-AU" i="1" dirty="0">
-                <a:solidFill>
-                  <a:schemeClr val="bg1">
-                    <a:lumMod val="50000"/>
-                  </a:schemeClr>
-                </a:solidFill>
-              </a:rPr>
-              <a:t>lumpy</a:t>
-            </a:r>
-            <a:r>
-              <a:rPr lang="en-AU" dirty="0">
-                <a:solidFill>
-                  <a:schemeClr val="bg1">
-                    <a:lumMod val="50000"/>
-                  </a:schemeClr>
-                </a:solidFill>
-              </a:rPr>
-              <a:t> income such as capital gains, incentives for </a:t>
+              <a:t>Gain from change in </a:t>
             </a:r>
             <a:r>
               <a:rPr lang="en-AU" b="1" dirty="0">
@@ -24405,7 +24929,7 @@
                   </a:schemeClr>
                 </a:solidFill>
               </a:rPr>
-              <a:t>strategic timing</a:t>
+              <a:t>distribution of tax rates</a:t>
             </a:r>
             <a:r>
               <a:rPr lang="en-AU" dirty="0">
@@ -24418,38 +24942,6 @@
               <a:t>.</a:t>
             </a:r>
           </a:p>
-          <a:p>
-            <a:pPr marL="285750" indent="-285750">
-              <a:buFont typeface="Arial" panose="020B0604020202020204" pitchFamily="34" charset="0"/>
-              <a:buChar char="•"/>
-            </a:pPr>
-            <a:r>
-              <a:rPr lang="en-AU" dirty="0">
-                <a:solidFill>
-                  <a:schemeClr val="bg1">
-                    <a:lumMod val="50000"/>
-                  </a:schemeClr>
-                </a:solidFill>
-              </a:rPr>
-              <a:t>Minimum rates.</a:t>
-            </a:r>
-          </a:p>
-          <a:p>
-            <a:pPr marL="285750" indent="-285750">
-              <a:buFont typeface="Arial" panose="020B0604020202020204" pitchFamily="34" charset="0"/>
-              <a:buChar char="•"/>
-            </a:pPr>
-            <a:r>
-              <a:rPr lang="en-AU" dirty="0">
-                <a:solidFill>
-                  <a:schemeClr val="bg1">
-                    <a:lumMod val="50000"/>
-                  </a:schemeClr>
-                </a:solidFill>
-              </a:rPr>
-              <a:t>Is inflation the correct discount rate?</a:t>
-            </a:r>
-          </a:p>
         </p:txBody>
       </p:sp>
       <p:sp>
@@ -24466,8 +24958,8 @@
         </p:nvSpPr>
         <p:spPr>
           <a:xfrm>
-            <a:off x="1010497" y="6179029"/>
-            <a:ext cx="10903190" cy="369332"/>
+            <a:off x="7320188" y="2782669"/>
+            <a:ext cx="3486358" cy="646331"/>
           </a:xfrm>
           <a:prstGeom prst="rect">
             <a:avLst/>
@@ -24501,7 +24993,7 @@
         </p:nvCxnSpPr>
         <p:spPr>
           <a:xfrm>
-            <a:off x="512064" y="6395097"/>
+            <a:off x="6829737" y="3132352"/>
             <a:ext cx="411480" cy="0"/>
           </a:xfrm>
           <a:prstGeom prst="straightConnector1">
@@ -24532,6 +25024,227 @@
           </a:fontRef>
         </p:style>
       </p:cxnSp>
+      <p:pic>
+        <p:nvPicPr>
+          <p:cNvPr id="3" name="Picture 2" descr="Figure 7">
+            <a:extLst>
+              <a:ext uri="{FF2B5EF4-FFF2-40B4-BE49-F238E27FC236}">
+                <a16:creationId xmlns:a16="http://schemas.microsoft.com/office/drawing/2014/main" id="{5D7EFDDD-DF5F-3245-1F42-CDEC7E8663D1}"/>
+              </a:ext>
+            </a:extLst>
+          </p:cNvPr>
+          <p:cNvPicPr>
+            <a:picLocks noChangeAspect="1"/>
+          </p:cNvPicPr>
+          <p:nvPr/>
+        </p:nvPicPr>
+        <p:blipFill>
+          <a:blip r:embed="rId5"/>
+          <a:stretch>
+            <a:fillRect/>
+          </a:stretch>
+        </p:blipFill>
+        <p:spPr>
+          <a:xfrm>
+            <a:off x="717804" y="1604864"/>
+            <a:ext cx="5794144" cy="2884874"/>
+          </a:xfrm>
+          <a:prstGeom prst="rect">
+            <a:avLst/>
+          </a:prstGeom>
+        </p:spPr>
+      </p:pic>
+      <p:sp>
+        <p:nvSpPr>
+          <p:cNvPr id="10" name="TextBox 9">
+            <a:extLst>
+              <a:ext uri="{FF2B5EF4-FFF2-40B4-BE49-F238E27FC236}">
+                <a16:creationId xmlns:a16="http://schemas.microsoft.com/office/drawing/2014/main" id="{6C4BD942-598F-E63F-3A4E-6C943DA3198C}"/>
+              </a:ext>
+            </a:extLst>
+          </p:cNvPr>
+          <p:cNvSpPr txBox="1"/>
+          <p:nvPr/>
+        </p:nvSpPr>
+        <p:spPr>
+          <a:xfrm>
+            <a:off x="370417" y="4832895"/>
+            <a:ext cx="9388725" cy="923330"/>
+          </a:xfrm>
+          <a:prstGeom prst="rect">
+            <a:avLst/>
+          </a:prstGeom>
+          <a:noFill/>
+        </p:spPr>
+        <p:txBody>
+          <a:bodyPr wrap="square">
+            <a:spAutoFit/>
+          </a:bodyPr>
+          <a:lstStyle/>
+          <a:p>
+            <a:pPr marL="285750" indent="-285750">
+              <a:buFont typeface="Arial" panose="020B0604020202020204" pitchFamily="34" charset="0"/>
+              <a:buChar char="•"/>
+            </a:pPr>
+            <a:r>
+              <a:rPr lang="en-AU" sz="1800" dirty="0">
+                <a:solidFill>
+                  <a:schemeClr val="bg1">
+                    <a:lumMod val="50000"/>
+                  </a:schemeClr>
+                </a:solidFill>
+              </a:rPr>
+              <a:t>Asymmetric treatment of losses.</a:t>
+            </a:r>
+          </a:p>
+          <a:p>
+            <a:pPr marL="285750" indent="-285750">
+              <a:buFont typeface="Arial" panose="020B0604020202020204" pitchFamily="34" charset="0"/>
+              <a:buChar char="•"/>
+            </a:pPr>
+            <a:r>
+              <a:rPr lang="en-AU" sz="1800" dirty="0">
+                <a:solidFill>
+                  <a:schemeClr val="bg1">
+                    <a:lumMod val="50000"/>
+                  </a:schemeClr>
+                </a:solidFill>
+              </a:rPr>
+              <a:t>No “income averaging” – over-taxation of </a:t>
+            </a:r>
+            <a:r>
+              <a:rPr lang="en-AU" sz="1800" i="1" dirty="0">
+                <a:solidFill>
+                  <a:schemeClr val="bg1">
+                    <a:lumMod val="50000"/>
+                  </a:schemeClr>
+                </a:solidFill>
+              </a:rPr>
+              <a:t>lumpy</a:t>
+            </a:r>
+            <a:r>
+              <a:rPr lang="en-AU" sz="1800" dirty="0">
+                <a:solidFill>
+                  <a:schemeClr val="bg1">
+                    <a:lumMod val="50000"/>
+                  </a:schemeClr>
+                </a:solidFill>
+              </a:rPr>
+              <a:t> income such as capital gains, incentives for </a:t>
+            </a:r>
+            <a:r>
+              <a:rPr lang="en-AU" sz="1800" b="1" dirty="0">
+                <a:solidFill>
+                  <a:schemeClr val="bg1">
+                    <a:lumMod val="50000"/>
+                  </a:schemeClr>
+                </a:solidFill>
+              </a:rPr>
+              <a:t>strategic timing</a:t>
+            </a:r>
+            <a:r>
+              <a:rPr lang="en-AU" sz="1800" dirty="0">
+                <a:solidFill>
+                  <a:schemeClr val="bg1">
+                    <a:lumMod val="50000"/>
+                  </a:schemeClr>
+                </a:solidFill>
+              </a:rPr>
+              <a:t>.</a:t>
+            </a:r>
+          </a:p>
+        </p:txBody>
+      </p:sp>
+      <p:sp>
+        <p:nvSpPr>
+          <p:cNvPr id="12" name="TextBox 11">
+            <a:extLst>
+              <a:ext uri="{FF2B5EF4-FFF2-40B4-BE49-F238E27FC236}">
+                <a16:creationId xmlns:a16="http://schemas.microsoft.com/office/drawing/2014/main" id="{5EC0AD33-BBDE-F200-6F02-224857C00680}"/>
+              </a:ext>
+            </a:extLst>
+          </p:cNvPr>
+          <p:cNvSpPr txBox="1"/>
+          <p:nvPr/>
+        </p:nvSpPr>
+        <p:spPr>
+          <a:xfrm>
+            <a:off x="370417" y="5756225"/>
+            <a:ext cx="6095306" cy="369332"/>
+          </a:xfrm>
+          <a:prstGeom prst="rect">
+            <a:avLst/>
+          </a:prstGeom>
+          <a:noFill/>
+        </p:spPr>
+        <p:txBody>
+          <a:bodyPr wrap="square">
+            <a:spAutoFit/>
+          </a:bodyPr>
+          <a:lstStyle/>
+          <a:p>
+            <a:pPr marL="285750" indent="-285750">
+              <a:buFont typeface="Arial" panose="020B0604020202020204" pitchFamily="34" charset="0"/>
+              <a:buChar char="•"/>
+            </a:pPr>
+            <a:r>
+              <a:rPr lang="en-AU" sz="1800" dirty="0">
+                <a:solidFill>
+                  <a:schemeClr val="bg1">
+                    <a:lumMod val="50000"/>
+                  </a:schemeClr>
+                </a:solidFill>
+              </a:rPr>
+              <a:t>Minimum rates.</a:t>
+            </a:r>
+          </a:p>
+        </p:txBody>
+      </p:sp>
+      <p:sp>
+        <p:nvSpPr>
+          <p:cNvPr id="15" name="TextBox 14">
+            <a:extLst>
+              <a:ext uri="{FF2B5EF4-FFF2-40B4-BE49-F238E27FC236}">
+                <a16:creationId xmlns:a16="http://schemas.microsoft.com/office/drawing/2014/main" id="{521C76AB-91BC-AC4C-F956-FE272BCE9153}"/>
+              </a:ext>
+            </a:extLst>
+          </p:cNvPr>
+          <p:cNvSpPr txBox="1"/>
+          <p:nvPr/>
+        </p:nvSpPr>
+        <p:spPr>
+          <a:xfrm>
+            <a:off x="370417" y="6168375"/>
+            <a:ext cx="6095306" cy="369332"/>
+          </a:xfrm>
+          <a:prstGeom prst="rect">
+            <a:avLst/>
+          </a:prstGeom>
+          <a:noFill/>
+        </p:spPr>
+        <p:txBody>
+          <a:bodyPr wrap="square">
+            <a:spAutoFit/>
+          </a:bodyPr>
+          <a:lstStyle/>
+          <a:p>
+            <a:pPr marL="285750" indent="-285750">
+              <a:buFont typeface="Arial" panose="020B0604020202020204" pitchFamily="34" charset="0"/>
+              <a:buChar char="•"/>
+            </a:pPr>
+            <a:r>
+              <a:rPr lang="en-AU" sz="1800" dirty="0">
+                <a:solidFill>
+                  <a:schemeClr val="bg1">
+                    <a:lumMod val="50000"/>
+                  </a:schemeClr>
+                </a:solidFill>
+              </a:rPr>
+              <a:t>Is inflation the correct discount rate?</a:t>
+            </a:r>
+          </a:p>
+        </p:txBody>
+      </p:sp>
     </p:spTree>
     <p:extLst>
       <p:ext uri="{BB962C8B-B14F-4D97-AF65-F5344CB8AC3E}">
@@ -24542,6 +25255,295 @@
   <p:clrMapOvr>
     <a:masterClrMapping/>
   </p:clrMapOvr>
+  <p:timing>
+    <p:tnLst>
+      <p:par>
+        <p:cTn id="1" dur="indefinite" restart="never" nodeType="tmRoot">
+          <p:childTnLst>
+            <p:seq concurrent="1" nextAc="seek">
+              <p:cTn id="2" dur="indefinite" nodeType="mainSeq">
+                <p:childTnLst>
+                  <p:par>
+                    <p:cTn id="3" fill="hold">
+                      <p:stCondLst>
+                        <p:cond delay="indefinite"/>
+                      </p:stCondLst>
+                      <p:childTnLst>
+                        <p:par>
+                          <p:cTn id="4" fill="hold">
+                            <p:stCondLst>
+                              <p:cond delay="0"/>
+                            </p:stCondLst>
+                            <p:childTnLst>
+                              <p:par>
+                                <p:cTn id="5" presetID="1" presetClass="entr" presetSubtype="0" fill="hold" grpId="0" nodeType="clickEffect">
+                                  <p:stCondLst>
+                                    <p:cond delay="0"/>
+                                  </p:stCondLst>
+                                  <p:childTnLst>
+                                    <p:set>
+                                      <p:cBhvr>
+                                        <p:cTn id="6" dur="1" fill="hold">
+                                          <p:stCondLst>
+                                            <p:cond delay="0"/>
+                                          </p:stCondLst>
+                                        </p:cTn>
+                                        <p:tgtEl>
+                                          <p:spTgt spid="14"/>
+                                        </p:tgtEl>
+                                        <p:attrNameLst>
+                                          <p:attrName>style.visibility</p:attrName>
+                                        </p:attrNameLst>
+                                      </p:cBhvr>
+                                      <p:to>
+                                        <p:strVal val="visible"/>
+                                      </p:to>
+                                    </p:set>
+                                  </p:childTnLst>
+                                </p:cTn>
+                              </p:par>
+                            </p:childTnLst>
+                          </p:cTn>
+                        </p:par>
+                      </p:childTnLst>
+                    </p:cTn>
+                  </p:par>
+                  <p:par>
+                    <p:cTn id="7" fill="hold">
+                      <p:stCondLst>
+                        <p:cond delay="indefinite"/>
+                      </p:stCondLst>
+                      <p:childTnLst>
+                        <p:par>
+                          <p:cTn id="8" fill="hold">
+                            <p:stCondLst>
+                              <p:cond delay="0"/>
+                            </p:stCondLst>
+                            <p:childTnLst>
+                              <p:par>
+                                <p:cTn id="9" presetID="1" presetClass="entr" presetSubtype="0" fill="hold" grpId="0" nodeType="clickEffect">
+                                  <p:stCondLst>
+                                    <p:cond delay="0"/>
+                                  </p:stCondLst>
+                                  <p:childTnLst>
+                                    <p:set>
+                                      <p:cBhvr>
+                                        <p:cTn id="10" dur="1" fill="hold">
+                                          <p:stCondLst>
+                                            <p:cond delay="0"/>
+                                          </p:stCondLst>
+                                        </p:cTn>
+                                        <p:tgtEl>
+                                          <p:spTgt spid="10"/>
+                                        </p:tgtEl>
+                                        <p:attrNameLst>
+                                          <p:attrName>style.visibility</p:attrName>
+                                        </p:attrNameLst>
+                                      </p:cBhvr>
+                                      <p:to>
+                                        <p:strVal val="visible"/>
+                                      </p:to>
+                                    </p:set>
+                                  </p:childTnLst>
+                                </p:cTn>
+                              </p:par>
+                            </p:childTnLst>
+                          </p:cTn>
+                        </p:par>
+                      </p:childTnLst>
+                    </p:cTn>
+                  </p:par>
+                  <p:par>
+                    <p:cTn id="11" fill="hold">
+                      <p:stCondLst>
+                        <p:cond delay="indefinite"/>
+                      </p:stCondLst>
+                      <p:childTnLst>
+                        <p:par>
+                          <p:cTn id="12" fill="hold">
+                            <p:stCondLst>
+                              <p:cond delay="0"/>
+                            </p:stCondLst>
+                            <p:childTnLst>
+                              <p:par>
+                                <p:cTn id="13" presetID="1" presetClass="entr" presetSubtype="0" fill="hold" grpId="0" nodeType="clickEffect">
+                                  <p:stCondLst>
+                                    <p:cond delay="0"/>
+                                  </p:stCondLst>
+                                  <p:childTnLst>
+                                    <p:set>
+                                      <p:cBhvr>
+                                        <p:cTn id="14" dur="1" fill="hold">
+                                          <p:stCondLst>
+                                            <p:cond delay="0"/>
+                                          </p:stCondLst>
+                                        </p:cTn>
+                                        <p:tgtEl>
+                                          <p:spTgt spid="12"/>
+                                        </p:tgtEl>
+                                        <p:attrNameLst>
+                                          <p:attrName>style.visibility</p:attrName>
+                                        </p:attrNameLst>
+                                      </p:cBhvr>
+                                      <p:to>
+                                        <p:strVal val="visible"/>
+                                      </p:to>
+                                    </p:set>
+                                  </p:childTnLst>
+                                </p:cTn>
+                              </p:par>
+                            </p:childTnLst>
+                          </p:cTn>
+                        </p:par>
+                      </p:childTnLst>
+                    </p:cTn>
+                  </p:par>
+                  <p:par>
+                    <p:cTn id="15" fill="hold">
+                      <p:stCondLst>
+                        <p:cond delay="indefinite"/>
+                      </p:stCondLst>
+                      <p:childTnLst>
+                        <p:par>
+                          <p:cTn id="16" fill="hold">
+                            <p:stCondLst>
+                              <p:cond delay="0"/>
+                            </p:stCondLst>
+                            <p:childTnLst>
+                              <p:par>
+                                <p:cTn id="17" presetID="1" presetClass="entr" presetSubtype="0" fill="hold" grpId="0" nodeType="clickEffect">
+                                  <p:stCondLst>
+                                    <p:cond delay="0"/>
+                                  </p:stCondLst>
+                                  <p:childTnLst>
+                                    <p:set>
+                                      <p:cBhvr>
+                                        <p:cTn id="18" dur="1" fill="hold">
+                                          <p:stCondLst>
+                                            <p:cond delay="0"/>
+                                          </p:stCondLst>
+                                        </p:cTn>
+                                        <p:tgtEl>
+                                          <p:spTgt spid="15"/>
+                                        </p:tgtEl>
+                                        <p:attrNameLst>
+                                          <p:attrName>style.visibility</p:attrName>
+                                        </p:attrNameLst>
+                                      </p:cBhvr>
+                                      <p:to>
+                                        <p:strVal val="visible"/>
+                                      </p:to>
+                                    </p:set>
+                                  </p:childTnLst>
+                                </p:cTn>
+                              </p:par>
+                            </p:childTnLst>
+                          </p:cTn>
+                        </p:par>
+                      </p:childTnLst>
+                    </p:cTn>
+                  </p:par>
+                  <p:par>
+                    <p:cTn id="19" fill="hold">
+                      <p:stCondLst>
+                        <p:cond delay="indefinite"/>
+                      </p:stCondLst>
+                      <p:childTnLst>
+                        <p:par>
+                          <p:cTn id="20" fill="hold">
+                            <p:stCondLst>
+                              <p:cond delay="0"/>
+                            </p:stCondLst>
+                            <p:childTnLst>
+                              <p:par>
+                                <p:cTn id="21" presetID="1" presetClass="entr" presetSubtype="0" fill="hold" nodeType="clickEffect">
+                                  <p:stCondLst>
+                                    <p:cond delay="0"/>
+                                  </p:stCondLst>
+                                  <p:childTnLst>
+                                    <p:set>
+                                      <p:cBhvr>
+                                        <p:cTn id="22" dur="1" fill="hold">
+                                          <p:stCondLst>
+                                            <p:cond delay="0"/>
+                                          </p:stCondLst>
+                                        </p:cTn>
+                                        <p:tgtEl>
+                                          <p:spTgt spid="9"/>
+                                        </p:tgtEl>
+                                        <p:attrNameLst>
+                                          <p:attrName>style.visibility</p:attrName>
+                                        </p:attrNameLst>
+                                      </p:cBhvr>
+                                      <p:to>
+                                        <p:strVal val="visible"/>
+                                      </p:to>
+                                    </p:set>
+                                  </p:childTnLst>
+                                </p:cTn>
+                              </p:par>
+                              <p:par>
+                                <p:cTn id="23" presetID="1" presetClass="entr" presetSubtype="0" fill="hold" grpId="0" nodeType="withEffect">
+                                  <p:stCondLst>
+                                    <p:cond delay="0"/>
+                                  </p:stCondLst>
+                                  <p:childTnLst>
+                                    <p:set>
+                                      <p:cBhvr>
+                                        <p:cTn id="24" dur="1" fill="hold">
+                                          <p:stCondLst>
+                                            <p:cond delay="0"/>
+                                          </p:stCondLst>
+                                        </p:cTn>
+                                        <p:tgtEl>
+                                          <p:spTgt spid="5"/>
+                                        </p:tgtEl>
+                                        <p:attrNameLst>
+                                          <p:attrName>style.visibility</p:attrName>
+                                        </p:attrNameLst>
+                                      </p:cBhvr>
+                                      <p:to>
+                                        <p:strVal val="visible"/>
+                                      </p:to>
+                                    </p:set>
+                                  </p:childTnLst>
+                                </p:cTn>
+                              </p:par>
+                            </p:childTnLst>
+                          </p:cTn>
+                        </p:par>
+                      </p:childTnLst>
+                    </p:cTn>
+                  </p:par>
+                </p:childTnLst>
+              </p:cTn>
+              <p:prevCondLst>
+                <p:cond evt="onPrev" delay="0">
+                  <p:tgtEl>
+                    <p:sldTgt/>
+                  </p:tgtEl>
+                </p:cond>
+              </p:prevCondLst>
+              <p:nextCondLst>
+                <p:cond evt="onNext" delay="0">
+                  <p:tgtEl>
+                    <p:sldTgt/>
+                  </p:tgtEl>
+                </p:cond>
+              </p:nextCondLst>
+            </p:seq>
+          </p:childTnLst>
+        </p:cTn>
+      </p:par>
+    </p:tnLst>
+    <p:bldLst>
+      <p:bldP spid="14" grpId="0"/>
+      <p:bldP spid="5" grpId="0"/>
+      <p:bldP spid="10" grpId="0"/>
+      <p:bldP spid="12" grpId="0"/>
+      <p:bldP spid="15" grpId="0"/>
+    </p:bldLst>
+  </p:timing>
 </p:sld>
 </file>
 
@@ -25679,6 +26681,17 @@
 </file>
 
 <file path=customXml/item2.xml><?xml version="1.0" encoding="utf-8"?>
+<p:properties xmlns:p="http://schemas.microsoft.com/office/2006/metadata/properties" xmlns:xsi="http://www.w3.org/2001/XMLSchema-instance" xmlns:pc="http://schemas.microsoft.com/office/infopath/2007/PartnerControls">
+  <documentManagement>
+    <TaxCatchAll xmlns="d4025935-85eb-43e8-ab32-734675053e7f" xsi:nil="true"/>
+    <lcf76f155ced4ddcb4097134ff3c332f xmlns="aa802c90-64f7-4260-a678-c5c09559402a">
+      <Terms xmlns="http://schemas.microsoft.com/office/infopath/2007/PartnerControls"/>
+    </lcf76f155ced4ddcb4097134ff3c332f>
+  </documentManagement>
+</p:properties>
+</file>
+
+<file path=customXml/item3.xml><?xml version="1.0" encoding="utf-8"?>
 <ct:contentTypeSchema xmlns:ct="http://schemas.microsoft.com/office/2006/metadata/contentType" xmlns:ma="http://schemas.microsoft.com/office/2006/metadata/properties/metaAttributes" ct:_="" ma:_="" ma:contentTypeName="Document" ma:contentTypeID="0x010100E38A1619F266734FBC2B48FB95398739" ma:contentTypeVersion="18" ma:contentTypeDescription="Create a new document." ma:contentTypeScope="" ma:versionID="8dc4163b27f0ec44a22c6d7358323f5f">
   <xsd:schema xmlns:xsd="http://www.w3.org/2001/XMLSchema" xmlns:xs="http://www.w3.org/2001/XMLSchema" xmlns:p="http://schemas.microsoft.com/office/2006/metadata/properties" xmlns:ns2="aa802c90-64f7-4260-a678-c5c09559402a" xmlns:ns3="d4025935-85eb-43e8-ab32-734675053e7f" targetNamespace="http://schemas.microsoft.com/office/2006/metadata/properties" ma:root="true" ma:fieldsID="a1176a965c39d1ac1c7d6ef690b32559" ns2:_="" ns3:_="">
     <xsd:import namespace="aa802c90-64f7-4260-a678-c5c09559402a"/>
@@ -25933,17 +26946,6 @@
 </ct:contentTypeSchema>
 </file>
 
-<file path=customXml/item3.xml><?xml version="1.0" encoding="utf-8"?>
-<p:properties xmlns:p="http://schemas.microsoft.com/office/2006/metadata/properties" xmlns:xsi="http://www.w3.org/2001/XMLSchema-instance" xmlns:pc="http://schemas.microsoft.com/office/infopath/2007/PartnerControls">
-  <documentManagement>
-    <TaxCatchAll xmlns="d4025935-85eb-43e8-ab32-734675053e7f" xsi:nil="true"/>
-    <lcf76f155ced4ddcb4097134ff3c332f xmlns="aa802c90-64f7-4260-a678-c5c09559402a">
-      <Terms xmlns="http://schemas.microsoft.com/office/infopath/2007/PartnerControls"/>
-    </lcf76f155ced4ddcb4097134ff3c332f>
-  </documentManagement>
-</p:properties>
-</file>
-
 <file path=customXml/itemProps1.xml><?xml version="1.0" encoding="utf-8"?>
 <ds:datastoreItem xmlns:ds="http://schemas.openxmlformats.org/officeDocument/2006/customXml" ds:itemID="{529E81E1-445C-4E91-8E35-C5BD736A3B77}">
   <ds:schemaRefs>
@@ -25953,6 +26955,23 @@
 </file>
 
 <file path=customXml/itemProps2.xml><?xml version="1.0" encoding="utf-8"?>
+<ds:datastoreItem xmlns:ds="http://schemas.openxmlformats.org/officeDocument/2006/customXml" ds:itemID="{8E36B762-179B-48EA-90B2-E74079BA15DE}">
+  <ds:schemaRefs>
+    <ds:schemaRef ds:uri="http://schemas.microsoft.com/office/2006/documentManagement/types"/>
+    <ds:schemaRef ds:uri="http://schemas.openxmlformats.org/package/2006/metadata/core-properties"/>
+    <ds:schemaRef ds:uri="http://purl.org/dc/terms/"/>
+    <ds:schemaRef ds:uri="aa802c90-64f7-4260-a678-c5c09559402a"/>
+    <ds:schemaRef ds:uri="http://purl.org/dc/elements/1.1/"/>
+    <ds:schemaRef ds:uri="http://schemas.microsoft.com/office/2006/metadata/properties"/>
+    <ds:schemaRef ds:uri="http://www.w3.org/XML/1998/namespace"/>
+    <ds:schemaRef ds:uri="http://schemas.microsoft.com/office/infopath/2007/PartnerControls"/>
+    <ds:schemaRef ds:uri="d4025935-85eb-43e8-ab32-734675053e7f"/>
+    <ds:schemaRef ds:uri="http://purl.org/dc/dcmitype/"/>
+  </ds:schemaRefs>
+</ds:datastoreItem>
+</file>
+
+<file path=customXml/itemProps3.xml><?xml version="1.0" encoding="utf-8"?>
 <ds:datastoreItem xmlns:ds="http://schemas.openxmlformats.org/officeDocument/2006/customXml" ds:itemID="{C54E5144-405F-49D2-89C0-6C01A508B471}">
   <ds:schemaRefs>
     <ds:schemaRef ds:uri="http://schemas.microsoft.com/office/2006/metadata/contentType"/>
@@ -25969,21 +26988,4 @@
     <ds:schemaRef ds:uri="http://schemas.microsoft.com/internal/obd"/>
   </ds:schemaRefs>
 </ds:datastoreItem>
-</file>
-
-<file path=customXml/itemProps3.xml><?xml version="1.0" encoding="utf-8"?>
-<ds:datastoreItem xmlns:ds="http://schemas.openxmlformats.org/officeDocument/2006/customXml" ds:itemID="{8E36B762-179B-48EA-90B2-E74079BA15DE}">
-  <ds:schemaRefs>
-    <ds:schemaRef ds:uri="http://schemas.microsoft.com/office/2006/documentManagement/types"/>
-    <ds:schemaRef ds:uri="http://schemas.openxmlformats.org/package/2006/metadata/core-properties"/>
-    <ds:schemaRef ds:uri="http://purl.org/dc/terms/"/>
-    <ds:schemaRef ds:uri="aa802c90-64f7-4260-a678-c5c09559402a"/>
-    <ds:schemaRef ds:uri="http://purl.org/dc/elements/1.1/"/>
-    <ds:schemaRef ds:uri="http://schemas.microsoft.com/office/2006/metadata/properties"/>
-    <ds:schemaRef ds:uri="http://www.w3.org/XML/1998/namespace"/>
-    <ds:schemaRef ds:uri="http://schemas.microsoft.com/office/infopath/2007/PartnerControls"/>
-    <ds:schemaRef ds:uri="d4025935-85eb-43e8-ab32-734675053e7f"/>
-    <ds:schemaRef ds:uri="http://purl.org/dc/dcmitype/"/>
-  </ds:schemaRefs>
-</ds:datastoreItem>
 </file>
--- a/e61 Projects/Presentations/QETA Post-Budget 2026.pptx
+++ b/e61 Projects/Presentations/QETA Post-Budget 2026.pptx
@@ -5,10 +5,10 @@
     <p:sldMasterId id="2147483660" r:id="rId4"/>
   </p:sldMasterIdLst>
   <p:notesMasterIdLst>
-    <p:notesMasterId r:id="rId15"/>
+    <p:notesMasterId r:id="rId22"/>
   </p:notesMasterIdLst>
   <p:handoutMasterIdLst>
-    <p:handoutMasterId r:id="rId16"/>
+    <p:handoutMasterId r:id="rId23"/>
   </p:handoutMasterIdLst>
   <p:sldIdLst>
     <p:sldId id="309" r:id="rId5"/>
@@ -21,11 +21,18 @@
     <p:sldId id="2147140435" r:id="rId12"/>
     <p:sldId id="2147140432" r:id="rId13"/>
     <p:sldId id="2147140431" r:id="rId14"/>
+    <p:sldId id="2147140439" r:id="rId15"/>
+    <p:sldId id="2147140438" r:id="rId16"/>
+    <p:sldId id="2147140440" r:id="rId17"/>
+    <p:sldId id="2147140441" r:id="rId18"/>
+    <p:sldId id="2147140442" r:id="rId19"/>
+    <p:sldId id="2147140444" r:id="rId20"/>
+    <p:sldId id="2147140443" r:id="rId21"/>
   </p:sldIdLst>
   <p:sldSz cx="12192000" cy="6858000"/>
   <p:notesSz cx="6858000" cy="9144000"/>
   <p:custDataLst>
-    <p:tags r:id="rId17"/>
+    <p:tags r:id="rId24"/>
   </p:custDataLst>
   <p:defaultTextStyle>
     <a:defPPr>
@@ -137,6 +144,13 @@
             <p14:sldId id="2147140435"/>
             <p14:sldId id="2147140432"/>
             <p14:sldId id="2147140431"/>
+            <p14:sldId id="2147140439"/>
+            <p14:sldId id="2147140438"/>
+            <p14:sldId id="2147140440"/>
+            <p14:sldId id="2147140441"/>
+            <p14:sldId id="2147140442"/>
+            <p14:sldId id="2147140444"/>
+            <p14:sldId id="2147140443"/>
           </p14:sldIdLst>
         </p14:section>
       </p14:sectionLst>
@@ -253,7 +267,7 @@
           <a:p>
             <a:fld id="{60F87968-E7C3-4FA2-86D7-7CFDDCA2896A}" type="datetimeFigureOut">
               <a:rPr lang="en-US" smtClean="0"/>
-              <a:t>8/5/2026</a:t>
+              <a:t>05-Aug-26</a:t>
             </a:fld>
             <a:endParaRPr lang="en-US"/>
           </a:p>
@@ -430,7 +444,7 @@
           <a:p>
             <a:fld id="{B416A7BE-E113-476D-8DE0-A6138461ACE1}" type="datetimeFigureOut">
               <a:rPr lang="en-US" smtClean="0"/>
-              <a:t>8/4/2026</a:t>
+              <a:t>05-Aug-26</a:t>
             </a:fld>
             <a:endParaRPr lang="en-US"/>
           </a:p>
@@ -20049,7 +20063,10 @@
           <a:bodyPr/>
           <a:lstStyle/>
           <a:p>
-            <a:endParaRPr lang="en-AU" dirty="0"/>
+            <a:r>
+              <a:rPr lang="en-AU" dirty="0"/>
+              <a:t>Understanding the CGT changes</a:t>
+            </a:r>
           </a:p>
         </p:txBody>
       </p:sp>
@@ -20074,7 +20091,10 @@
           <a:bodyPr/>
           <a:lstStyle/>
           <a:p>
-            <a:endParaRPr lang="en-AU" dirty="0"/>
+            <a:r>
+              <a:rPr lang="en-AU" dirty="0"/>
+              <a:t>Presentation to the Queensland Economics Teachers’ Association</a:t>
+            </a:r>
           </a:p>
         </p:txBody>
       </p:sp>
@@ -20101,7 +20121,7 @@
           <a:p>
             <a:r>
               <a:rPr lang="en-AU" dirty="0"/>
-              <a:t>30 July 2026</a:t>
+              <a:t>5 August 2026</a:t>
             </a:r>
           </a:p>
         </p:txBody>
@@ -20304,10 +20324,10 @@
       </p:sp>
       <p:sp>
         <p:nvSpPr>
-          <p:cNvPr id="7" name="TextBox 6">
-            <a:extLst>
-              <a:ext uri="{FF2B5EF4-FFF2-40B4-BE49-F238E27FC236}">
-                <a16:creationId xmlns:a16="http://schemas.microsoft.com/office/drawing/2014/main" id="{4941146A-F54E-1646-62E0-8A1933621468}"/>
+          <p:cNvPr id="3" name="TextBox 2">
+            <a:extLst>
+              <a:ext uri="{FF2B5EF4-FFF2-40B4-BE49-F238E27FC236}">
+                <a16:creationId xmlns:a16="http://schemas.microsoft.com/office/drawing/2014/main" id="{7707045B-159B-4AEA-D823-8650ED4F9BDA}"/>
               </a:ext>
             </a:extLst>
           </p:cNvPr>
@@ -20316,42 +20336,7 @@
         </p:nvSpPr>
         <p:spPr>
           <a:xfrm>
-            <a:off x="370417" y="3656246"/>
-            <a:ext cx="9285648" cy="369332"/>
-          </a:xfrm>
-          <a:prstGeom prst="rect">
-            <a:avLst/>
-          </a:prstGeom>
-          <a:noFill/>
-        </p:spPr>
-        <p:txBody>
-          <a:bodyPr wrap="square">
-            <a:spAutoFit/>
-          </a:bodyPr>
-          <a:lstStyle/>
-          <a:p>
-            <a:r>
-              <a:rPr lang="en-AU" b="1" dirty="0"/>
-              <a:t>Compliance costs</a:t>
-            </a:r>
-          </a:p>
-        </p:txBody>
-      </p:sp>
-      <p:sp>
-        <p:nvSpPr>
-          <p:cNvPr id="3" name="TextBox 2">
-            <a:extLst>
-              <a:ext uri="{FF2B5EF4-FFF2-40B4-BE49-F238E27FC236}">
-                <a16:creationId xmlns:a16="http://schemas.microsoft.com/office/drawing/2014/main" id="{7707045B-159B-4AEA-D823-8650ED4F9BDA}"/>
-              </a:ext>
-            </a:extLst>
-          </p:cNvPr>
-          <p:cNvSpPr txBox="1"/>
-          <p:nvPr/>
-        </p:nvSpPr>
-        <p:spPr>
-          <a:xfrm>
-            <a:off x="366317" y="1932024"/>
+            <a:off x="370417" y="1761571"/>
             <a:ext cx="10903190" cy="369332"/>
           </a:xfrm>
           <a:prstGeom prst="rect">
@@ -20374,17 +20359,17 @@
             </a:pPr>
             <a:r>
               <a:rPr lang="en-AU" dirty="0"/>
-              <a:t>Changing residence shifts “passive” capital gains.</a:t>
-            </a:r>
-          </a:p>
-        </p:txBody>
-      </p:sp>
-      <p:sp>
-        <p:nvSpPr>
-          <p:cNvPr id="8" name="TextBox 7">
-            <a:extLst>
-              <a:ext uri="{FF2B5EF4-FFF2-40B4-BE49-F238E27FC236}">
-                <a16:creationId xmlns:a16="http://schemas.microsoft.com/office/drawing/2014/main" id="{D652F60F-C2A6-071E-A516-545C9B0ADB16}"/>
+              <a:t>Changing residence shifts taxation of “passive” housing capital gains.</a:t>
+            </a:r>
+          </a:p>
+        </p:txBody>
+      </p:sp>
+      <p:sp>
+        <p:nvSpPr>
+          <p:cNvPr id="11" name="TextBox 10">
+            <a:extLst>
+              <a:ext uri="{FF2B5EF4-FFF2-40B4-BE49-F238E27FC236}">
+                <a16:creationId xmlns:a16="http://schemas.microsoft.com/office/drawing/2014/main" id="{0868751C-401B-6A3C-AE41-159621942661}"/>
               </a:ext>
             </a:extLst>
           </p:cNvPr>
@@ -20393,7 +20378,7 @@
         </p:nvSpPr>
         <p:spPr>
           <a:xfrm>
-            <a:off x="427277" y="4212483"/>
+            <a:off x="370417" y="2228091"/>
             <a:ext cx="10903190" cy="369332"/>
           </a:xfrm>
           <a:prstGeom prst="rect">
@@ -20416,17 +20401,17 @@
             </a:pPr>
             <a:r>
               <a:rPr lang="en-AU" dirty="0"/>
-              <a:t>Different rules for different assets.</a:t>
-            </a:r>
-          </a:p>
-        </p:txBody>
-      </p:sp>
-      <p:sp>
-        <p:nvSpPr>
-          <p:cNvPr id="9" name="TextBox 8">
-            <a:extLst>
-              <a:ext uri="{FF2B5EF4-FFF2-40B4-BE49-F238E27FC236}">
-                <a16:creationId xmlns:a16="http://schemas.microsoft.com/office/drawing/2014/main" id="{771E2808-E6EC-5ECA-D2BC-3A590A1A43DF}"/>
+              <a:t>Mobile ideas and finance can move – incidence passes through to consumers and business.</a:t>
+            </a:r>
+          </a:p>
+        </p:txBody>
+      </p:sp>
+      <p:sp>
+        <p:nvSpPr>
+          <p:cNvPr id="12" name="TextBox 11">
+            <a:extLst>
+              <a:ext uri="{FF2B5EF4-FFF2-40B4-BE49-F238E27FC236}">
+                <a16:creationId xmlns:a16="http://schemas.microsoft.com/office/drawing/2014/main" id="{B6E91D39-9DAC-6049-C189-73F1B1845722}"/>
               </a:ext>
             </a:extLst>
           </p:cNvPr>
@@ -20435,8 +20420,8 @@
         </p:nvSpPr>
         <p:spPr>
           <a:xfrm>
-            <a:off x="427277" y="4693236"/>
-            <a:ext cx="10903190" cy="369332"/>
+            <a:off x="370417" y="2695808"/>
+            <a:ext cx="10903190" cy="1354217"/>
           </a:xfrm>
           <a:prstGeom prst="rect">
             <a:avLst/>
@@ -20458,40 +20443,11 @@
             </a:pPr>
             <a:r>
               <a:rPr lang="en-AU" dirty="0"/>
-              <a:t>Complicated minimum tax rules (especially alongside trusts).</a:t>
-            </a:r>
-          </a:p>
-        </p:txBody>
-      </p:sp>
-      <p:sp>
-        <p:nvSpPr>
-          <p:cNvPr id="10" name="TextBox 9">
-            <a:extLst>
-              <a:ext uri="{FF2B5EF4-FFF2-40B4-BE49-F238E27FC236}">
-                <a16:creationId xmlns:a16="http://schemas.microsoft.com/office/drawing/2014/main" id="{74B6A6AB-A021-7E47-B30F-1C109BAA96F7}"/>
-              </a:ext>
-            </a:extLst>
-          </p:cNvPr>
-          <p:cNvSpPr txBox="1"/>
-          <p:nvPr/>
-        </p:nvSpPr>
-        <p:spPr>
-          <a:xfrm>
-            <a:off x="427277" y="5247978"/>
-            <a:ext cx="10903190" cy="369332"/>
-          </a:xfrm>
-          <a:prstGeom prst="rect">
-            <a:avLst/>
-          </a:prstGeom>
-          <a:noFill/>
-        </p:spPr>
-        <p:txBody>
-          <a:bodyPr wrap="square">
-            <a:spAutoFit/>
-          </a:bodyPr>
-          <a:lstStyle/>
-          <a:p>
-            <a:pPr marL="285750" indent="-285750">
+              <a:t>Domestic value-add is less mobile.</a:t>
+            </a:r>
+          </a:p>
+          <a:p>
+            <a:pPr marL="742950" lvl="1" indent="-285750">
               <a:spcAft>
                 <a:spcPts val="600"/>
               </a:spcAft>
@@ -20500,40 +20456,11 @@
             </a:pPr>
             <a:r>
               <a:rPr lang="en-AU" dirty="0"/>
-              <a:t>Transitional valuations.</a:t>
-            </a:r>
-          </a:p>
-        </p:txBody>
-      </p:sp>
-      <p:sp>
-        <p:nvSpPr>
-          <p:cNvPr id="11" name="TextBox 10">
-            <a:extLst>
-              <a:ext uri="{FF2B5EF4-FFF2-40B4-BE49-F238E27FC236}">
-                <a16:creationId xmlns:a16="http://schemas.microsoft.com/office/drawing/2014/main" id="{0868751C-401B-6A3C-AE41-159621942661}"/>
-              </a:ext>
-            </a:extLst>
-          </p:cNvPr>
-          <p:cNvSpPr txBox="1"/>
-          <p:nvPr/>
-        </p:nvSpPr>
-        <p:spPr>
-          <a:xfrm>
-            <a:off x="366317" y="2398544"/>
-            <a:ext cx="10903190" cy="369332"/>
-          </a:xfrm>
-          <a:prstGeom prst="rect">
-            <a:avLst/>
-          </a:prstGeom>
-          <a:noFill/>
-        </p:spPr>
-        <p:txBody>
-          <a:bodyPr wrap="square">
-            <a:spAutoFit/>
-          </a:bodyPr>
-          <a:lstStyle/>
-          <a:p>
-            <a:pPr marL="285750" indent="-285750">
+              <a:t>International evidence suggests mobility from CGT is limited.</a:t>
+            </a:r>
+          </a:p>
+          <a:p>
+            <a:pPr marL="742950" lvl="1" indent="-285750">
               <a:spcAft>
                 <a:spcPts val="600"/>
               </a:spcAft>
@@ -20542,53 +20469,41 @@
             </a:pPr>
             <a:r>
               <a:rPr lang="en-AU" dirty="0"/>
-              <a:t>Mobile ideas and finance can move.</a:t>
-            </a:r>
-          </a:p>
-        </p:txBody>
-      </p:sp>
-      <p:sp>
-        <p:nvSpPr>
-          <p:cNvPr id="12" name="TextBox 11">
-            <a:extLst>
-              <a:ext uri="{FF2B5EF4-FFF2-40B4-BE49-F238E27FC236}">
-                <a16:creationId xmlns:a16="http://schemas.microsoft.com/office/drawing/2014/main" id="{B6E91D39-9DAC-6049-C189-73F1B1845722}"/>
-              </a:ext>
-            </a:extLst>
-          </p:cNvPr>
-          <p:cNvSpPr txBox="1"/>
+              <a:t>Also suggests the general tax rate mobility is lower for sources that generate high returns (location specific rents).</a:t>
+            </a:r>
+          </a:p>
+        </p:txBody>
+      </p:sp>
+      <p:pic>
+        <p:nvPicPr>
+          <p:cNvPr id="14" name="Picture 13">
+            <a:extLst>
+              <a:ext uri="{FF2B5EF4-FFF2-40B4-BE49-F238E27FC236}">
+                <a16:creationId xmlns:a16="http://schemas.microsoft.com/office/drawing/2014/main" id="{6BAF6CE5-4AD5-181F-3C58-513988435EBA}"/>
+              </a:ext>
+            </a:extLst>
+          </p:cNvPr>
+          <p:cNvPicPr>
+            <a:picLocks noChangeAspect="1"/>
+          </p:cNvPicPr>
           <p:nvPr/>
-        </p:nvSpPr>
-        <p:spPr>
-          <a:xfrm>
-            <a:off x="366317" y="2879297"/>
-            <a:ext cx="10903190" cy="369332"/>
-          </a:xfrm>
-          <a:prstGeom prst="rect">
-            <a:avLst/>
-          </a:prstGeom>
-          <a:noFill/>
-        </p:spPr>
-        <p:txBody>
-          <a:bodyPr wrap="square">
-            <a:spAutoFit/>
-          </a:bodyPr>
-          <a:lstStyle/>
-          <a:p>
-            <a:pPr marL="285750" indent="-285750">
-              <a:spcAft>
-                <a:spcPts val="600"/>
-              </a:spcAft>
-              <a:buFont typeface="Arial" panose="020B0604020202020204" pitchFamily="34" charset="0"/>
-              <a:buChar char="•"/>
-            </a:pPr>
-            <a:r>
-              <a:rPr lang="en-AU" dirty="0"/>
-              <a:t>Domestic value-add is less mobile.</a:t>
-            </a:r>
-          </a:p>
-        </p:txBody>
-      </p:sp>
+        </p:nvPicPr>
+        <p:blipFill>
+          <a:blip r:embed="rId5"/>
+          <a:stretch>
+            <a:fillRect/>
+          </a:stretch>
+        </p:blipFill>
+        <p:spPr>
+          <a:xfrm>
+            <a:off x="3868559" y="3914005"/>
+            <a:ext cx="5622913" cy="2623021"/>
+          </a:xfrm>
+          <a:prstGeom prst="rect">
+            <a:avLst/>
+          </a:prstGeom>
+        </p:spPr>
+      </p:pic>
     </p:spTree>
     <p:extLst>
       <p:ext uri="{BB962C8B-B14F-4D97-AF65-F5344CB8AC3E}">
@@ -20678,7 +20593,7 @@
                                           </p:stCondLst>
                                         </p:cTn>
                                         <p:tgtEl>
-                                          <p:spTgt spid="8"/>
+                                          <p:spTgt spid="11"/>
                                         </p:tgtEl>
                                         <p:attrNameLst>
                                           <p:attrName>style.visibility</p:attrName>
@@ -20723,7 +20638,751 @@
                                           </p:stCondLst>
                                         </p:cTn>
                                         <p:tgtEl>
+                                          <p:spTgt spid="12"/>
+                                        </p:tgtEl>
+                                        <p:attrNameLst>
+                                          <p:attrName>style.visibility</p:attrName>
+                                        </p:attrNameLst>
+                                      </p:cBhvr>
+                                      <p:to>
+                                        <p:strVal val="visible"/>
+                                      </p:to>
+                                    </p:set>
+                                  </p:childTnLst>
+                                </p:cTn>
+                              </p:par>
+                            </p:childTnLst>
+                          </p:cTn>
+                        </p:par>
+                      </p:childTnLst>
+                    </p:cTn>
+                  </p:par>
+                  <p:par>
+                    <p:cTn id="15" fill="hold">
+                      <p:stCondLst>
+                        <p:cond delay="indefinite"/>
+                      </p:stCondLst>
+                      <p:childTnLst>
+                        <p:par>
+                          <p:cTn id="16" fill="hold">
+                            <p:stCondLst>
+                              <p:cond delay="0"/>
+                            </p:stCondLst>
+                            <p:childTnLst>
+                              <p:par>
+                                <p:cTn id="17" presetID="1" presetClass="entr" presetSubtype="0" fill="hold" nodeType="clickEffect">
+                                  <p:stCondLst>
+                                    <p:cond delay="0"/>
+                                  </p:stCondLst>
+                                  <p:childTnLst>
+                                    <p:set>
+                                      <p:cBhvr>
+                                        <p:cTn id="18" dur="1" fill="hold">
+                                          <p:stCondLst>
+                                            <p:cond delay="0"/>
+                                          </p:stCondLst>
+                                        </p:cTn>
+                                        <p:tgtEl>
+                                          <p:spTgt spid="14"/>
+                                        </p:tgtEl>
+                                        <p:attrNameLst>
+                                          <p:attrName>style.visibility</p:attrName>
+                                        </p:attrNameLst>
+                                      </p:cBhvr>
+                                      <p:to>
+                                        <p:strVal val="visible"/>
+                                      </p:to>
+                                    </p:set>
+                                  </p:childTnLst>
+                                </p:cTn>
+                              </p:par>
+                            </p:childTnLst>
+                          </p:cTn>
+                        </p:par>
+                      </p:childTnLst>
+                    </p:cTn>
+                  </p:par>
+                </p:childTnLst>
+              </p:cTn>
+              <p:prevCondLst>
+                <p:cond evt="onPrev" delay="0">
+                  <p:tgtEl>
+                    <p:sldTgt/>
+                  </p:tgtEl>
+                </p:cond>
+              </p:prevCondLst>
+              <p:nextCondLst>
+                <p:cond evt="onNext" delay="0">
+                  <p:tgtEl>
+                    <p:sldTgt/>
+                  </p:tgtEl>
+                </p:cond>
+              </p:nextCondLst>
+            </p:seq>
+          </p:childTnLst>
+        </p:cTn>
+      </p:par>
+    </p:tnLst>
+    <p:bldLst>
+      <p:bldP spid="3" grpId="0"/>
+      <p:bldP spid="11" grpId="0"/>
+      <p:bldP spid="12" grpId="0"/>
+    </p:bldLst>
+  </p:timing>
+</p:sld>
+</file>
+
+<file path=ppt/slides/slide11.xml><?xml version="1.0" encoding="utf-8"?>
+<p:sld xmlns:a="http://schemas.openxmlformats.org/drawingml/2006/main" xmlns:r="http://schemas.openxmlformats.org/officeDocument/2006/relationships" xmlns:p="http://schemas.openxmlformats.org/presentationml/2006/main">
+  <p:cSld>
+    <p:spTree>
+      <p:nvGrpSpPr>
+        <p:cNvPr id="1" name="">
+          <a:extLst>
+            <a:ext uri="{FF2B5EF4-FFF2-40B4-BE49-F238E27FC236}">
+              <a16:creationId xmlns:a16="http://schemas.microsoft.com/office/drawing/2014/main" id="{39237D20-65C6-3D4F-CF10-7D751FF2332A}"/>
+            </a:ext>
+          </a:extLst>
+        </p:cNvPr>
+        <p:cNvGrpSpPr/>
+        <p:nvPr/>
+      </p:nvGrpSpPr>
+      <p:grpSpPr>
+        <a:xfrm>
+          <a:off x="0" y="0"/>
+          <a:ext cx="0" cy="0"/>
+          <a:chOff x="0" y="0"/>
+          <a:chExt cx="0" cy="0"/>
+        </a:xfrm>
+      </p:grpSpPr>
+      <p:graphicFrame>
+        <p:nvGraphicFramePr>
+          <p:cNvPr id="6" name="Object 5" hidden="1">
+            <a:extLst>
+              <a:ext uri="{FF2B5EF4-FFF2-40B4-BE49-F238E27FC236}">
+                <a16:creationId xmlns:a16="http://schemas.microsoft.com/office/drawing/2014/main" id="{396BCACE-3C28-5EFD-F678-5248A243F2EA}"/>
+              </a:ext>
+            </a:extLst>
+          </p:cNvPr>
+          <p:cNvGraphicFramePr>
+            <a:graphicFrameLocks noChangeAspect="1"/>
+          </p:cNvGraphicFramePr>
+          <p:nvPr>
+            <p:custDataLst>
+              <p:tags r:id="rId1"/>
+            </p:custDataLst>
+          </p:nvPr>
+        </p:nvGraphicFramePr>
+        <p:xfrm>
+          <a:off x="1588" y="1589"/>
+          <a:ext cx="1588" cy="1588"/>
+        </p:xfrm>
+        <a:graphic>
+          <a:graphicData uri="http://schemas.openxmlformats.org/presentationml/2006/ole">
+            <mc:AlternateContent xmlns:mc="http://schemas.openxmlformats.org/markup-compatibility/2006">
+              <mc:Choice xmlns:v="urn:schemas-microsoft-com:vml" Requires="v">
+                <p:oleObj name="think-cell Slide" r:id="rId3" imgW="395" imgH="394" progId="TCLayout.ActiveDocument.1">
+                  <p:embed/>
+                </p:oleObj>
+              </mc:Choice>
+              <mc:Fallback>
+                <p:oleObj name="think-cell Slide" r:id="rId3" imgW="395" imgH="394" progId="TCLayout.ActiveDocument.1">
+                  <p:embed/>
+                  <p:pic>
+                    <p:nvPicPr>
+                      <p:cNvPr id="6" name="Object 5" hidden="1">
+                        <a:extLst>
+                          <a:ext uri="{FF2B5EF4-FFF2-40B4-BE49-F238E27FC236}">
+                            <a16:creationId xmlns:a16="http://schemas.microsoft.com/office/drawing/2014/main" id="{1450181C-6C9A-9739-99CF-AD4C5359FD16}"/>
+                          </a:ext>
+                        </a:extLst>
+                      </p:cNvPr>
+                      <p:cNvPicPr/>
+                      <p:nvPr/>
+                    </p:nvPicPr>
+                    <p:blipFill>
+                      <a:blip r:embed="rId4"/>
+                      <a:stretch>
+                        <a:fillRect/>
+                      </a:stretch>
+                    </p:blipFill>
+                    <p:spPr>
+                      <a:xfrm>
+                        <a:off x="1588" y="1589"/>
+                        <a:ext cx="1588" cy="1588"/>
+                      </a:xfrm>
+                      <a:prstGeom prst="rect">
+                        <a:avLst/>
+                      </a:prstGeom>
+                    </p:spPr>
+                  </p:pic>
+                </p:oleObj>
+              </mc:Fallback>
+            </mc:AlternateContent>
+          </a:graphicData>
+        </a:graphic>
+      </p:graphicFrame>
+      <p:sp>
+        <p:nvSpPr>
+          <p:cNvPr id="4" name="Slide Number Placeholder 3">
+            <a:extLst>
+              <a:ext uri="{FF2B5EF4-FFF2-40B4-BE49-F238E27FC236}">
+                <a16:creationId xmlns:a16="http://schemas.microsoft.com/office/drawing/2014/main" id="{FCA88640-3E4A-3D14-BAEB-8047325BD33D}"/>
+              </a:ext>
+            </a:extLst>
+          </p:cNvPr>
+          <p:cNvSpPr>
+            <a:spLocks noGrp="1"/>
+          </p:cNvSpPr>
+          <p:nvPr>
+            <p:ph type="sldNum" sz="quarter" idx="10"/>
+          </p:nvPr>
+        </p:nvSpPr>
+        <p:spPr/>
+        <p:txBody>
+          <a:bodyPr/>
+          <a:lstStyle/>
+          <a:p>
+            <a:fld id="{4F9AC08D-23A9-440E-BCB9-AA1E9877CC38}" type="slidenum">
+              <a:rPr lang="en-US" smtClean="0"/>
+              <a:pPr/>
+              <a:t>11</a:t>
+            </a:fld>
+            <a:endParaRPr lang="en-US"/>
+          </a:p>
+        </p:txBody>
+      </p:sp>
+      <p:sp>
+        <p:nvSpPr>
+          <p:cNvPr id="2" name="Title 1">
+            <a:extLst>
+              <a:ext uri="{FF2B5EF4-FFF2-40B4-BE49-F238E27FC236}">
+                <a16:creationId xmlns:a16="http://schemas.microsoft.com/office/drawing/2014/main" id="{2D9CAEC2-43AB-F06D-5B1D-12E13AF16E50}"/>
+              </a:ext>
+            </a:extLst>
+          </p:cNvPr>
+          <p:cNvSpPr>
+            <a:spLocks noGrp="1"/>
+          </p:cNvSpPr>
+          <p:nvPr>
+            <p:ph type="title"/>
+          </p:nvPr>
+        </p:nvSpPr>
+        <p:spPr/>
+        <p:txBody>
+          <a:bodyPr/>
+          <a:lstStyle/>
+          <a:p>
+            <a:r>
+              <a:rPr lang="en-US" dirty="0"/>
+              <a:t>Trade-offs</a:t>
+            </a:r>
+          </a:p>
+        </p:txBody>
+      </p:sp>
+      <p:sp>
+        <p:nvSpPr>
+          <p:cNvPr id="7" name="TextBox 6">
+            <a:extLst>
+              <a:ext uri="{FF2B5EF4-FFF2-40B4-BE49-F238E27FC236}">
+                <a16:creationId xmlns:a16="http://schemas.microsoft.com/office/drawing/2014/main" id="{F5C78E88-9573-046D-8C3A-23E6D09DD918}"/>
+              </a:ext>
+            </a:extLst>
+          </p:cNvPr>
+          <p:cNvSpPr txBox="1"/>
+          <p:nvPr/>
+        </p:nvSpPr>
+        <p:spPr>
+          <a:xfrm>
+            <a:off x="436129" y="1206482"/>
+            <a:ext cx="9285648" cy="369332"/>
+          </a:xfrm>
+          <a:prstGeom prst="rect">
+            <a:avLst/>
+          </a:prstGeom>
+          <a:noFill/>
+        </p:spPr>
+        <p:txBody>
+          <a:bodyPr wrap="square">
+            <a:spAutoFit/>
+          </a:bodyPr>
+          <a:lstStyle/>
+          <a:p>
+            <a:r>
+              <a:rPr lang="en-AU" b="1" dirty="0"/>
+              <a:t>Compliance costs</a:t>
+            </a:r>
+          </a:p>
+        </p:txBody>
+      </p:sp>
+      <p:sp>
+        <p:nvSpPr>
+          <p:cNvPr id="8" name="TextBox 7">
+            <a:extLst>
+              <a:ext uri="{FF2B5EF4-FFF2-40B4-BE49-F238E27FC236}">
+                <a16:creationId xmlns:a16="http://schemas.microsoft.com/office/drawing/2014/main" id="{061D2B76-FA0C-DC25-3903-93394017D582}"/>
+              </a:ext>
+            </a:extLst>
+          </p:cNvPr>
+          <p:cNvSpPr txBox="1"/>
+          <p:nvPr/>
+        </p:nvSpPr>
+        <p:spPr>
+          <a:xfrm>
+            <a:off x="492989" y="1762719"/>
+            <a:ext cx="10903190" cy="369332"/>
+          </a:xfrm>
+          <a:prstGeom prst="rect">
+            <a:avLst/>
+          </a:prstGeom>
+          <a:noFill/>
+        </p:spPr>
+        <p:txBody>
+          <a:bodyPr wrap="square">
+            <a:spAutoFit/>
+          </a:bodyPr>
+          <a:lstStyle/>
+          <a:p>
+            <a:pPr marL="285750" indent="-285750">
+              <a:spcAft>
+                <a:spcPts val="600"/>
+              </a:spcAft>
+              <a:buFont typeface="Arial" panose="020B0604020202020204" pitchFamily="34" charset="0"/>
+              <a:buChar char="•"/>
+            </a:pPr>
+            <a:r>
+              <a:rPr lang="en-AU" dirty="0"/>
+              <a:t>Different rules for different assets.</a:t>
+            </a:r>
+          </a:p>
+        </p:txBody>
+      </p:sp>
+      <p:sp>
+        <p:nvSpPr>
+          <p:cNvPr id="9" name="TextBox 8">
+            <a:extLst>
+              <a:ext uri="{FF2B5EF4-FFF2-40B4-BE49-F238E27FC236}">
+                <a16:creationId xmlns:a16="http://schemas.microsoft.com/office/drawing/2014/main" id="{B07F12C4-69D4-4C77-26A8-B334D2191E24}"/>
+              </a:ext>
+            </a:extLst>
+          </p:cNvPr>
+          <p:cNvSpPr txBox="1"/>
+          <p:nvPr/>
+        </p:nvSpPr>
+        <p:spPr>
+          <a:xfrm>
+            <a:off x="492989" y="2243472"/>
+            <a:ext cx="10903190" cy="369332"/>
+          </a:xfrm>
+          <a:prstGeom prst="rect">
+            <a:avLst/>
+          </a:prstGeom>
+          <a:noFill/>
+        </p:spPr>
+        <p:txBody>
+          <a:bodyPr wrap="square">
+            <a:spAutoFit/>
+          </a:bodyPr>
+          <a:lstStyle/>
+          <a:p>
+            <a:pPr marL="285750" indent="-285750">
+              <a:spcAft>
+                <a:spcPts val="600"/>
+              </a:spcAft>
+              <a:buFont typeface="Arial" panose="020B0604020202020204" pitchFamily="34" charset="0"/>
+              <a:buChar char="•"/>
+            </a:pPr>
+            <a:r>
+              <a:rPr lang="en-AU" dirty="0"/>
+              <a:t>Complicated minimum tax rules (especially alongside trusts).</a:t>
+            </a:r>
+          </a:p>
+        </p:txBody>
+      </p:sp>
+      <p:sp>
+        <p:nvSpPr>
+          <p:cNvPr id="10" name="TextBox 9">
+            <a:extLst>
+              <a:ext uri="{FF2B5EF4-FFF2-40B4-BE49-F238E27FC236}">
+                <a16:creationId xmlns:a16="http://schemas.microsoft.com/office/drawing/2014/main" id="{37015CF2-B4D9-7C0E-A2E5-E4C557786B28}"/>
+              </a:ext>
+            </a:extLst>
+          </p:cNvPr>
+          <p:cNvSpPr txBox="1"/>
+          <p:nvPr/>
+        </p:nvSpPr>
+        <p:spPr>
+          <a:xfrm>
+            <a:off x="492989" y="2798214"/>
+            <a:ext cx="10903190" cy="369332"/>
+          </a:xfrm>
+          <a:prstGeom prst="rect">
+            <a:avLst/>
+          </a:prstGeom>
+          <a:noFill/>
+        </p:spPr>
+        <p:txBody>
+          <a:bodyPr wrap="square">
+            <a:spAutoFit/>
+          </a:bodyPr>
+          <a:lstStyle/>
+          <a:p>
+            <a:pPr marL="285750" indent="-285750">
+              <a:spcAft>
+                <a:spcPts val="600"/>
+              </a:spcAft>
+              <a:buFont typeface="Arial" panose="020B0604020202020204" pitchFamily="34" charset="0"/>
+              <a:buChar char="•"/>
+            </a:pPr>
+            <a:r>
+              <a:rPr lang="en-AU" dirty="0"/>
+              <a:t>Transitional valuations.</a:t>
+            </a:r>
+          </a:p>
+        </p:txBody>
+      </p:sp>
+      <p:sp>
+        <p:nvSpPr>
+          <p:cNvPr id="13" name="TextBox 12">
+            <a:extLst>
+              <a:ext uri="{FF2B5EF4-FFF2-40B4-BE49-F238E27FC236}">
+                <a16:creationId xmlns:a16="http://schemas.microsoft.com/office/drawing/2014/main" id="{950C1CF4-AB7A-B9D3-F22E-D66160B3AAED}"/>
+              </a:ext>
+            </a:extLst>
+          </p:cNvPr>
+          <p:cNvSpPr txBox="1"/>
+          <p:nvPr/>
+        </p:nvSpPr>
+        <p:spPr>
+          <a:xfrm>
+            <a:off x="370417" y="3619078"/>
+            <a:ext cx="9285648" cy="369332"/>
+          </a:xfrm>
+          <a:prstGeom prst="rect">
+            <a:avLst/>
+          </a:prstGeom>
+          <a:noFill/>
+        </p:spPr>
+        <p:txBody>
+          <a:bodyPr wrap="square">
+            <a:spAutoFit/>
+          </a:bodyPr>
+          <a:lstStyle/>
+          <a:p>
+            <a:r>
+              <a:rPr lang="en-AU" b="1" dirty="0"/>
+              <a:t>Taxation of risk?</a:t>
+            </a:r>
+          </a:p>
+        </p:txBody>
+      </p:sp>
+      <p:sp>
+        <p:nvSpPr>
+          <p:cNvPr id="14" name="TextBox 13">
+            <a:extLst>
+              <a:ext uri="{FF2B5EF4-FFF2-40B4-BE49-F238E27FC236}">
+                <a16:creationId xmlns:a16="http://schemas.microsoft.com/office/drawing/2014/main" id="{13F83006-157B-D37A-12CA-0CFD6C4E2605}"/>
+              </a:ext>
+            </a:extLst>
+          </p:cNvPr>
+          <p:cNvSpPr txBox="1"/>
+          <p:nvPr/>
+        </p:nvSpPr>
+        <p:spPr>
+          <a:xfrm>
+            <a:off x="427277" y="4175315"/>
+            <a:ext cx="10903190" cy="369332"/>
+          </a:xfrm>
+          <a:prstGeom prst="rect">
+            <a:avLst/>
+          </a:prstGeom>
+          <a:noFill/>
+        </p:spPr>
+        <p:txBody>
+          <a:bodyPr wrap="square">
+            <a:spAutoFit/>
+          </a:bodyPr>
+          <a:lstStyle/>
+          <a:p>
+            <a:pPr marL="285750" indent="-285750">
+              <a:spcAft>
+                <a:spcPts val="600"/>
+              </a:spcAft>
+              <a:buFont typeface="Arial" panose="020B0604020202020204" pitchFamily="34" charset="0"/>
+              <a:buChar char="•"/>
+            </a:pPr>
+            <a:r>
+              <a:rPr lang="en-AU" dirty="0"/>
+              <a:t>The reforms increase the taxation of risk.</a:t>
+            </a:r>
+          </a:p>
+        </p:txBody>
+      </p:sp>
+      <p:sp>
+        <p:nvSpPr>
+          <p:cNvPr id="15" name="TextBox 14">
+            <a:extLst>
+              <a:ext uri="{FF2B5EF4-FFF2-40B4-BE49-F238E27FC236}">
+                <a16:creationId xmlns:a16="http://schemas.microsoft.com/office/drawing/2014/main" id="{7B0E9D27-8386-DB85-9515-312085C5D56A}"/>
+              </a:ext>
+            </a:extLst>
+          </p:cNvPr>
+          <p:cNvSpPr txBox="1"/>
+          <p:nvPr/>
+        </p:nvSpPr>
+        <p:spPr>
+          <a:xfrm>
+            <a:off x="436129" y="4654573"/>
+            <a:ext cx="5659871" cy="1708160"/>
+          </a:xfrm>
+          <a:prstGeom prst="rect">
+            <a:avLst/>
+          </a:prstGeom>
+          <a:noFill/>
+        </p:spPr>
+        <p:txBody>
+          <a:bodyPr wrap="square">
+            <a:spAutoFit/>
+          </a:bodyPr>
+          <a:lstStyle/>
+          <a:p>
+            <a:pPr marL="285750" indent="-285750">
+              <a:spcAft>
+                <a:spcPts val="600"/>
+              </a:spcAft>
+              <a:buFont typeface="Arial" panose="020B0604020202020204" pitchFamily="34" charset="0"/>
+              <a:buChar char="•"/>
+            </a:pPr>
+            <a:r>
+              <a:rPr lang="en-AU" dirty="0"/>
+              <a:t>In the absence of “asymmetry” this would be </a:t>
+            </a:r>
+            <a:r>
+              <a:rPr lang="en-AU" b="1" dirty="0"/>
+              <a:t>neutral/positive</a:t>
+            </a:r>
+            <a:r>
+              <a:rPr lang="en-AU" dirty="0"/>
+              <a:t> with respect to risk.</a:t>
+            </a:r>
+          </a:p>
+          <a:p>
+            <a:pPr marL="742950" lvl="1" indent="-285750">
+              <a:spcAft>
+                <a:spcPts val="600"/>
+              </a:spcAft>
+              <a:buFont typeface="Arial" panose="020B0604020202020204" pitchFamily="34" charset="0"/>
+              <a:buChar char="•"/>
+            </a:pPr>
+            <a:r>
+              <a:rPr lang="en-AU" dirty="0"/>
+              <a:t>Progressive taxes.</a:t>
+            </a:r>
+          </a:p>
+          <a:p>
+            <a:pPr marL="742950" lvl="1" indent="-285750">
+              <a:spcAft>
+                <a:spcPts val="600"/>
+              </a:spcAft>
+              <a:buFont typeface="Arial" panose="020B0604020202020204" pitchFamily="34" charset="0"/>
+              <a:buChar char="•"/>
+            </a:pPr>
+            <a:r>
+              <a:rPr lang="en-AU" dirty="0"/>
+              <a:t>Differential treatment of losses.</a:t>
+            </a:r>
+          </a:p>
+          <a:p>
+            <a:pPr marL="742950" lvl="1" indent="-285750">
+              <a:spcAft>
+                <a:spcPts val="600"/>
+              </a:spcAft>
+              <a:buFont typeface="Arial" panose="020B0604020202020204" pitchFamily="34" charset="0"/>
+              <a:buChar char="•"/>
+            </a:pPr>
+            <a:r>
+              <a:rPr lang="en-AU" dirty="0"/>
+              <a:t>Minimum rates.</a:t>
+            </a:r>
+          </a:p>
+        </p:txBody>
+      </p:sp>
+      <p:pic>
+        <p:nvPicPr>
+          <p:cNvPr id="17" name="Picture 16">
+            <a:extLst>
+              <a:ext uri="{FF2B5EF4-FFF2-40B4-BE49-F238E27FC236}">
+                <a16:creationId xmlns:a16="http://schemas.microsoft.com/office/drawing/2014/main" id="{931F2AF3-7884-490E-B09B-CE96CCC609E8}"/>
+              </a:ext>
+            </a:extLst>
+          </p:cNvPr>
+          <p:cNvPicPr>
+            <a:picLocks noChangeAspect="1"/>
+          </p:cNvPicPr>
+          <p:nvPr/>
+        </p:nvPicPr>
+        <p:blipFill>
+          <a:blip r:embed="rId5" cstate="print">
+            <a:extLst>
+              <a:ext uri="{28A0092B-C50C-407E-A947-70E740481C1C}">
+                <a14:useLocalDpi xmlns:a14="http://schemas.microsoft.com/office/drawing/2010/main" val="0"/>
+              </a:ext>
+            </a:extLst>
+          </a:blip>
+          <a:srcRect/>
+          <a:stretch>
+            <a:fillRect/>
+          </a:stretch>
+        </p:blipFill>
+        <p:spPr bwMode="auto">
+          <a:xfrm>
+            <a:off x="5787048" y="2881935"/>
+            <a:ext cx="5721350" cy="3435350"/>
+          </a:xfrm>
+          <a:prstGeom prst="rect">
+            <a:avLst/>
+          </a:prstGeom>
+          <a:noFill/>
+          <a:ln>
+            <a:noFill/>
+          </a:ln>
+        </p:spPr>
+      </p:pic>
+    </p:spTree>
+    <p:extLst>
+      <p:ext uri="{BB962C8B-B14F-4D97-AF65-F5344CB8AC3E}">
+        <p14:creationId xmlns:p14="http://schemas.microsoft.com/office/powerpoint/2010/main" val="2269165012"/>
+      </p:ext>
+    </p:extLst>
+  </p:cSld>
+  <p:clrMapOvr>
+    <a:masterClrMapping/>
+  </p:clrMapOvr>
+  <p:timing>
+    <p:tnLst>
+      <p:par>
+        <p:cTn id="1" dur="indefinite" restart="never" nodeType="tmRoot">
+          <p:childTnLst>
+            <p:seq concurrent="1" nextAc="seek">
+              <p:cTn id="2" dur="indefinite" nodeType="mainSeq">
+                <p:childTnLst>
+                  <p:par>
+                    <p:cTn id="3" fill="hold">
+                      <p:stCondLst>
+                        <p:cond delay="indefinite"/>
+                      </p:stCondLst>
+                      <p:childTnLst>
+                        <p:par>
+                          <p:cTn id="4" fill="hold">
+                            <p:stCondLst>
+                              <p:cond delay="0"/>
+                            </p:stCondLst>
+                            <p:childTnLst>
+                              <p:par>
+                                <p:cTn id="5" presetID="1" presetClass="entr" presetSubtype="0" fill="hold" grpId="0" nodeType="clickEffect">
+                                  <p:stCondLst>
+                                    <p:cond delay="0"/>
+                                  </p:stCondLst>
+                                  <p:childTnLst>
+                                    <p:set>
+                                      <p:cBhvr>
+                                        <p:cTn id="6" dur="1" fill="hold">
+                                          <p:stCondLst>
+                                            <p:cond delay="0"/>
+                                          </p:stCondLst>
+                                        </p:cTn>
+                                        <p:tgtEl>
+                                          <p:spTgt spid="8"/>
+                                        </p:tgtEl>
+                                        <p:attrNameLst>
+                                          <p:attrName>style.visibility</p:attrName>
+                                        </p:attrNameLst>
+                                      </p:cBhvr>
+                                      <p:to>
+                                        <p:strVal val="visible"/>
+                                      </p:to>
+                                    </p:set>
+                                  </p:childTnLst>
+                                </p:cTn>
+                              </p:par>
+                            </p:childTnLst>
+                          </p:cTn>
+                        </p:par>
+                      </p:childTnLst>
+                    </p:cTn>
+                  </p:par>
+                  <p:par>
+                    <p:cTn id="7" fill="hold">
+                      <p:stCondLst>
+                        <p:cond delay="indefinite"/>
+                      </p:stCondLst>
+                      <p:childTnLst>
+                        <p:par>
+                          <p:cTn id="8" fill="hold">
+                            <p:stCondLst>
+                              <p:cond delay="0"/>
+                            </p:stCondLst>
+                            <p:childTnLst>
+                              <p:par>
+                                <p:cTn id="9" presetID="1" presetClass="entr" presetSubtype="0" fill="hold" grpId="0" nodeType="clickEffect">
+                                  <p:stCondLst>
+                                    <p:cond delay="0"/>
+                                  </p:stCondLst>
+                                  <p:childTnLst>
+                                    <p:set>
+                                      <p:cBhvr>
+                                        <p:cTn id="10" dur="1" fill="hold">
+                                          <p:stCondLst>
+                                            <p:cond delay="0"/>
+                                          </p:stCondLst>
+                                        </p:cTn>
+                                        <p:tgtEl>
                                           <p:spTgt spid="9"/>
+                                        </p:tgtEl>
+                                        <p:attrNameLst>
+                                          <p:attrName>style.visibility</p:attrName>
+                                        </p:attrNameLst>
+                                      </p:cBhvr>
+                                      <p:to>
+                                        <p:strVal val="visible"/>
+                                      </p:to>
+                                    </p:set>
+                                  </p:childTnLst>
+                                </p:cTn>
+                              </p:par>
+                            </p:childTnLst>
+                          </p:cTn>
+                        </p:par>
+                      </p:childTnLst>
+                    </p:cTn>
+                  </p:par>
+                  <p:par>
+                    <p:cTn id="11" fill="hold">
+                      <p:stCondLst>
+                        <p:cond delay="indefinite"/>
+                      </p:stCondLst>
+                      <p:childTnLst>
+                        <p:par>
+                          <p:cTn id="12" fill="hold">
+                            <p:stCondLst>
+                              <p:cond delay="0"/>
+                            </p:stCondLst>
+                            <p:childTnLst>
+                              <p:par>
+                                <p:cTn id="13" presetID="1" presetClass="entr" presetSubtype="0" fill="hold" grpId="0" nodeType="clickEffect">
+                                  <p:stCondLst>
+                                    <p:cond delay="0"/>
+                                  </p:stCondLst>
+                                  <p:childTnLst>
+                                    <p:set>
+                                      <p:cBhvr>
+                                        <p:cTn id="14" dur="1" fill="hold">
+                                          <p:stCondLst>
+                                            <p:cond delay="0"/>
+                                          </p:stCondLst>
+                                        </p:cTn>
+                                        <p:tgtEl>
+                                          <p:spTgt spid="10"/>
                                         </p:tgtEl>
                                         <p:attrNameLst>
                                           <p:attrName>style.visibility</p:attrName>
@@ -20768,7 +21427,7 @@
                                           </p:stCondLst>
                                         </p:cTn>
                                         <p:tgtEl>
-                                          <p:spTgt spid="10"/>
+                                          <p:spTgt spid="13"/>
                                         </p:tgtEl>
                                         <p:attrNameLst>
                                           <p:attrName>style.visibility</p:attrName>
@@ -20813,7 +21472,7 @@
                                           </p:stCondLst>
                                         </p:cTn>
                                         <p:tgtEl>
-                                          <p:spTgt spid="11"/>
+                                          <p:spTgt spid="14"/>
                                         </p:tgtEl>
                                         <p:attrNameLst>
                                           <p:attrName>style.visibility</p:attrName>
@@ -20858,7 +21517,52 @@
                                           </p:stCondLst>
                                         </p:cTn>
                                         <p:tgtEl>
-                                          <p:spTgt spid="12"/>
+                                          <p:spTgt spid="15"/>
+                                        </p:tgtEl>
+                                        <p:attrNameLst>
+                                          <p:attrName>style.visibility</p:attrName>
+                                        </p:attrNameLst>
+                                      </p:cBhvr>
+                                      <p:to>
+                                        <p:strVal val="visible"/>
+                                      </p:to>
+                                    </p:set>
+                                  </p:childTnLst>
+                                </p:cTn>
+                              </p:par>
+                            </p:childTnLst>
+                          </p:cTn>
+                        </p:par>
+                      </p:childTnLst>
+                    </p:cTn>
+                  </p:par>
+                  <p:par>
+                    <p:cTn id="27" fill="hold">
+                      <p:stCondLst>
+                        <p:cond delay="indefinite"/>
+                      </p:stCondLst>
+                      <p:childTnLst>
+                        <p:par>
+                          <p:cTn id="28" fill="hold">
+                            <p:stCondLst>
+                              <p:cond delay="0"/>
+                            </p:stCondLst>
+                            <p:childTnLst>
+                              <p:par>
+                                <p:cTn id="29" presetID="1" presetClass="entr" presetSubtype="0" fill="hold" nodeType="clickEffect">
+                                  <p:stCondLst>
+                                    <p:cond delay="0"/>
+                                  </p:stCondLst>
+                                  <p:childTnLst>
+                                    <p:set>
+                                      <p:cBhvr>
+                                        <p:cTn id="30" dur="1" fill="hold">
+                                          <p:stCondLst>
+                                            <p:cond delay="0"/>
+                                          </p:stCondLst>
+                                        </p:cTn>
+                                        <p:tgtEl>
+                                          <p:spTgt spid="17"/>
                                         </p:tgtEl>
                                         <p:attrNameLst>
                                           <p:attrName>style.visibility</p:attrName>
@@ -20899,14 +21603,1666 @@
       </p:par>
     </p:tnLst>
     <p:bldLst>
-      <p:bldP spid="3" grpId="0"/>
       <p:bldP spid="8" grpId="0"/>
       <p:bldP spid="9" grpId="0"/>
       <p:bldP spid="10" grpId="0"/>
-      <p:bldP spid="11" grpId="0"/>
-      <p:bldP spid="12" grpId="0"/>
+      <p:bldP spid="13" grpId="0"/>
+      <p:bldP spid="14" grpId="0"/>
+      <p:bldP spid="15" grpId="0"/>
     </p:bldLst>
   </p:timing>
+</p:sld>
+</file>
+
+<file path=ppt/slides/slide12.xml><?xml version="1.0" encoding="utf-8"?>
+<p:sld xmlns:a="http://schemas.openxmlformats.org/drawingml/2006/main" xmlns:r="http://schemas.openxmlformats.org/officeDocument/2006/relationships" xmlns:p="http://schemas.openxmlformats.org/presentationml/2006/main">
+  <p:cSld>
+    <p:spTree>
+      <p:nvGrpSpPr>
+        <p:cNvPr id="1" name="">
+          <a:extLst>
+            <a:ext uri="{FF2B5EF4-FFF2-40B4-BE49-F238E27FC236}">
+              <a16:creationId xmlns:a16="http://schemas.microsoft.com/office/drawing/2014/main" id="{E7B4D1B1-1AA1-A1E1-AF58-96EFD69F9263}"/>
+            </a:ext>
+          </a:extLst>
+        </p:cNvPr>
+        <p:cNvGrpSpPr/>
+        <p:nvPr/>
+      </p:nvGrpSpPr>
+      <p:grpSpPr>
+        <a:xfrm>
+          <a:off x="0" y="0"/>
+          <a:ext cx="0" cy="0"/>
+          <a:chOff x="0" y="0"/>
+          <a:chExt cx="0" cy="0"/>
+        </a:xfrm>
+      </p:grpSpPr>
+      <p:graphicFrame>
+        <p:nvGraphicFramePr>
+          <p:cNvPr id="6" name="Object 5" hidden="1">
+            <a:extLst>
+              <a:ext uri="{FF2B5EF4-FFF2-40B4-BE49-F238E27FC236}">
+                <a16:creationId xmlns:a16="http://schemas.microsoft.com/office/drawing/2014/main" id="{73E357FF-1AE4-28F9-DDC9-7A1ACE1CA9EC}"/>
+              </a:ext>
+            </a:extLst>
+          </p:cNvPr>
+          <p:cNvGraphicFramePr>
+            <a:graphicFrameLocks noChangeAspect="1"/>
+          </p:cNvGraphicFramePr>
+          <p:nvPr>
+            <p:custDataLst>
+              <p:tags r:id="rId1"/>
+            </p:custDataLst>
+          </p:nvPr>
+        </p:nvGraphicFramePr>
+        <p:xfrm>
+          <a:off x="1588" y="1589"/>
+          <a:ext cx="1588" cy="1588"/>
+        </p:xfrm>
+        <a:graphic>
+          <a:graphicData uri="http://schemas.openxmlformats.org/presentationml/2006/ole">
+            <mc:AlternateContent xmlns:mc="http://schemas.openxmlformats.org/markup-compatibility/2006">
+              <mc:Choice xmlns:v="urn:schemas-microsoft-com:vml" Requires="v">
+                <p:oleObj name="think-cell Slide" r:id="rId3" imgW="395" imgH="394" progId="TCLayout.ActiveDocument.1">
+                  <p:embed/>
+                </p:oleObj>
+              </mc:Choice>
+              <mc:Fallback>
+                <p:oleObj name="think-cell Slide" r:id="rId3" imgW="395" imgH="394" progId="TCLayout.ActiveDocument.1">
+                  <p:embed/>
+                  <p:pic>
+                    <p:nvPicPr>
+                      <p:cNvPr id="6" name="Object 5" hidden="1">
+                        <a:extLst>
+                          <a:ext uri="{FF2B5EF4-FFF2-40B4-BE49-F238E27FC236}">
+                            <a16:creationId xmlns:a16="http://schemas.microsoft.com/office/drawing/2014/main" id="{1450181C-6C9A-9739-99CF-AD4C5359FD16}"/>
+                          </a:ext>
+                        </a:extLst>
+                      </p:cNvPr>
+                      <p:cNvPicPr/>
+                      <p:nvPr/>
+                    </p:nvPicPr>
+                    <p:blipFill>
+                      <a:blip r:embed="rId4"/>
+                      <a:stretch>
+                        <a:fillRect/>
+                      </a:stretch>
+                    </p:blipFill>
+                    <p:spPr>
+                      <a:xfrm>
+                        <a:off x="1588" y="1589"/>
+                        <a:ext cx="1588" cy="1588"/>
+                      </a:xfrm>
+                      <a:prstGeom prst="rect">
+                        <a:avLst/>
+                      </a:prstGeom>
+                    </p:spPr>
+                  </p:pic>
+                </p:oleObj>
+              </mc:Fallback>
+            </mc:AlternateContent>
+          </a:graphicData>
+        </a:graphic>
+      </p:graphicFrame>
+      <p:sp>
+        <p:nvSpPr>
+          <p:cNvPr id="4" name="Slide Number Placeholder 3">
+            <a:extLst>
+              <a:ext uri="{FF2B5EF4-FFF2-40B4-BE49-F238E27FC236}">
+                <a16:creationId xmlns:a16="http://schemas.microsoft.com/office/drawing/2014/main" id="{527483A3-6B48-0D1E-96EA-635C453E370C}"/>
+              </a:ext>
+            </a:extLst>
+          </p:cNvPr>
+          <p:cNvSpPr>
+            <a:spLocks noGrp="1"/>
+          </p:cNvSpPr>
+          <p:nvPr>
+            <p:ph type="sldNum" sz="quarter" idx="10"/>
+          </p:nvPr>
+        </p:nvSpPr>
+        <p:spPr/>
+        <p:txBody>
+          <a:bodyPr/>
+          <a:lstStyle/>
+          <a:p>
+            <a:fld id="{4F9AC08D-23A9-440E-BCB9-AA1E9877CC38}" type="slidenum">
+              <a:rPr lang="en-US" smtClean="0"/>
+              <a:pPr/>
+              <a:t>12</a:t>
+            </a:fld>
+            <a:endParaRPr lang="en-US"/>
+          </a:p>
+        </p:txBody>
+      </p:sp>
+      <p:sp>
+        <p:nvSpPr>
+          <p:cNvPr id="2" name="Title 1">
+            <a:extLst>
+              <a:ext uri="{FF2B5EF4-FFF2-40B4-BE49-F238E27FC236}">
+                <a16:creationId xmlns:a16="http://schemas.microsoft.com/office/drawing/2014/main" id="{E0AA9D0A-40F4-E594-2858-26EBD8319DEC}"/>
+              </a:ext>
+            </a:extLst>
+          </p:cNvPr>
+          <p:cNvSpPr>
+            <a:spLocks noGrp="1"/>
+          </p:cNvSpPr>
+          <p:nvPr>
+            <p:ph type="title"/>
+          </p:nvPr>
+        </p:nvSpPr>
+        <p:spPr>
+          <a:xfrm>
+            <a:off x="4000586" y="2601045"/>
+            <a:ext cx="3637766" cy="700597"/>
+          </a:xfrm>
+        </p:spPr>
+        <p:txBody>
+          <a:bodyPr/>
+          <a:lstStyle/>
+          <a:p>
+            <a:r>
+              <a:rPr lang="en-US" sz="6600" dirty="0">
+                <a:solidFill>
+                  <a:schemeClr val="accent2"/>
+                </a:solidFill>
+              </a:rPr>
+              <a:t>Q&amp;A</a:t>
+            </a:r>
+          </a:p>
+        </p:txBody>
+      </p:sp>
+    </p:spTree>
+    <p:extLst>
+      <p:ext uri="{BB962C8B-B14F-4D97-AF65-F5344CB8AC3E}">
+        <p14:creationId xmlns:p14="http://schemas.microsoft.com/office/powerpoint/2010/main" val="2527269811"/>
+      </p:ext>
+    </p:extLst>
+  </p:cSld>
+  <p:clrMapOvr>
+    <a:masterClrMapping/>
+  </p:clrMapOvr>
+</p:sld>
+</file>
+
+<file path=ppt/slides/slide13.xml><?xml version="1.0" encoding="utf-8"?>
+<p:sld xmlns:a="http://schemas.openxmlformats.org/drawingml/2006/main" xmlns:r="http://schemas.openxmlformats.org/officeDocument/2006/relationships" xmlns:p="http://schemas.openxmlformats.org/presentationml/2006/main">
+  <p:cSld>
+    <p:spTree>
+      <p:nvGrpSpPr>
+        <p:cNvPr id="1" name="">
+          <a:extLst>
+            <a:ext uri="{FF2B5EF4-FFF2-40B4-BE49-F238E27FC236}">
+              <a16:creationId xmlns:a16="http://schemas.microsoft.com/office/drawing/2014/main" id="{8FB3AFEE-4D13-858C-DAE2-E3C0650CD916}"/>
+            </a:ext>
+          </a:extLst>
+        </p:cNvPr>
+        <p:cNvGrpSpPr/>
+        <p:nvPr/>
+      </p:nvGrpSpPr>
+      <p:grpSpPr>
+        <a:xfrm>
+          <a:off x="0" y="0"/>
+          <a:ext cx="0" cy="0"/>
+          <a:chOff x="0" y="0"/>
+          <a:chExt cx="0" cy="0"/>
+        </a:xfrm>
+      </p:grpSpPr>
+      <p:graphicFrame>
+        <p:nvGraphicFramePr>
+          <p:cNvPr id="6" name="Object 5" hidden="1">
+            <a:extLst>
+              <a:ext uri="{FF2B5EF4-FFF2-40B4-BE49-F238E27FC236}">
+                <a16:creationId xmlns:a16="http://schemas.microsoft.com/office/drawing/2014/main" id="{08EA7791-4497-DB35-0A8A-E38D76814D57}"/>
+              </a:ext>
+            </a:extLst>
+          </p:cNvPr>
+          <p:cNvGraphicFramePr>
+            <a:graphicFrameLocks noChangeAspect="1"/>
+          </p:cNvGraphicFramePr>
+          <p:nvPr>
+            <p:custDataLst>
+              <p:tags r:id="rId1"/>
+            </p:custDataLst>
+          </p:nvPr>
+        </p:nvGraphicFramePr>
+        <p:xfrm>
+          <a:off x="1588" y="1589"/>
+          <a:ext cx="1588" cy="1588"/>
+        </p:xfrm>
+        <a:graphic>
+          <a:graphicData uri="http://schemas.openxmlformats.org/presentationml/2006/ole">
+            <mc:AlternateContent xmlns:mc="http://schemas.openxmlformats.org/markup-compatibility/2006">
+              <mc:Choice xmlns:v="urn:schemas-microsoft-com:vml" Requires="v">
+                <p:oleObj name="think-cell Slide" r:id="rId3" imgW="395" imgH="394" progId="TCLayout.ActiveDocument.1">
+                  <p:embed/>
+                </p:oleObj>
+              </mc:Choice>
+              <mc:Fallback>
+                <p:oleObj name="think-cell Slide" r:id="rId3" imgW="395" imgH="394" progId="TCLayout.ActiveDocument.1">
+                  <p:embed/>
+                  <p:pic>
+                    <p:nvPicPr>
+                      <p:cNvPr id="6" name="Object 5" hidden="1">
+                        <a:extLst>
+                          <a:ext uri="{FF2B5EF4-FFF2-40B4-BE49-F238E27FC236}">
+                            <a16:creationId xmlns:a16="http://schemas.microsoft.com/office/drawing/2014/main" id="{396BCACE-3C28-5EFD-F678-5248A243F2EA}"/>
+                          </a:ext>
+                        </a:extLst>
+                      </p:cNvPr>
+                      <p:cNvPicPr/>
+                      <p:nvPr/>
+                    </p:nvPicPr>
+                    <p:blipFill>
+                      <a:blip r:embed="rId4"/>
+                      <a:stretch>
+                        <a:fillRect/>
+                      </a:stretch>
+                    </p:blipFill>
+                    <p:spPr>
+                      <a:xfrm>
+                        <a:off x="1588" y="1589"/>
+                        <a:ext cx="1588" cy="1588"/>
+                      </a:xfrm>
+                      <a:prstGeom prst="rect">
+                        <a:avLst/>
+                      </a:prstGeom>
+                    </p:spPr>
+                  </p:pic>
+                </p:oleObj>
+              </mc:Fallback>
+            </mc:AlternateContent>
+          </a:graphicData>
+        </a:graphic>
+      </p:graphicFrame>
+      <p:sp>
+        <p:nvSpPr>
+          <p:cNvPr id="4" name="Slide Number Placeholder 3">
+            <a:extLst>
+              <a:ext uri="{FF2B5EF4-FFF2-40B4-BE49-F238E27FC236}">
+                <a16:creationId xmlns:a16="http://schemas.microsoft.com/office/drawing/2014/main" id="{F7CF7B40-2570-519E-E191-922E67EF5614}"/>
+              </a:ext>
+            </a:extLst>
+          </p:cNvPr>
+          <p:cNvSpPr>
+            <a:spLocks noGrp="1"/>
+          </p:cNvSpPr>
+          <p:nvPr>
+            <p:ph type="sldNum" sz="quarter" idx="10"/>
+          </p:nvPr>
+        </p:nvSpPr>
+        <p:spPr/>
+        <p:txBody>
+          <a:bodyPr/>
+          <a:lstStyle/>
+          <a:p>
+            <a:fld id="{4F9AC08D-23A9-440E-BCB9-AA1E9877CC38}" type="slidenum">
+              <a:rPr lang="en-US" smtClean="0"/>
+              <a:pPr/>
+              <a:t>13</a:t>
+            </a:fld>
+            <a:endParaRPr lang="en-US"/>
+          </a:p>
+        </p:txBody>
+      </p:sp>
+      <p:sp>
+        <p:nvSpPr>
+          <p:cNvPr id="2" name="Title 1">
+            <a:extLst>
+              <a:ext uri="{FF2B5EF4-FFF2-40B4-BE49-F238E27FC236}">
+                <a16:creationId xmlns:a16="http://schemas.microsoft.com/office/drawing/2014/main" id="{5939F4A8-7877-5C34-A864-3E28DBD92352}"/>
+              </a:ext>
+            </a:extLst>
+          </p:cNvPr>
+          <p:cNvSpPr>
+            <a:spLocks noGrp="1"/>
+          </p:cNvSpPr>
+          <p:nvPr>
+            <p:ph type="title"/>
+          </p:nvPr>
+        </p:nvSpPr>
+        <p:spPr/>
+        <p:txBody>
+          <a:bodyPr/>
+          <a:lstStyle/>
+          <a:p>
+            <a:r>
+              <a:rPr lang="en-US" dirty="0"/>
+              <a:t>Additional plots</a:t>
+            </a:r>
+          </a:p>
+        </p:txBody>
+      </p:sp>
+      <p:sp>
+        <p:nvSpPr>
+          <p:cNvPr id="7" name="TextBox 6">
+            <a:extLst>
+              <a:ext uri="{FF2B5EF4-FFF2-40B4-BE49-F238E27FC236}">
+                <a16:creationId xmlns:a16="http://schemas.microsoft.com/office/drawing/2014/main" id="{11B9D063-4CA8-A98E-B502-D2E5910F5EF9}"/>
+              </a:ext>
+            </a:extLst>
+          </p:cNvPr>
+          <p:cNvSpPr txBox="1"/>
+          <p:nvPr/>
+        </p:nvSpPr>
+        <p:spPr>
+          <a:xfrm>
+            <a:off x="436129" y="1895950"/>
+            <a:ext cx="9285648" cy="369332"/>
+          </a:xfrm>
+          <a:prstGeom prst="rect">
+            <a:avLst/>
+          </a:prstGeom>
+          <a:noFill/>
+        </p:spPr>
+        <p:txBody>
+          <a:bodyPr wrap="square">
+            <a:spAutoFit/>
+          </a:bodyPr>
+          <a:lstStyle/>
+          <a:p>
+            <a:r>
+              <a:rPr lang="en-AU" b="1" dirty="0"/>
+              <a:t>Flat tax incentive for risk-averse individual</a:t>
+            </a:r>
+          </a:p>
+        </p:txBody>
+      </p:sp>
+      <p:sp>
+        <p:nvSpPr>
+          <p:cNvPr id="13" name="TextBox 12">
+            <a:extLst>
+              <a:ext uri="{FF2B5EF4-FFF2-40B4-BE49-F238E27FC236}">
+                <a16:creationId xmlns:a16="http://schemas.microsoft.com/office/drawing/2014/main" id="{21AD9E6A-68DB-E3C7-A112-1648A8C1410D}"/>
+              </a:ext>
+            </a:extLst>
+          </p:cNvPr>
+          <p:cNvSpPr txBox="1"/>
+          <p:nvPr/>
+        </p:nvSpPr>
+        <p:spPr>
+          <a:xfrm>
+            <a:off x="1257385" y="4260189"/>
+            <a:ext cx="9285648" cy="369332"/>
+          </a:xfrm>
+          <a:prstGeom prst="rect">
+            <a:avLst/>
+          </a:prstGeom>
+          <a:noFill/>
+        </p:spPr>
+        <p:txBody>
+          <a:bodyPr wrap="square">
+            <a:spAutoFit/>
+          </a:bodyPr>
+          <a:lstStyle/>
+          <a:p>
+            <a:r>
+              <a:rPr lang="en-AU" b="1" dirty="0"/>
+              <a:t>Deferral without imputation</a:t>
+            </a:r>
+          </a:p>
+        </p:txBody>
+      </p:sp>
+      <p:pic>
+        <p:nvPicPr>
+          <p:cNvPr id="3" name="Picture 2">
+            <a:extLst>
+              <a:ext uri="{FF2B5EF4-FFF2-40B4-BE49-F238E27FC236}">
+                <a16:creationId xmlns:a16="http://schemas.microsoft.com/office/drawing/2014/main" id="{48AF6AB8-5634-4159-B441-DD4DB584C750}"/>
+              </a:ext>
+            </a:extLst>
+          </p:cNvPr>
+          <p:cNvPicPr>
+            <a:picLocks noChangeAspect="1"/>
+          </p:cNvPicPr>
+          <p:nvPr/>
+        </p:nvPicPr>
+        <p:blipFill>
+          <a:blip r:embed="rId5"/>
+          <a:stretch>
+            <a:fillRect/>
+          </a:stretch>
+        </p:blipFill>
+        <p:spPr>
+          <a:xfrm>
+            <a:off x="6096000" y="580221"/>
+            <a:ext cx="4813680" cy="2935353"/>
+          </a:xfrm>
+          <a:prstGeom prst="rect">
+            <a:avLst/>
+          </a:prstGeom>
+        </p:spPr>
+      </p:pic>
+      <p:pic>
+        <p:nvPicPr>
+          <p:cNvPr id="5" name="Picture 4">
+            <a:extLst>
+              <a:ext uri="{FF2B5EF4-FFF2-40B4-BE49-F238E27FC236}">
+                <a16:creationId xmlns:a16="http://schemas.microsoft.com/office/drawing/2014/main" id="{36E4636F-8C5F-44BA-BB65-39D89581AF2D}"/>
+              </a:ext>
+            </a:extLst>
+          </p:cNvPr>
+          <p:cNvPicPr>
+            <a:picLocks noChangeAspect="1"/>
+          </p:cNvPicPr>
+          <p:nvPr/>
+        </p:nvPicPr>
+        <p:blipFill>
+          <a:blip r:embed="rId6" cstate="print">
+            <a:extLst>
+              <a:ext uri="{28A0092B-C50C-407E-A947-70E740481C1C}">
+                <a14:useLocalDpi xmlns:a14="http://schemas.microsoft.com/office/drawing/2010/main" val="0"/>
+              </a:ext>
+            </a:extLst>
+          </a:blip>
+          <a:srcRect/>
+          <a:stretch>
+            <a:fillRect/>
+          </a:stretch>
+        </p:blipFill>
+        <p:spPr bwMode="auto">
+          <a:xfrm>
+            <a:off x="5444713" y="3630394"/>
+            <a:ext cx="4841939" cy="2907313"/>
+          </a:xfrm>
+          <a:prstGeom prst="rect">
+            <a:avLst/>
+          </a:prstGeom>
+          <a:noFill/>
+          <a:ln>
+            <a:noFill/>
+          </a:ln>
+        </p:spPr>
+      </p:pic>
+    </p:spTree>
+    <p:extLst>
+      <p:ext uri="{BB962C8B-B14F-4D97-AF65-F5344CB8AC3E}">
+        <p14:creationId xmlns:p14="http://schemas.microsoft.com/office/powerpoint/2010/main" val="739737529"/>
+      </p:ext>
+    </p:extLst>
+  </p:cSld>
+  <p:clrMapOvr>
+    <a:masterClrMapping/>
+  </p:clrMapOvr>
+</p:sld>
+</file>
+
+<file path=ppt/slides/slide14.xml><?xml version="1.0" encoding="utf-8"?>
+<p:sld xmlns:a="http://schemas.openxmlformats.org/drawingml/2006/main" xmlns:r="http://schemas.openxmlformats.org/officeDocument/2006/relationships" xmlns:p="http://schemas.openxmlformats.org/presentationml/2006/main">
+  <p:cSld>
+    <p:spTree>
+      <p:nvGrpSpPr>
+        <p:cNvPr id="1" name="">
+          <a:extLst>
+            <a:ext uri="{FF2B5EF4-FFF2-40B4-BE49-F238E27FC236}">
+              <a16:creationId xmlns:a16="http://schemas.microsoft.com/office/drawing/2014/main" id="{FA99CCA0-CE01-99DB-F187-E9125EC74DCC}"/>
+            </a:ext>
+          </a:extLst>
+        </p:cNvPr>
+        <p:cNvGrpSpPr/>
+        <p:nvPr/>
+      </p:nvGrpSpPr>
+      <p:grpSpPr>
+        <a:xfrm>
+          <a:off x="0" y="0"/>
+          <a:ext cx="0" cy="0"/>
+          <a:chOff x="0" y="0"/>
+          <a:chExt cx="0" cy="0"/>
+        </a:xfrm>
+      </p:grpSpPr>
+      <p:graphicFrame>
+        <p:nvGraphicFramePr>
+          <p:cNvPr id="6" name="Object 5" hidden="1">
+            <a:extLst>
+              <a:ext uri="{FF2B5EF4-FFF2-40B4-BE49-F238E27FC236}">
+                <a16:creationId xmlns:a16="http://schemas.microsoft.com/office/drawing/2014/main" id="{DF9AE53F-513F-C2C9-7961-DF5BE89264CD}"/>
+              </a:ext>
+            </a:extLst>
+          </p:cNvPr>
+          <p:cNvGraphicFramePr>
+            <a:graphicFrameLocks noChangeAspect="1"/>
+          </p:cNvGraphicFramePr>
+          <p:nvPr>
+            <p:custDataLst>
+              <p:tags r:id="rId1"/>
+            </p:custDataLst>
+          </p:nvPr>
+        </p:nvGraphicFramePr>
+        <p:xfrm>
+          <a:off x="1588" y="1589"/>
+          <a:ext cx="1588" cy="1588"/>
+        </p:xfrm>
+        <a:graphic>
+          <a:graphicData uri="http://schemas.openxmlformats.org/presentationml/2006/ole">
+            <mc:AlternateContent xmlns:mc="http://schemas.openxmlformats.org/markup-compatibility/2006">
+              <mc:Choice xmlns:v="urn:schemas-microsoft-com:vml" Requires="v">
+                <p:oleObj name="think-cell Slide" r:id="rId3" imgW="395" imgH="394" progId="TCLayout.ActiveDocument.1">
+                  <p:embed/>
+                </p:oleObj>
+              </mc:Choice>
+              <mc:Fallback>
+                <p:oleObj name="think-cell Slide" r:id="rId3" imgW="395" imgH="394" progId="TCLayout.ActiveDocument.1">
+                  <p:embed/>
+                  <p:pic>
+                    <p:nvPicPr>
+                      <p:cNvPr id="6" name="Object 5" hidden="1">
+                        <a:extLst>
+                          <a:ext uri="{FF2B5EF4-FFF2-40B4-BE49-F238E27FC236}">
+                            <a16:creationId xmlns:a16="http://schemas.microsoft.com/office/drawing/2014/main" id="{08EA7791-4497-DB35-0A8A-E38D76814D57}"/>
+                          </a:ext>
+                        </a:extLst>
+                      </p:cNvPr>
+                      <p:cNvPicPr/>
+                      <p:nvPr/>
+                    </p:nvPicPr>
+                    <p:blipFill>
+                      <a:blip r:embed="rId4"/>
+                      <a:stretch>
+                        <a:fillRect/>
+                      </a:stretch>
+                    </p:blipFill>
+                    <p:spPr>
+                      <a:xfrm>
+                        <a:off x="1588" y="1589"/>
+                        <a:ext cx="1588" cy="1588"/>
+                      </a:xfrm>
+                      <a:prstGeom prst="rect">
+                        <a:avLst/>
+                      </a:prstGeom>
+                    </p:spPr>
+                  </p:pic>
+                </p:oleObj>
+              </mc:Fallback>
+            </mc:AlternateContent>
+          </a:graphicData>
+        </a:graphic>
+      </p:graphicFrame>
+      <p:sp>
+        <p:nvSpPr>
+          <p:cNvPr id="4" name="Slide Number Placeholder 3">
+            <a:extLst>
+              <a:ext uri="{FF2B5EF4-FFF2-40B4-BE49-F238E27FC236}">
+                <a16:creationId xmlns:a16="http://schemas.microsoft.com/office/drawing/2014/main" id="{01AE10CB-7C9F-3CD5-2EC5-5B08DCBF4B43}"/>
+              </a:ext>
+            </a:extLst>
+          </p:cNvPr>
+          <p:cNvSpPr>
+            <a:spLocks noGrp="1"/>
+          </p:cNvSpPr>
+          <p:nvPr>
+            <p:ph type="sldNum" sz="quarter" idx="10"/>
+          </p:nvPr>
+        </p:nvSpPr>
+        <p:spPr/>
+        <p:txBody>
+          <a:bodyPr/>
+          <a:lstStyle/>
+          <a:p>
+            <a:fld id="{4F9AC08D-23A9-440E-BCB9-AA1E9877CC38}" type="slidenum">
+              <a:rPr lang="en-US" smtClean="0"/>
+              <a:pPr/>
+              <a:t>14</a:t>
+            </a:fld>
+            <a:endParaRPr lang="en-US"/>
+          </a:p>
+        </p:txBody>
+      </p:sp>
+      <p:sp>
+        <p:nvSpPr>
+          <p:cNvPr id="2" name="Title 1">
+            <a:extLst>
+              <a:ext uri="{FF2B5EF4-FFF2-40B4-BE49-F238E27FC236}">
+                <a16:creationId xmlns:a16="http://schemas.microsoft.com/office/drawing/2014/main" id="{276A0441-5DCE-E35D-DDEC-3ABBA940B911}"/>
+              </a:ext>
+            </a:extLst>
+          </p:cNvPr>
+          <p:cNvSpPr>
+            <a:spLocks noGrp="1"/>
+          </p:cNvSpPr>
+          <p:nvPr>
+            <p:ph type="title"/>
+          </p:nvPr>
+        </p:nvSpPr>
+        <p:spPr/>
+        <p:txBody>
+          <a:bodyPr/>
+          <a:lstStyle/>
+          <a:p>
+            <a:r>
+              <a:rPr lang="en-US" dirty="0"/>
+              <a:t>Additional plots</a:t>
+            </a:r>
+          </a:p>
+        </p:txBody>
+      </p:sp>
+      <p:sp>
+        <p:nvSpPr>
+          <p:cNvPr id="13" name="TextBox 12">
+            <a:extLst>
+              <a:ext uri="{FF2B5EF4-FFF2-40B4-BE49-F238E27FC236}">
+                <a16:creationId xmlns:a16="http://schemas.microsoft.com/office/drawing/2014/main" id="{CC83A783-74C8-8EA6-4500-B0C38BCADBEC}"/>
+              </a:ext>
+            </a:extLst>
+          </p:cNvPr>
+          <p:cNvSpPr txBox="1"/>
+          <p:nvPr/>
+        </p:nvSpPr>
+        <p:spPr>
+          <a:xfrm>
+            <a:off x="754465" y="1974189"/>
+            <a:ext cx="9285648" cy="369332"/>
+          </a:xfrm>
+          <a:prstGeom prst="rect">
+            <a:avLst/>
+          </a:prstGeom>
+          <a:noFill/>
+        </p:spPr>
+        <p:txBody>
+          <a:bodyPr wrap="square">
+            <a:spAutoFit/>
+          </a:bodyPr>
+          <a:lstStyle/>
+          <a:p>
+            <a:r>
+              <a:rPr lang="en-AU" b="1" dirty="0"/>
+              <a:t>Deferral with imputation</a:t>
+            </a:r>
+          </a:p>
+        </p:txBody>
+      </p:sp>
+      <p:pic>
+        <p:nvPicPr>
+          <p:cNvPr id="8" name="Picture 7">
+            <a:extLst>
+              <a:ext uri="{FF2B5EF4-FFF2-40B4-BE49-F238E27FC236}">
+                <a16:creationId xmlns:a16="http://schemas.microsoft.com/office/drawing/2014/main" id="{AF67C447-9CF6-4DFD-B3E1-A3E2C5795BCD}"/>
+              </a:ext>
+            </a:extLst>
+          </p:cNvPr>
+          <p:cNvPicPr>
+            <a:picLocks noChangeAspect="1"/>
+          </p:cNvPicPr>
+          <p:nvPr/>
+        </p:nvPicPr>
+        <p:blipFill>
+          <a:blip r:embed="rId5" cstate="print">
+            <a:extLst>
+              <a:ext uri="{28A0092B-C50C-407E-A947-70E740481C1C}">
+                <a14:useLocalDpi xmlns:a14="http://schemas.microsoft.com/office/drawing/2010/main" val="0"/>
+              </a:ext>
+            </a:extLst>
+          </a:blip>
+          <a:srcRect/>
+          <a:stretch>
+            <a:fillRect/>
+          </a:stretch>
+        </p:blipFill>
+        <p:spPr bwMode="auto">
+          <a:xfrm>
+            <a:off x="5717413" y="580221"/>
+            <a:ext cx="4953635" cy="2972401"/>
+          </a:xfrm>
+          <a:prstGeom prst="rect">
+            <a:avLst/>
+          </a:prstGeom>
+          <a:noFill/>
+          <a:ln>
+            <a:noFill/>
+          </a:ln>
+        </p:spPr>
+      </p:pic>
+      <p:pic>
+        <p:nvPicPr>
+          <p:cNvPr id="9" name="Picture 8">
+            <a:extLst>
+              <a:ext uri="{FF2B5EF4-FFF2-40B4-BE49-F238E27FC236}">
+                <a16:creationId xmlns:a16="http://schemas.microsoft.com/office/drawing/2014/main" id="{DD764C52-0BA7-483B-98E8-F474046104E4}"/>
+              </a:ext>
+            </a:extLst>
+          </p:cNvPr>
+          <p:cNvPicPr>
+            <a:picLocks noChangeAspect="1"/>
+          </p:cNvPicPr>
+          <p:nvPr/>
+        </p:nvPicPr>
+        <p:blipFill>
+          <a:blip r:embed="rId6" cstate="print">
+            <a:extLst>
+              <a:ext uri="{28A0092B-C50C-407E-A947-70E740481C1C}">
+                <a14:useLocalDpi xmlns:a14="http://schemas.microsoft.com/office/drawing/2010/main" val="0"/>
+              </a:ext>
+            </a:extLst>
+          </a:blip>
+          <a:srcRect/>
+          <a:stretch>
+            <a:fillRect/>
+          </a:stretch>
+        </p:blipFill>
+        <p:spPr bwMode="auto">
+          <a:xfrm>
+            <a:off x="6267958" y="3952113"/>
+            <a:ext cx="4073906" cy="2533771"/>
+          </a:xfrm>
+          <a:prstGeom prst="rect">
+            <a:avLst/>
+          </a:prstGeom>
+          <a:noFill/>
+          <a:ln>
+            <a:noFill/>
+          </a:ln>
+        </p:spPr>
+      </p:pic>
+      <p:sp>
+        <p:nvSpPr>
+          <p:cNvPr id="11" name="TextBox 10">
+            <a:extLst>
+              <a:ext uri="{FF2B5EF4-FFF2-40B4-BE49-F238E27FC236}">
+                <a16:creationId xmlns:a16="http://schemas.microsoft.com/office/drawing/2014/main" id="{DC657E9A-5872-8E74-6D0F-F16ECBEDCA89}"/>
+              </a:ext>
+            </a:extLst>
+          </p:cNvPr>
+          <p:cNvSpPr txBox="1"/>
+          <p:nvPr/>
+        </p:nvSpPr>
+        <p:spPr>
+          <a:xfrm>
+            <a:off x="754465" y="4659477"/>
+            <a:ext cx="9285648" cy="369332"/>
+          </a:xfrm>
+          <a:prstGeom prst="rect">
+            <a:avLst/>
+          </a:prstGeom>
+          <a:noFill/>
+        </p:spPr>
+        <p:txBody>
+          <a:bodyPr wrap="square">
+            <a:spAutoFit/>
+          </a:bodyPr>
+          <a:lstStyle/>
+          <a:p>
+            <a:r>
+              <a:rPr lang="en-AU" b="1" dirty="0"/>
+              <a:t>Change in real tax rates by capital gain</a:t>
+            </a:r>
+          </a:p>
+        </p:txBody>
+      </p:sp>
+    </p:spTree>
+    <p:extLst>
+      <p:ext uri="{BB962C8B-B14F-4D97-AF65-F5344CB8AC3E}">
+        <p14:creationId xmlns:p14="http://schemas.microsoft.com/office/powerpoint/2010/main" val="2045914817"/>
+      </p:ext>
+    </p:extLst>
+  </p:cSld>
+  <p:clrMapOvr>
+    <a:masterClrMapping/>
+  </p:clrMapOvr>
+</p:sld>
+</file>
+
+<file path=ppt/slides/slide15.xml><?xml version="1.0" encoding="utf-8"?>
+<p:sld xmlns:a="http://schemas.openxmlformats.org/drawingml/2006/main" xmlns:r="http://schemas.openxmlformats.org/officeDocument/2006/relationships" xmlns:p="http://schemas.openxmlformats.org/presentationml/2006/main">
+  <p:cSld>
+    <p:spTree>
+      <p:nvGrpSpPr>
+        <p:cNvPr id="1" name="">
+          <a:extLst>
+            <a:ext uri="{FF2B5EF4-FFF2-40B4-BE49-F238E27FC236}">
+              <a16:creationId xmlns:a16="http://schemas.microsoft.com/office/drawing/2014/main" id="{28D900CE-7509-F92D-D61C-354AACCF1F20}"/>
+            </a:ext>
+          </a:extLst>
+        </p:cNvPr>
+        <p:cNvGrpSpPr/>
+        <p:nvPr/>
+      </p:nvGrpSpPr>
+      <p:grpSpPr>
+        <a:xfrm>
+          <a:off x="0" y="0"/>
+          <a:ext cx="0" cy="0"/>
+          <a:chOff x="0" y="0"/>
+          <a:chExt cx="0" cy="0"/>
+        </a:xfrm>
+      </p:grpSpPr>
+      <p:graphicFrame>
+        <p:nvGraphicFramePr>
+          <p:cNvPr id="6" name="Object 5" hidden="1">
+            <a:extLst>
+              <a:ext uri="{FF2B5EF4-FFF2-40B4-BE49-F238E27FC236}">
+                <a16:creationId xmlns:a16="http://schemas.microsoft.com/office/drawing/2014/main" id="{0D270039-2CC0-26EE-5469-0238F507F770}"/>
+              </a:ext>
+            </a:extLst>
+          </p:cNvPr>
+          <p:cNvGraphicFramePr>
+            <a:graphicFrameLocks noChangeAspect="1"/>
+          </p:cNvGraphicFramePr>
+          <p:nvPr>
+            <p:custDataLst>
+              <p:tags r:id="rId1"/>
+            </p:custDataLst>
+          </p:nvPr>
+        </p:nvGraphicFramePr>
+        <p:xfrm>
+          <a:off x="1588" y="1589"/>
+          <a:ext cx="1588" cy="1588"/>
+        </p:xfrm>
+        <a:graphic>
+          <a:graphicData uri="http://schemas.openxmlformats.org/presentationml/2006/ole">
+            <mc:AlternateContent xmlns:mc="http://schemas.openxmlformats.org/markup-compatibility/2006">
+              <mc:Choice xmlns:v="urn:schemas-microsoft-com:vml" Requires="v">
+                <p:oleObj name="think-cell Slide" r:id="rId3" imgW="395" imgH="394" progId="TCLayout.ActiveDocument.1">
+                  <p:embed/>
+                </p:oleObj>
+              </mc:Choice>
+              <mc:Fallback>
+                <p:oleObj name="think-cell Slide" r:id="rId3" imgW="395" imgH="394" progId="TCLayout.ActiveDocument.1">
+                  <p:embed/>
+                  <p:pic>
+                    <p:nvPicPr>
+                      <p:cNvPr id="6" name="Object 5" hidden="1">
+                        <a:extLst>
+                          <a:ext uri="{FF2B5EF4-FFF2-40B4-BE49-F238E27FC236}">
+                            <a16:creationId xmlns:a16="http://schemas.microsoft.com/office/drawing/2014/main" id="{DF9AE53F-513F-C2C9-7961-DF5BE89264CD}"/>
+                          </a:ext>
+                        </a:extLst>
+                      </p:cNvPr>
+                      <p:cNvPicPr/>
+                      <p:nvPr/>
+                    </p:nvPicPr>
+                    <p:blipFill>
+                      <a:blip r:embed="rId4"/>
+                      <a:stretch>
+                        <a:fillRect/>
+                      </a:stretch>
+                    </p:blipFill>
+                    <p:spPr>
+                      <a:xfrm>
+                        <a:off x="1588" y="1589"/>
+                        <a:ext cx="1588" cy="1588"/>
+                      </a:xfrm>
+                      <a:prstGeom prst="rect">
+                        <a:avLst/>
+                      </a:prstGeom>
+                    </p:spPr>
+                  </p:pic>
+                </p:oleObj>
+              </mc:Fallback>
+            </mc:AlternateContent>
+          </a:graphicData>
+        </a:graphic>
+      </p:graphicFrame>
+      <p:sp>
+        <p:nvSpPr>
+          <p:cNvPr id="4" name="Slide Number Placeholder 3">
+            <a:extLst>
+              <a:ext uri="{FF2B5EF4-FFF2-40B4-BE49-F238E27FC236}">
+                <a16:creationId xmlns:a16="http://schemas.microsoft.com/office/drawing/2014/main" id="{FE4F3F0B-7912-A4A1-E3A7-824184CC61EF}"/>
+              </a:ext>
+            </a:extLst>
+          </p:cNvPr>
+          <p:cNvSpPr>
+            <a:spLocks noGrp="1"/>
+          </p:cNvSpPr>
+          <p:nvPr>
+            <p:ph type="sldNum" sz="quarter" idx="10"/>
+          </p:nvPr>
+        </p:nvSpPr>
+        <p:spPr/>
+        <p:txBody>
+          <a:bodyPr/>
+          <a:lstStyle/>
+          <a:p>
+            <a:fld id="{4F9AC08D-23A9-440E-BCB9-AA1E9877CC38}" type="slidenum">
+              <a:rPr lang="en-US" smtClean="0"/>
+              <a:pPr/>
+              <a:t>15</a:t>
+            </a:fld>
+            <a:endParaRPr lang="en-US"/>
+          </a:p>
+        </p:txBody>
+      </p:sp>
+      <p:sp>
+        <p:nvSpPr>
+          <p:cNvPr id="2" name="Title 1">
+            <a:extLst>
+              <a:ext uri="{FF2B5EF4-FFF2-40B4-BE49-F238E27FC236}">
+                <a16:creationId xmlns:a16="http://schemas.microsoft.com/office/drawing/2014/main" id="{C4DA710D-A976-4276-57FD-6B6384FF1997}"/>
+              </a:ext>
+            </a:extLst>
+          </p:cNvPr>
+          <p:cNvSpPr>
+            <a:spLocks noGrp="1"/>
+          </p:cNvSpPr>
+          <p:nvPr>
+            <p:ph type="title"/>
+          </p:nvPr>
+        </p:nvSpPr>
+        <p:spPr/>
+        <p:txBody>
+          <a:bodyPr/>
+          <a:lstStyle/>
+          <a:p>
+            <a:r>
+              <a:rPr lang="en-US" dirty="0"/>
+              <a:t>Additional plots</a:t>
+            </a:r>
+          </a:p>
+        </p:txBody>
+      </p:sp>
+      <p:sp>
+        <p:nvSpPr>
+          <p:cNvPr id="13" name="TextBox 12">
+            <a:extLst>
+              <a:ext uri="{FF2B5EF4-FFF2-40B4-BE49-F238E27FC236}">
+                <a16:creationId xmlns:a16="http://schemas.microsoft.com/office/drawing/2014/main" id="{EC27A0E8-1E31-24B0-CBBA-A10240980397}"/>
+              </a:ext>
+            </a:extLst>
+          </p:cNvPr>
+          <p:cNvSpPr txBox="1"/>
+          <p:nvPr/>
+        </p:nvSpPr>
+        <p:spPr>
+          <a:xfrm>
+            <a:off x="754465" y="1974189"/>
+            <a:ext cx="9285648" cy="369332"/>
+          </a:xfrm>
+          <a:prstGeom prst="rect">
+            <a:avLst/>
+          </a:prstGeom>
+          <a:noFill/>
+        </p:spPr>
+        <p:txBody>
+          <a:bodyPr wrap="square">
+            <a:spAutoFit/>
+          </a:bodyPr>
+          <a:lstStyle/>
+          <a:p>
+            <a:r>
+              <a:rPr lang="en-AU" b="1" dirty="0"/>
+              <a:t>Progressivity and risk</a:t>
+            </a:r>
+          </a:p>
+        </p:txBody>
+      </p:sp>
+      <p:sp>
+        <p:nvSpPr>
+          <p:cNvPr id="11" name="TextBox 10">
+            <a:extLst>
+              <a:ext uri="{FF2B5EF4-FFF2-40B4-BE49-F238E27FC236}">
+                <a16:creationId xmlns:a16="http://schemas.microsoft.com/office/drawing/2014/main" id="{90B2FCB7-C070-0099-D56C-D0AC9159459C}"/>
+              </a:ext>
+            </a:extLst>
+          </p:cNvPr>
+          <p:cNvSpPr txBox="1"/>
+          <p:nvPr/>
+        </p:nvSpPr>
+        <p:spPr>
+          <a:xfrm>
+            <a:off x="754465" y="4659477"/>
+            <a:ext cx="9285648" cy="369332"/>
+          </a:xfrm>
+          <a:prstGeom prst="rect">
+            <a:avLst/>
+          </a:prstGeom>
+          <a:noFill/>
+        </p:spPr>
+        <p:txBody>
+          <a:bodyPr wrap="square">
+            <a:spAutoFit/>
+          </a:bodyPr>
+          <a:lstStyle/>
+          <a:p>
+            <a:r>
+              <a:rPr lang="en-AU" b="1" dirty="0"/>
+              <a:t>Income averaging and risk</a:t>
+            </a:r>
+          </a:p>
+        </p:txBody>
+      </p:sp>
+      <p:pic>
+        <p:nvPicPr>
+          <p:cNvPr id="5" name="Picture 4">
+            <a:extLst>
+              <a:ext uri="{FF2B5EF4-FFF2-40B4-BE49-F238E27FC236}">
+                <a16:creationId xmlns:a16="http://schemas.microsoft.com/office/drawing/2014/main" id="{A243AEDE-76E5-4E71-BCA6-909709CECCFD}"/>
+              </a:ext>
+            </a:extLst>
+          </p:cNvPr>
+          <p:cNvPicPr>
+            <a:picLocks noChangeAspect="1"/>
+          </p:cNvPicPr>
+          <p:nvPr/>
+        </p:nvPicPr>
+        <p:blipFill>
+          <a:blip r:embed="rId5" cstate="print">
+            <a:extLst>
+              <a:ext uri="{28A0092B-C50C-407E-A947-70E740481C1C}">
+                <a14:useLocalDpi xmlns:a14="http://schemas.microsoft.com/office/drawing/2010/main" val="0"/>
+              </a:ext>
+            </a:extLst>
+          </a:blip>
+          <a:srcRect/>
+          <a:stretch>
+            <a:fillRect/>
+          </a:stretch>
+        </p:blipFill>
+        <p:spPr bwMode="auto">
+          <a:xfrm>
+            <a:off x="6298487" y="221070"/>
+            <a:ext cx="4796535" cy="3052292"/>
+          </a:xfrm>
+          <a:prstGeom prst="rect">
+            <a:avLst/>
+          </a:prstGeom>
+          <a:noFill/>
+          <a:ln>
+            <a:noFill/>
+          </a:ln>
+        </p:spPr>
+      </p:pic>
+      <p:pic>
+        <p:nvPicPr>
+          <p:cNvPr id="7" name="Picture 6">
+            <a:extLst>
+              <a:ext uri="{FF2B5EF4-FFF2-40B4-BE49-F238E27FC236}">
+                <a16:creationId xmlns:a16="http://schemas.microsoft.com/office/drawing/2014/main" id="{36FBF8D0-C8BB-41DF-9686-521C264EF104}"/>
+              </a:ext>
+            </a:extLst>
+          </p:cNvPr>
+          <p:cNvPicPr>
+            <a:picLocks noChangeAspect="1"/>
+          </p:cNvPicPr>
+          <p:nvPr/>
+        </p:nvPicPr>
+        <p:blipFill>
+          <a:blip r:embed="rId6" cstate="print">
+            <a:extLst>
+              <a:ext uri="{28A0092B-C50C-407E-A947-70E740481C1C}">
+                <a14:useLocalDpi xmlns:a14="http://schemas.microsoft.com/office/drawing/2010/main" val="0"/>
+              </a:ext>
+            </a:extLst>
+          </a:blip>
+          <a:srcRect/>
+          <a:stretch>
+            <a:fillRect/>
+          </a:stretch>
+        </p:blipFill>
+        <p:spPr bwMode="auto">
+          <a:xfrm>
+            <a:off x="6298487" y="3513794"/>
+            <a:ext cx="4994913" cy="3123136"/>
+          </a:xfrm>
+          <a:prstGeom prst="rect">
+            <a:avLst/>
+          </a:prstGeom>
+          <a:noFill/>
+          <a:ln>
+            <a:noFill/>
+          </a:ln>
+        </p:spPr>
+      </p:pic>
+    </p:spTree>
+    <p:extLst>
+      <p:ext uri="{BB962C8B-B14F-4D97-AF65-F5344CB8AC3E}">
+        <p14:creationId xmlns:p14="http://schemas.microsoft.com/office/powerpoint/2010/main" val="3257083263"/>
+      </p:ext>
+    </p:extLst>
+  </p:cSld>
+  <p:clrMapOvr>
+    <a:masterClrMapping/>
+  </p:clrMapOvr>
+</p:sld>
+</file>
+
+<file path=ppt/slides/slide16.xml><?xml version="1.0" encoding="utf-8"?>
+<p:sld xmlns:a="http://schemas.openxmlformats.org/drawingml/2006/main" xmlns:r="http://schemas.openxmlformats.org/officeDocument/2006/relationships" xmlns:p="http://schemas.openxmlformats.org/presentationml/2006/main">
+  <p:cSld>
+    <p:spTree>
+      <p:nvGrpSpPr>
+        <p:cNvPr id="1" name="">
+          <a:extLst>
+            <a:ext uri="{FF2B5EF4-FFF2-40B4-BE49-F238E27FC236}">
+              <a16:creationId xmlns:a16="http://schemas.microsoft.com/office/drawing/2014/main" id="{F29427CB-AD14-2EE2-46BB-0404551F5246}"/>
+            </a:ext>
+          </a:extLst>
+        </p:cNvPr>
+        <p:cNvGrpSpPr/>
+        <p:nvPr/>
+      </p:nvGrpSpPr>
+      <p:grpSpPr>
+        <a:xfrm>
+          <a:off x="0" y="0"/>
+          <a:ext cx="0" cy="0"/>
+          <a:chOff x="0" y="0"/>
+          <a:chExt cx="0" cy="0"/>
+        </a:xfrm>
+      </p:grpSpPr>
+      <p:graphicFrame>
+        <p:nvGraphicFramePr>
+          <p:cNvPr id="6" name="Object 5" hidden="1">
+            <a:extLst>
+              <a:ext uri="{FF2B5EF4-FFF2-40B4-BE49-F238E27FC236}">
+                <a16:creationId xmlns:a16="http://schemas.microsoft.com/office/drawing/2014/main" id="{634B542C-D9DD-FA62-C066-1B31686C6E6D}"/>
+              </a:ext>
+            </a:extLst>
+          </p:cNvPr>
+          <p:cNvGraphicFramePr>
+            <a:graphicFrameLocks noChangeAspect="1"/>
+          </p:cNvGraphicFramePr>
+          <p:nvPr>
+            <p:custDataLst>
+              <p:tags r:id="rId1"/>
+            </p:custDataLst>
+          </p:nvPr>
+        </p:nvGraphicFramePr>
+        <p:xfrm>
+          <a:off x="1588" y="1589"/>
+          <a:ext cx="1588" cy="1588"/>
+        </p:xfrm>
+        <a:graphic>
+          <a:graphicData uri="http://schemas.openxmlformats.org/presentationml/2006/ole">
+            <mc:AlternateContent xmlns:mc="http://schemas.openxmlformats.org/markup-compatibility/2006">
+              <mc:Choice xmlns:v="urn:schemas-microsoft-com:vml" Requires="v">
+                <p:oleObj name="think-cell Slide" r:id="rId3" imgW="395" imgH="394" progId="TCLayout.ActiveDocument.1">
+                  <p:embed/>
+                </p:oleObj>
+              </mc:Choice>
+              <mc:Fallback>
+                <p:oleObj name="think-cell Slide" r:id="rId3" imgW="395" imgH="394" progId="TCLayout.ActiveDocument.1">
+                  <p:embed/>
+                  <p:pic>
+                    <p:nvPicPr>
+                      <p:cNvPr id="6" name="Object 5" hidden="1">
+                        <a:extLst>
+                          <a:ext uri="{FF2B5EF4-FFF2-40B4-BE49-F238E27FC236}">
+                            <a16:creationId xmlns:a16="http://schemas.microsoft.com/office/drawing/2014/main" id="{0D270039-2CC0-26EE-5469-0238F507F770}"/>
+                          </a:ext>
+                        </a:extLst>
+                      </p:cNvPr>
+                      <p:cNvPicPr/>
+                      <p:nvPr/>
+                    </p:nvPicPr>
+                    <p:blipFill>
+                      <a:blip r:embed="rId4"/>
+                      <a:stretch>
+                        <a:fillRect/>
+                      </a:stretch>
+                    </p:blipFill>
+                    <p:spPr>
+                      <a:xfrm>
+                        <a:off x="1588" y="1589"/>
+                        <a:ext cx="1588" cy="1588"/>
+                      </a:xfrm>
+                      <a:prstGeom prst="rect">
+                        <a:avLst/>
+                      </a:prstGeom>
+                    </p:spPr>
+                  </p:pic>
+                </p:oleObj>
+              </mc:Fallback>
+            </mc:AlternateContent>
+          </a:graphicData>
+        </a:graphic>
+      </p:graphicFrame>
+      <p:sp>
+        <p:nvSpPr>
+          <p:cNvPr id="4" name="Slide Number Placeholder 3">
+            <a:extLst>
+              <a:ext uri="{FF2B5EF4-FFF2-40B4-BE49-F238E27FC236}">
+                <a16:creationId xmlns:a16="http://schemas.microsoft.com/office/drawing/2014/main" id="{B991CA0F-A399-2DF1-4D26-2C074407B30E}"/>
+              </a:ext>
+            </a:extLst>
+          </p:cNvPr>
+          <p:cNvSpPr>
+            <a:spLocks noGrp="1"/>
+          </p:cNvSpPr>
+          <p:nvPr>
+            <p:ph type="sldNum" sz="quarter" idx="10"/>
+          </p:nvPr>
+        </p:nvSpPr>
+        <p:spPr/>
+        <p:txBody>
+          <a:bodyPr/>
+          <a:lstStyle/>
+          <a:p>
+            <a:fld id="{4F9AC08D-23A9-440E-BCB9-AA1E9877CC38}" type="slidenum">
+              <a:rPr lang="en-US" smtClean="0"/>
+              <a:pPr/>
+              <a:t>16</a:t>
+            </a:fld>
+            <a:endParaRPr lang="en-US"/>
+          </a:p>
+        </p:txBody>
+      </p:sp>
+      <p:sp>
+        <p:nvSpPr>
+          <p:cNvPr id="2" name="Title 1">
+            <a:extLst>
+              <a:ext uri="{FF2B5EF4-FFF2-40B4-BE49-F238E27FC236}">
+                <a16:creationId xmlns:a16="http://schemas.microsoft.com/office/drawing/2014/main" id="{7624BD16-F054-D42A-E33E-B1A3DFC4548E}"/>
+              </a:ext>
+            </a:extLst>
+          </p:cNvPr>
+          <p:cNvSpPr>
+            <a:spLocks noGrp="1"/>
+          </p:cNvSpPr>
+          <p:nvPr>
+            <p:ph type="title"/>
+          </p:nvPr>
+        </p:nvSpPr>
+        <p:spPr/>
+        <p:txBody>
+          <a:bodyPr/>
+          <a:lstStyle/>
+          <a:p>
+            <a:r>
+              <a:rPr lang="en-US" dirty="0"/>
+              <a:t>Additional plots</a:t>
+            </a:r>
+          </a:p>
+        </p:txBody>
+      </p:sp>
+      <p:sp>
+        <p:nvSpPr>
+          <p:cNvPr id="13" name="TextBox 12">
+            <a:extLst>
+              <a:ext uri="{FF2B5EF4-FFF2-40B4-BE49-F238E27FC236}">
+                <a16:creationId xmlns:a16="http://schemas.microsoft.com/office/drawing/2014/main" id="{01CBB123-2AEE-B314-44EF-DDECB6A5056E}"/>
+              </a:ext>
+            </a:extLst>
+          </p:cNvPr>
+          <p:cNvSpPr txBox="1"/>
+          <p:nvPr/>
+        </p:nvSpPr>
+        <p:spPr>
+          <a:xfrm>
+            <a:off x="754465" y="1974189"/>
+            <a:ext cx="9285648" cy="369332"/>
+          </a:xfrm>
+          <a:prstGeom prst="rect">
+            <a:avLst/>
+          </a:prstGeom>
+          <a:noFill/>
+        </p:spPr>
+        <p:txBody>
+          <a:bodyPr wrap="square">
+            <a:spAutoFit/>
+          </a:bodyPr>
+          <a:lstStyle/>
+          <a:p>
+            <a:r>
+              <a:rPr lang="en-AU" b="1" dirty="0"/>
+              <a:t>Housing </a:t>
+            </a:r>
+            <a:r>
+              <a:rPr lang="en-AU" b="1" dirty="0">
+                <a:hlinkClick r:id="rId5"/>
+              </a:rPr>
+              <a:t>median tax rates</a:t>
+            </a:r>
+            <a:endParaRPr lang="en-AU" b="1" dirty="0"/>
+          </a:p>
+        </p:txBody>
+      </p:sp>
+      <p:sp>
+        <p:nvSpPr>
+          <p:cNvPr id="11" name="TextBox 10">
+            <a:extLst>
+              <a:ext uri="{FF2B5EF4-FFF2-40B4-BE49-F238E27FC236}">
+                <a16:creationId xmlns:a16="http://schemas.microsoft.com/office/drawing/2014/main" id="{232D910E-4B43-ACFE-B910-EF53018442BB}"/>
+              </a:ext>
+            </a:extLst>
+          </p:cNvPr>
+          <p:cNvSpPr txBox="1"/>
+          <p:nvPr/>
+        </p:nvSpPr>
+        <p:spPr>
+          <a:xfrm>
+            <a:off x="754465" y="4659477"/>
+            <a:ext cx="9285648" cy="369332"/>
+          </a:xfrm>
+          <a:prstGeom prst="rect">
+            <a:avLst/>
+          </a:prstGeom>
+          <a:noFill/>
+        </p:spPr>
+        <p:txBody>
+          <a:bodyPr wrap="square">
+            <a:spAutoFit/>
+          </a:bodyPr>
+          <a:lstStyle/>
+          <a:p>
+            <a:r>
+              <a:rPr lang="en-AU" b="1" dirty="0"/>
+              <a:t>Housing CGT revenue estimates</a:t>
+            </a:r>
+          </a:p>
+        </p:txBody>
+      </p:sp>
+      <p:pic>
+        <p:nvPicPr>
+          <p:cNvPr id="8" name="Picture 7">
+            <a:extLst>
+              <a:ext uri="{FF2B5EF4-FFF2-40B4-BE49-F238E27FC236}">
+                <a16:creationId xmlns:a16="http://schemas.microsoft.com/office/drawing/2014/main" id="{71088DD6-EAA3-FE3A-2C4A-8A0FC5F35DF1}"/>
+              </a:ext>
+            </a:extLst>
+          </p:cNvPr>
+          <p:cNvPicPr>
+            <a:picLocks noChangeAspect="1"/>
+          </p:cNvPicPr>
+          <p:nvPr/>
+        </p:nvPicPr>
+        <p:blipFill>
+          <a:blip r:embed="rId6"/>
+          <a:stretch>
+            <a:fillRect/>
+          </a:stretch>
+        </p:blipFill>
+        <p:spPr>
+          <a:xfrm>
+            <a:off x="5926789" y="3466234"/>
+            <a:ext cx="4868437" cy="3170696"/>
+          </a:xfrm>
+          <a:prstGeom prst="rect">
+            <a:avLst/>
+          </a:prstGeom>
+        </p:spPr>
+      </p:pic>
+      <p:pic>
+        <p:nvPicPr>
+          <p:cNvPr id="10" name="Picture 9">
+            <a:extLst>
+              <a:ext uri="{FF2B5EF4-FFF2-40B4-BE49-F238E27FC236}">
+                <a16:creationId xmlns:a16="http://schemas.microsoft.com/office/drawing/2014/main" id="{61DCFC6B-0327-5C6B-CA04-730053B20929}"/>
+              </a:ext>
+            </a:extLst>
+          </p:cNvPr>
+          <p:cNvPicPr>
+            <a:picLocks noChangeAspect="1"/>
+          </p:cNvPicPr>
+          <p:nvPr/>
+        </p:nvPicPr>
+        <p:blipFill>
+          <a:blip r:embed="rId7"/>
+          <a:stretch>
+            <a:fillRect/>
+          </a:stretch>
+        </p:blipFill>
+        <p:spPr>
+          <a:xfrm>
+            <a:off x="6204861" y="221070"/>
+            <a:ext cx="3165160" cy="3095941"/>
+          </a:xfrm>
+          <a:prstGeom prst="rect">
+            <a:avLst/>
+          </a:prstGeom>
+        </p:spPr>
+      </p:pic>
+    </p:spTree>
+    <p:extLst>
+      <p:ext uri="{BB962C8B-B14F-4D97-AF65-F5344CB8AC3E}">
+        <p14:creationId xmlns:p14="http://schemas.microsoft.com/office/powerpoint/2010/main" val="155906893"/>
+      </p:ext>
+    </p:extLst>
+  </p:cSld>
+  <p:clrMapOvr>
+    <a:masterClrMapping/>
+  </p:clrMapOvr>
+</p:sld>
+</file>
+
+<file path=ppt/slides/slide17.xml><?xml version="1.0" encoding="utf-8"?>
+<p:sld xmlns:a="http://schemas.openxmlformats.org/drawingml/2006/main" xmlns:r="http://schemas.openxmlformats.org/officeDocument/2006/relationships" xmlns:p="http://schemas.openxmlformats.org/presentationml/2006/main">
+  <p:cSld>
+    <p:spTree>
+      <p:nvGrpSpPr>
+        <p:cNvPr id="1" name="">
+          <a:extLst>
+            <a:ext uri="{FF2B5EF4-FFF2-40B4-BE49-F238E27FC236}">
+              <a16:creationId xmlns:a16="http://schemas.microsoft.com/office/drawing/2014/main" id="{FD1979C5-E00D-E1B5-BF85-B2A24BD82DC3}"/>
+            </a:ext>
+          </a:extLst>
+        </p:cNvPr>
+        <p:cNvGrpSpPr/>
+        <p:nvPr/>
+      </p:nvGrpSpPr>
+      <p:grpSpPr>
+        <a:xfrm>
+          <a:off x="0" y="0"/>
+          <a:ext cx="0" cy="0"/>
+          <a:chOff x="0" y="0"/>
+          <a:chExt cx="0" cy="0"/>
+        </a:xfrm>
+      </p:grpSpPr>
+      <p:graphicFrame>
+        <p:nvGraphicFramePr>
+          <p:cNvPr id="6" name="Object 5" hidden="1">
+            <a:extLst>
+              <a:ext uri="{FF2B5EF4-FFF2-40B4-BE49-F238E27FC236}">
+                <a16:creationId xmlns:a16="http://schemas.microsoft.com/office/drawing/2014/main" id="{70592FBE-007B-89AF-2F2C-172F9B54E1DE}"/>
+              </a:ext>
+            </a:extLst>
+          </p:cNvPr>
+          <p:cNvGraphicFramePr>
+            <a:graphicFrameLocks noChangeAspect="1"/>
+          </p:cNvGraphicFramePr>
+          <p:nvPr>
+            <p:custDataLst>
+              <p:tags r:id="rId1"/>
+            </p:custDataLst>
+          </p:nvPr>
+        </p:nvGraphicFramePr>
+        <p:xfrm>
+          <a:off x="1588" y="1589"/>
+          <a:ext cx="1588" cy="1588"/>
+        </p:xfrm>
+        <a:graphic>
+          <a:graphicData uri="http://schemas.openxmlformats.org/presentationml/2006/ole">
+            <mc:AlternateContent xmlns:mc="http://schemas.openxmlformats.org/markup-compatibility/2006">
+              <mc:Choice xmlns:v="urn:schemas-microsoft-com:vml" Requires="v">
+                <p:oleObj name="think-cell Slide" r:id="rId3" imgW="395" imgH="394" progId="TCLayout.ActiveDocument.1">
+                  <p:embed/>
+                </p:oleObj>
+              </mc:Choice>
+              <mc:Fallback>
+                <p:oleObj name="think-cell Slide" r:id="rId3" imgW="395" imgH="394" progId="TCLayout.ActiveDocument.1">
+                  <p:embed/>
+                  <p:pic>
+                    <p:nvPicPr>
+                      <p:cNvPr id="6" name="Object 5" hidden="1">
+                        <a:extLst>
+                          <a:ext uri="{FF2B5EF4-FFF2-40B4-BE49-F238E27FC236}">
+                            <a16:creationId xmlns:a16="http://schemas.microsoft.com/office/drawing/2014/main" id="{0D270039-2CC0-26EE-5469-0238F507F770}"/>
+                          </a:ext>
+                        </a:extLst>
+                      </p:cNvPr>
+                      <p:cNvPicPr/>
+                      <p:nvPr/>
+                    </p:nvPicPr>
+                    <p:blipFill>
+                      <a:blip r:embed="rId4"/>
+                      <a:stretch>
+                        <a:fillRect/>
+                      </a:stretch>
+                    </p:blipFill>
+                    <p:spPr>
+                      <a:xfrm>
+                        <a:off x="1588" y="1589"/>
+                        <a:ext cx="1588" cy="1588"/>
+                      </a:xfrm>
+                      <a:prstGeom prst="rect">
+                        <a:avLst/>
+                      </a:prstGeom>
+                    </p:spPr>
+                  </p:pic>
+                </p:oleObj>
+              </mc:Fallback>
+            </mc:AlternateContent>
+          </a:graphicData>
+        </a:graphic>
+      </p:graphicFrame>
+      <p:sp>
+        <p:nvSpPr>
+          <p:cNvPr id="4" name="Slide Number Placeholder 3">
+            <a:extLst>
+              <a:ext uri="{FF2B5EF4-FFF2-40B4-BE49-F238E27FC236}">
+                <a16:creationId xmlns:a16="http://schemas.microsoft.com/office/drawing/2014/main" id="{F1205B3C-049D-2150-B57B-2C4745AD3294}"/>
+              </a:ext>
+            </a:extLst>
+          </p:cNvPr>
+          <p:cNvSpPr>
+            <a:spLocks noGrp="1"/>
+          </p:cNvSpPr>
+          <p:nvPr>
+            <p:ph type="sldNum" sz="quarter" idx="10"/>
+          </p:nvPr>
+        </p:nvSpPr>
+        <p:spPr/>
+        <p:txBody>
+          <a:bodyPr/>
+          <a:lstStyle/>
+          <a:p>
+            <a:fld id="{4F9AC08D-23A9-440E-BCB9-AA1E9877CC38}" type="slidenum">
+              <a:rPr lang="en-US" smtClean="0"/>
+              <a:pPr/>
+              <a:t>17</a:t>
+            </a:fld>
+            <a:endParaRPr lang="en-US"/>
+          </a:p>
+        </p:txBody>
+      </p:sp>
+      <p:sp>
+        <p:nvSpPr>
+          <p:cNvPr id="2" name="Title 1">
+            <a:extLst>
+              <a:ext uri="{FF2B5EF4-FFF2-40B4-BE49-F238E27FC236}">
+                <a16:creationId xmlns:a16="http://schemas.microsoft.com/office/drawing/2014/main" id="{DD9B871C-DB8D-A2F9-5DCB-B2DCAF199F4B}"/>
+              </a:ext>
+            </a:extLst>
+          </p:cNvPr>
+          <p:cNvSpPr>
+            <a:spLocks noGrp="1"/>
+          </p:cNvSpPr>
+          <p:nvPr>
+            <p:ph type="title"/>
+          </p:nvPr>
+        </p:nvSpPr>
+        <p:spPr/>
+        <p:txBody>
+          <a:bodyPr/>
+          <a:lstStyle/>
+          <a:p>
+            <a:r>
+              <a:rPr lang="en-US" dirty="0"/>
+              <a:t>Additional plots</a:t>
+            </a:r>
+          </a:p>
+        </p:txBody>
+      </p:sp>
+      <p:sp>
+        <p:nvSpPr>
+          <p:cNvPr id="13" name="TextBox 12">
+            <a:extLst>
+              <a:ext uri="{FF2B5EF4-FFF2-40B4-BE49-F238E27FC236}">
+                <a16:creationId xmlns:a16="http://schemas.microsoft.com/office/drawing/2014/main" id="{B8CAFC64-C9A9-AB4E-B922-5DF401DF6BD4}"/>
+              </a:ext>
+            </a:extLst>
+          </p:cNvPr>
+          <p:cNvSpPr txBox="1"/>
+          <p:nvPr/>
+        </p:nvSpPr>
+        <p:spPr>
+          <a:xfrm>
+            <a:off x="640469" y="1235110"/>
+            <a:ext cx="9285648" cy="369332"/>
+          </a:xfrm>
+          <a:prstGeom prst="rect">
+            <a:avLst/>
+          </a:prstGeom>
+          <a:noFill/>
+        </p:spPr>
+        <p:txBody>
+          <a:bodyPr wrap="square">
+            <a:spAutoFit/>
+          </a:bodyPr>
+          <a:lstStyle/>
+          <a:p>
+            <a:r>
+              <a:rPr lang="en-AU" b="1" dirty="0"/>
+              <a:t>Breakeven international tax and “allowance” (with 2.5% inflation)</a:t>
+            </a:r>
+          </a:p>
+        </p:txBody>
+      </p:sp>
+      <p:pic>
+        <p:nvPicPr>
+          <p:cNvPr id="8" name="Picture 7">
+            <a:extLst>
+              <a:ext uri="{FF2B5EF4-FFF2-40B4-BE49-F238E27FC236}">
+                <a16:creationId xmlns:a16="http://schemas.microsoft.com/office/drawing/2014/main" id="{986BA7E3-85AE-A0DE-EB60-1D48F602543D}"/>
+              </a:ext>
+            </a:extLst>
+          </p:cNvPr>
+          <p:cNvPicPr>
+            <a:picLocks noChangeAspect="1"/>
+          </p:cNvPicPr>
+          <p:nvPr/>
+        </p:nvPicPr>
+        <p:blipFill>
+          <a:blip r:embed="rId5"/>
+          <a:stretch>
+            <a:fillRect/>
+          </a:stretch>
+        </p:blipFill>
+        <p:spPr>
+          <a:xfrm>
+            <a:off x="640469" y="1875784"/>
+            <a:ext cx="4333867" cy="4181802"/>
+          </a:xfrm>
+          <a:prstGeom prst="rect">
+            <a:avLst/>
+          </a:prstGeom>
+        </p:spPr>
+      </p:pic>
+      <p:pic>
+        <p:nvPicPr>
+          <p:cNvPr id="10" name="Picture 9">
+            <a:extLst>
+              <a:ext uri="{FF2B5EF4-FFF2-40B4-BE49-F238E27FC236}">
+                <a16:creationId xmlns:a16="http://schemas.microsoft.com/office/drawing/2014/main" id="{D1F48879-AA3F-64B5-3BB4-013FF06170EB}"/>
+              </a:ext>
+            </a:extLst>
+          </p:cNvPr>
+          <p:cNvPicPr>
+            <a:picLocks noChangeAspect="1"/>
+          </p:cNvPicPr>
+          <p:nvPr/>
+        </p:nvPicPr>
+        <p:blipFill>
+          <a:blip r:embed="rId6"/>
+          <a:stretch>
+            <a:fillRect/>
+          </a:stretch>
+        </p:blipFill>
+        <p:spPr>
+          <a:xfrm>
+            <a:off x="6456375" y="1815861"/>
+            <a:ext cx="4115541" cy="4204184"/>
+          </a:xfrm>
+          <a:prstGeom prst="rect">
+            <a:avLst/>
+          </a:prstGeom>
+        </p:spPr>
+      </p:pic>
+    </p:spTree>
+    <p:extLst>
+      <p:ext uri="{BB962C8B-B14F-4D97-AF65-F5344CB8AC3E}">
+        <p14:creationId xmlns:p14="http://schemas.microsoft.com/office/powerpoint/2010/main" val="2833927423"/>
+      </p:ext>
+    </p:extLst>
+  </p:cSld>
+  <p:clrMapOvr>
+    <a:masterClrMapping/>
+  </p:clrMapOvr>
 </p:sld>
 </file>
 
@@ -21788,8 +24144,14 @@
           <a:lstStyle/>
           <a:p>
             <a:r>
+              <a:rPr lang="en-AU" dirty="0">
+                <a:hlinkClick r:id="rId6"/>
+              </a:rPr>
+              <a:t>Tax capital like wages</a:t>
+            </a:r>
+            <a:r>
               <a:rPr lang="en-AU" dirty="0"/>
-              <a:t>Tax capital like wages? Intergenerational equity? Equity-efficiency trade-off.</a:t>
+              <a:t>? Intergenerational equity? Equity-efficiency trade-off.</a:t>
             </a:r>
           </a:p>
         </p:txBody>
@@ -21835,36 +24197,6 @@
             <a:extLst>
               <a:ext uri="{FF2B5EF4-FFF2-40B4-BE49-F238E27FC236}">
                 <a16:creationId xmlns:a16="http://schemas.microsoft.com/office/drawing/2014/main" id="{6F11C591-ABB2-82C5-528D-CA60C1415F53}"/>
-              </a:ext>
-            </a:extLst>
-          </p:cNvPr>
-          <p:cNvPicPr>
-            <a:picLocks noChangeAspect="1"/>
-          </p:cNvPicPr>
-          <p:nvPr/>
-        </p:nvPicPr>
-        <p:blipFill>
-          <a:blip r:embed="rId6"/>
-          <a:stretch>
-            <a:fillRect/>
-          </a:stretch>
-        </p:blipFill>
-        <p:spPr>
-          <a:xfrm>
-            <a:off x="6915514" y="3582722"/>
-            <a:ext cx="3231820" cy="3160530"/>
-          </a:xfrm>
-          <a:prstGeom prst="rect">
-            <a:avLst/>
-          </a:prstGeom>
-        </p:spPr>
-      </p:pic>
-      <p:pic>
-        <p:nvPicPr>
-          <p:cNvPr id="10" name="Picture 9">
-            <a:extLst>
-              <a:ext uri="{FF2B5EF4-FFF2-40B4-BE49-F238E27FC236}">
-                <a16:creationId xmlns:a16="http://schemas.microsoft.com/office/drawing/2014/main" id="{00D472B1-9D68-5A5F-A34B-6BBE6CD334CB}"/>
               </a:ext>
             </a:extLst>
           </p:cNvPr>
@@ -21875,6 +24207,36 @@
         </p:nvPicPr>
         <p:blipFill>
           <a:blip r:embed="rId7"/>
+          <a:stretch>
+            <a:fillRect/>
+          </a:stretch>
+        </p:blipFill>
+        <p:spPr>
+          <a:xfrm>
+            <a:off x="6915514" y="3582722"/>
+            <a:ext cx="3231820" cy="3160530"/>
+          </a:xfrm>
+          <a:prstGeom prst="rect">
+            <a:avLst/>
+          </a:prstGeom>
+        </p:spPr>
+      </p:pic>
+      <p:pic>
+        <p:nvPicPr>
+          <p:cNvPr id="10" name="Picture 9">
+            <a:extLst>
+              <a:ext uri="{FF2B5EF4-FFF2-40B4-BE49-F238E27FC236}">
+                <a16:creationId xmlns:a16="http://schemas.microsoft.com/office/drawing/2014/main" id="{00D472B1-9D68-5A5F-A34B-6BBE6CD334CB}"/>
+              </a:ext>
+            </a:extLst>
+          </p:cNvPr>
+          <p:cNvPicPr>
+            <a:picLocks noChangeAspect="1"/>
+          </p:cNvPicPr>
+          <p:nvPr/>
+        </p:nvPicPr>
+        <p:blipFill>
+          <a:blip r:embed="rId8"/>
           <a:stretch>
             <a:fillRect/>
           </a:stretch>
@@ -23697,7 +26059,7 @@
         </p:nvSpPr>
         <p:spPr>
           <a:xfrm>
-            <a:off x="366317" y="1225989"/>
+            <a:off x="381756" y="968986"/>
             <a:ext cx="10903190" cy="646331"/>
           </a:xfrm>
           <a:prstGeom prst="rect">
@@ -23720,7 +26082,9 @@
               <a:t>is when annual revenue for an asset in a year is less than the costs, due to </a:t>
             </a:r>
             <a:r>
-              <a:rPr lang="en-AU" u="sng" dirty="0"/>
+              <a:rPr lang="en-AU" u="sng" dirty="0">
+                <a:hlinkClick r:id="rId5"/>
+              </a:rPr>
               <a:t>borrowing expenses</a:t>
             </a:r>
             <a:r>
@@ -23744,8 +26108,8 @@
         </p:nvSpPr>
         <p:spPr>
           <a:xfrm>
-            <a:off x="366317" y="1932024"/>
-            <a:ext cx="10903190" cy="646331"/>
+            <a:off x="366317" y="1637239"/>
+            <a:ext cx="10903190" cy="1277273"/>
           </a:xfrm>
           <a:prstGeom prst="rect">
             <a:avLst/>
@@ -23778,6 +26142,43 @@
               <a:t> income. Allowing deductibility of inflation component of interest inconsistent with discount/indexation.</a:t>
             </a:r>
           </a:p>
+          <a:p>
+            <a:pPr marL="285750" indent="-285750">
+              <a:spcAft>
+                <a:spcPts val="600"/>
+              </a:spcAft>
+              <a:buFont typeface="Arial" panose="020B0604020202020204" pitchFamily="34" charset="0"/>
+              <a:buChar char="•"/>
+            </a:pPr>
+            <a:r>
+              <a:rPr lang="en-AU" dirty="0"/>
+              <a:t>Quarantining losses both </a:t>
+            </a:r>
+            <a:r>
+              <a:rPr lang="en-AU" dirty="0">
+                <a:solidFill>
+                  <a:schemeClr val="accent6"/>
+                </a:solidFill>
+              </a:rPr>
+              <a:t>punishes those with genuine losses</a:t>
+            </a:r>
+            <a:r>
+              <a:rPr lang="en-AU" dirty="0"/>
+              <a:t> (as all expenses are deferred) and </a:t>
+            </a:r>
+            <a:r>
+              <a:rPr lang="en-AU" dirty="0">
+                <a:solidFill>
+                  <a:schemeClr val="accent3"/>
+                </a:solidFill>
+              </a:rPr>
+              <a:t>over-credits those making positive annual rental income</a:t>
+            </a:r>
+            <a:r>
+              <a:rPr lang="en-AU" dirty="0"/>
+              <a:t>.</a:t>
+            </a:r>
+          </a:p>
         </p:txBody>
       </p:sp>
       <p:pic>
@@ -23795,19 +26196,60 @@
           <p:nvPr/>
         </p:nvPicPr>
         <p:blipFill>
-          <a:blip r:embed="rId5"/>
+          <a:blip r:embed="rId6"/>
           <a:stretch>
             <a:fillRect/>
           </a:stretch>
         </p:blipFill>
         <p:spPr>
           <a:xfrm>
-            <a:off x="2772635" y="2791943"/>
+            <a:off x="6558251" y="3015928"/>
             <a:ext cx="5175654" cy="3521779"/>
           </a:xfrm>
           <a:prstGeom prst="rect">
             <a:avLst/>
           </a:prstGeom>
+        </p:spPr>
+      </p:pic>
+      <p:pic>
+        <p:nvPicPr>
+          <p:cNvPr id="3" name="Picture 2">
+            <a:extLst>
+              <a:ext uri="{FF2B5EF4-FFF2-40B4-BE49-F238E27FC236}">
+                <a16:creationId xmlns:a16="http://schemas.microsoft.com/office/drawing/2014/main" id="{FC9441D8-6949-42B3-97E2-05617DFC47C3}"/>
+              </a:ext>
+            </a:extLst>
+          </p:cNvPr>
+          <p:cNvPicPr>
+            <a:picLocks noChangeAspect="1"/>
+          </p:cNvPicPr>
+          <p:nvPr/>
+        </p:nvPicPr>
+        <p:blipFill>
+          <a:blip r:embed="rId7" cstate="print">
+            <a:extLst>
+              <a:ext uri="{28A0092B-C50C-407E-A947-70E740481C1C}">
+                <a14:useLocalDpi xmlns:a14="http://schemas.microsoft.com/office/drawing/2010/main" val="0"/>
+              </a:ext>
+            </a:extLst>
+          </a:blip>
+          <a:srcRect/>
+          <a:stretch>
+            <a:fillRect/>
+          </a:stretch>
+        </p:blipFill>
+        <p:spPr bwMode="auto">
+          <a:xfrm>
+            <a:off x="458095" y="3057859"/>
+            <a:ext cx="5375256" cy="3343147"/>
+          </a:xfrm>
+          <a:prstGeom prst="rect">
+            <a:avLst/>
+          </a:prstGeom>
+          <a:noFill/>
+          <a:ln>
+            <a:noFill/>
+          </a:ln>
         </p:spPr>
       </p:pic>
     </p:spTree>
@@ -23899,6 +26341,51 @@
                                           </p:stCondLst>
                                         </p:cTn>
                                         <p:tgtEl>
+                                          <p:spTgt spid="3"/>
+                                        </p:tgtEl>
+                                        <p:attrNameLst>
+                                          <p:attrName>style.visibility</p:attrName>
+                                        </p:attrNameLst>
+                                      </p:cBhvr>
+                                      <p:to>
+                                        <p:strVal val="visible"/>
+                                      </p:to>
+                                    </p:set>
+                                  </p:childTnLst>
+                                </p:cTn>
+                              </p:par>
+                            </p:childTnLst>
+                          </p:cTn>
+                        </p:par>
+                      </p:childTnLst>
+                    </p:cTn>
+                  </p:par>
+                  <p:par>
+                    <p:cTn id="11" fill="hold">
+                      <p:stCondLst>
+                        <p:cond delay="indefinite"/>
+                      </p:stCondLst>
+                      <p:childTnLst>
+                        <p:par>
+                          <p:cTn id="12" fill="hold">
+                            <p:stCondLst>
+                              <p:cond delay="0"/>
+                            </p:stCondLst>
+                            <p:childTnLst>
+                              <p:par>
+                                <p:cTn id="13" presetID="1" presetClass="entr" presetSubtype="0" fill="hold" nodeType="clickEffect">
+                                  <p:stCondLst>
+                                    <p:cond delay="0"/>
+                                  </p:stCondLst>
+                                  <p:childTnLst>
+                                    <p:set>
+                                      <p:cBhvr>
+                                        <p:cTn id="14" dur="1" fill="hold">
+                                          <p:stCondLst>
+                                            <p:cond delay="0"/>
+                                          </p:stCondLst>
+                                        </p:cTn>
+                                        <p:tgtEl>
                                           <p:spTgt spid="8"/>
                                         </p:tgtEl>
                                         <p:attrNameLst>
@@ -24124,8 +26611,15 @@
           <a:p>
             <a:r>
               <a:rPr lang="en-AU" b="1" dirty="0"/>
-              <a:t>Horizontal inequity</a:t>
-            </a:r>
+              <a:t>Horizontal </a:t>
+            </a:r>
+            <a:r>
+              <a:rPr lang="en-AU" b="1" dirty="0">
+                <a:hlinkClick r:id="rId5"/>
+              </a:rPr>
+              <a:t>inequity</a:t>
+            </a:r>
+            <a:endParaRPr lang="en-AU" b="1" dirty="0"/>
           </a:p>
         </p:txBody>
       </p:sp>
@@ -24135,42 +26629,6 @@
             <a:extLst>
               <a:ext uri="{FF2B5EF4-FFF2-40B4-BE49-F238E27FC236}">
                 <a16:creationId xmlns:a16="http://schemas.microsoft.com/office/drawing/2014/main" id="{A4AD3668-7AF6-B38C-C0AC-E0CC5C6EDCCD}"/>
-              </a:ext>
-            </a:extLst>
-          </p:cNvPr>
-          <p:cNvPicPr>
-            <a:picLocks noChangeAspect="1"/>
-          </p:cNvPicPr>
-          <p:nvPr/>
-        </p:nvPicPr>
-        <p:blipFill>
-          <a:blip r:embed="rId5">
-            <a:extLst>
-              <a:ext uri="{28A0092B-C50C-407E-A947-70E740481C1C}">
-                <a14:useLocalDpi xmlns:a14="http://schemas.microsoft.com/office/drawing/2010/main" val="0"/>
-              </a:ext>
-            </a:extLst>
-          </a:blip>
-          <a:stretch>
-            <a:fillRect/>
-          </a:stretch>
-        </p:blipFill>
-        <p:spPr>
-          <a:xfrm>
-            <a:off x="6096000" y="1527822"/>
-            <a:ext cx="4270248" cy="5009885"/>
-          </a:xfrm>
-          <a:prstGeom prst="rect">
-            <a:avLst/>
-          </a:prstGeom>
-        </p:spPr>
-      </p:pic>
-      <p:pic>
-        <p:nvPicPr>
-          <p:cNvPr id="9" name="Picture 8">
-            <a:extLst>
-              <a:ext uri="{FF2B5EF4-FFF2-40B4-BE49-F238E27FC236}">
-                <a16:creationId xmlns:a16="http://schemas.microsoft.com/office/drawing/2014/main" id="{07631548-956F-C20E-8497-007ECEE3B4B2}"/>
               </a:ext>
             </a:extLst>
           </p:cNvPr>
@@ -24181,6 +26639,42 @@
         </p:nvPicPr>
         <p:blipFill>
           <a:blip r:embed="rId6">
+            <a:extLst>
+              <a:ext uri="{28A0092B-C50C-407E-A947-70E740481C1C}">
+                <a14:useLocalDpi xmlns:a14="http://schemas.microsoft.com/office/drawing/2010/main" val="0"/>
+              </a:ext>
+            </a:extLst>
+          </a:blip>
+          <a:stretch>
+            <a:fillRect/>
+          </a:stretch>
+        </p:blipFill>
+        <p:spPr>
+          <a:xfrm>
+            <a:off x="6096000" y="1527822"/>
+            <a:ext cx="4270248" cy="5009885"/>
+          </a:xfrm>
+          <a:prstGeom prst="rect">
+            <a:avLst/>
+          </a:prstGeom>
+        </p:spPr>
+      </p:pic>
+      <p:pic>
+        <p:nvPicPr>
+          <p:cNvPr id="9" name="Picture 8">
+            <a:extLst>
+              <a:ext uri="{FF2B5EF4-FFF2-40B4-BE49-F238E27FC236}">
+                <a16:creationId xmlns:a16="http://schemas.microsoft.com/office/drawing/2014/main" id="{07631548-956F-C20E-8497-007ECEE3B4B2}"/>
+              </a:ext>
+            </a:extLst>
+          </p:cNvPr>
+          <p:cNvPicPr>
+            <a:picLocks noChangeAspect="1"/>
+          </p:cNvPicPr>
+          <p:nvPr/>
+        </p:nvPicPr>
+        <p:blipFill>
+          <a:blip r:embed="rId7">
             <a:extLst>
               <a:ext uri="{28A0092B-C50C-407E-A947-70E740481C1C}">
                 <a14:useLocalDpi xmlns:a14="http://schemas.microsoft.com/office/drawing/2010/main" val="0"/>
@@ -24397,8 +26891,15 @@
           <a:p>
             <a:r>
               <a:rPr lang="en-AU" b="1" dirty="0"/>
-              <a:t>Incentive to borrow too much</a:t>
-            </a:r>
+              <a:t>Incentive to </a:t>
+            </a:r>
+            <a:r>
+              <a:rPr lang="en-AU" b="1" dirty="0">
+                <a:hlinkClick r:id="rId5"/>
+              </a:rPr>
+              <a:t>borrow too much</a:t>
+            </a:r>
+            <a:endParaRPr lang="en-AU" b="1" dirty="0"/>
           </a:p>
           <a:p>
             <a:endParaRPr lang="en-AU" b="1" dirty="0"/>
@@ -24480,16 +26981,23 @@
           <a:p>
             <a:r>
               <a:rPr lang="en-AU" b="1" dirty="0"/>
-              <a:t>Vertical inequity</a:t>
-            </a:r>
-          </a:p>
-          <a:p>
+              <a:t>Vertical </a:t>
+            </a:r>
+            <a:r>
+              <a:rPr lang="en-AU" b="1" dirty="0">
+                <a:hlinkClick r:id="rId6"/>
+              </a:rPr>
+              <a:t>inequity</a:t>
+            </a:r>
             <a:endParaRPr lang="en-AU" b="1" dirty="0"/>
           </a:p>
           <a:p>
+            <a:endParaRPr lang="en-AU" b="1" dirty="0"/>
+          </a:p>
+          <a:p>
             <a:r>
               <a:rPr lang="en-AU" dirty="0"/>
-              <a:t>Capital gains tend to go to this with high</a:t>
+              <a:t>Capital gains tend to go to those with high</a:t>
             </a:r>
             <a:br>
               <a:rPr lang="en-AU" dirty="0"/>
@@ -24533,7 +27041,7 @@
           <p:nvPr/>
         </p:nvPicPr>
         <p:blipFill>
-          <a:blip r:embed="rId5"/>
+          <a:blip r:embed="rId7"/>
           <a:stretch>
             <a:fillRect/>
           </a:stretch>
@@ -24563,7 +27071,7 @@
           <p:nvPr/>
         </p:nvPicPr>
         <p:blipFill>
-          <a:blip r:embed="rId6"/>
+          <a:blip r:embed="rId8"/>
           <a:stretch>
             <a:fillRect/>
           </a:stretch>
@@ -24874,7 +27382,17 @@
           <a:p>
             <a:r>
               <a:rPr lang="en-AU" b="1" dirty="0"/>
-              <a:t>It was not clear these reforms should increase revenue – but it does.</a:t>
+              <a:t>It was not clear these reforms should increase revenue – </a:t>
+            </a:r>
+            <a:r>
+              <a:rPr lang="en-AU" b="1" dirty="0">
+                <a:hlinkClick r:id="rId5"/>
+              </a:rPr>
+              <a:t>but it does</a:t>
+            </a:r>
+            <a:r>
+              <a:rPr lang="en-AU" b="1" dirty="0"/>
+              <a:t>.</a:t>
             </a:r>
           </a:p>
         </p:txBody>
@@ -25039,7 +27557,7 @@
           <p:nvPr/>
         </p:nvPicPr>
         <p:blipFill>
-          <a:blip r:embed="rId5"/>
+          <a:blip r:embed="rId6"/>
           <a:stretch>
             <a:fillRect/>
           </a:stretch>
@@ -25734,7 +28252,49 @@
 </p:tagLst>
 </file>
 
+<file path=ppt/tags/tag38.xml><?xml version="1.0" encoding="utf-8"?>
+<p:tagLst xmlns:a="http://schemas.openxmlformats.org/drawingml/2006/main" xmlns:r="http://schemas.openxmlformats.org/officeDocument/2006/relationships" xmlns:p="http://schemas.openxmlformats.org/presentationml/2006/main">
+  <p:tag name="THINKCELLSHAPEDONOTDELETE" val="thinkcellActiveDocDoNotDelete"/>
+</p:tagLst>
+</file>
+
+<file path=ppt/tags/tag39.xml><?xml version="1.0" encoding="utf-8"?>
+<p:tagLst xmlns:a="http://schemas.openxmlformats.org/drawingml/2006/main" xmlns:r="http://schemas.openxmlformats.org/officeDocument/2006/relationships" xmlns:p="http://schemas.openxmlformats.org/presentationml/2006/main">
+  <p:tag name="THINKCELLSHAPEDONOTDELETE" val="thinkcellActiveDocDoNotDelete"/>
+</p:tagLst>
+</file>
+
 <file path=ppt/tags/tag4.xml><?xml version="1.0" encoding="utf-8"?>
+<p:tagLst xmlns:a="http://schemas.openxmlformats.org/drawingml/2006/main" xmlns:r="http://schemas.openxmlformats.org/officeDocument/2006/relationships" xmlns:p="http://schemas.openxmlformats.org/presentationml/2006/main">
+  <p:tag name="THINKCELLSHAPEDONOTDELETE" val="thinkcellActiveDocDoNotDelete"/>
+</p:tagLst>
+</file>
+
+<file path=ppt/tags/tag40.xml><?xml version="1.0" encoding="utf-8"?>
+<p:tagLst xmlns:a="http://schemas.openxmlformats.org/drawingml/2006/main" xmlns:r="http://schemas.openxmlformats.org/officeDocument/2006/relationships" xmlns:p="http://schemas.openxmlformats.org/presentationml/2006/main">
+  <p:tag name="THINKCELLSHAPEDONOTDELETE" val="thinkcellActiveDocDoNotDelete"/>
+</p:tagLst>
+</file>
+
+<file path=ppt/tags/tag41.xml><?xml version="1.0" encoding="utf-8"?>
+<p:tagLst xmlns:a="http://schemas.openxmlformats.org/drawingml/2006/main" xmlns:r="http://schemas.openxmlformats.org/officeDocument/2006/relationships" xmlns:p="http://schemas.openxmlformats.org/presentationml/2006/main">
+  <p:tag name="THINKCELLSHAPEDONOTDELETE" val="thinkcellActiveDocDoNotDelete"/>
+</p:tagLst>
+</file>
+
+<file path=ppt/tags/tag42.xml><?xml version="1.0" encoding="utf-8"?>
+<p:tagLst xmlns:a="http://schemas.openxmlformats.org/drawingml/2006/main" xmlns:r="http://schemas.openxmlformats.org/officeDocument/2006/relationships" xmlns:p="http://schemas.openxmlformats.org/presentationml/2006/main">
+  <p:tag name="THINKCELLSHAPEDONOTDELETE" val="thinkcellActiveDocDoNotDelete"/>
+</p:tagLst>
+</file>
+
+<file path=ppt/tags/tag43.xml><?xml version="1.0" encoding="utf-8"?>
+<p:tagLst xmlns:a="http://schemas.openxmlformats.org/drawingml/2006/main" xmlns:r="http://schemas.openxmlformats.org/officeDocument/2006/relationships" xmlns:p="http://schemas.openxmlformats.org/presentationml/2006/main">
+  <p:tag name="THINKCELLSHAPEDONOTDELETE" val="thinkcellActiveDocDoNotDelete"/>
+</p:tagLst>
+</file>
+
+<file path=ppt/tags/tag44.xml><?xml version="1.0" encoding="utf-8"?>
 <p:tagLst xmlns:a="http://schemas.openxmlformats.org/drawingml/2006/main" xmlns:r="http://schemas.openxmlformats.org/officeDocument/2006/relationships" xmlns:p="http://schemas.openxmlformats.org/presentationml/2006/main">
   <p:tag name="THINKCELLSHAPEDONOTDELETE" val="thinkcellActiveDocDoNotDelete"/>
 </p:tagLst>
@@ -26672,26 +29232,6 @@
 </file>
 
 <file path=customXml/item1.xml><?xml version="1.0" encoding="utf-8"?>
-<?mso-contentType ?>
-<FormTemplates xmlns="http://schemas.microsoft.com/sharepoint/v3/contenttype/forms">
-  <Display>DocumentLibraryForm</Display>
-  <Edit>DocumentLibraryForm</Edit>
-  <New>DocumentLibraryForm</New>
-</FormTemplates>
-</file>
-
-<file path=customXml/item2.xml><?xml version="1.0" encoding="utf-8"?>
-<p:properties xmlns:p="http://schemas.microsoft.com/office/2006/metadata/properties" xmlns:xsi="http://www.w3.org/2001/XMLSchema-instance" xmlns:pc="http://schemas.microsoft.com/office/infopath/2007/PartnerControls">
-  <documentManagement>
-    <TaxCatchAll xmlns="d4025935-85eb-43e8-ab32-734675053e7f" xsi:nil="true"/>
-    <lcf76f155ced4ddcb4097134ff3c332f xmlns="aa802c90-64f7-4260-a678-c5c09559402a">
-      <Terms xmlns="http://schemas.microsoft.com/office/infopath/2007/PartnerControls"/>
-    </lcf76f155ced4ddcb4097134ff3c332f>
-  </documentManagement>
-</p:properties>
-</file>
-
-<file path=customXml/item3.xml><?xml version="1.0" encoding="utf-8"?>
 <ct:contentTypeSchema xmlns:ct="http://schemas.microsoft.com/office/2006/metadata/contentType" xmlns:ma="http://schemas.microsoft.com/office/2006/metadata/properties/metaAttributes" ct:_="" ma:_="" ma:contentTypeName="Document" ma:contentTypeID="0x010100E38A1619F266734FBC2B48FB95398739" ma:contentTypeVersion="18" ma:contentTypeDescription="Create a new document." ma:contentTypeScope="" ma:versionID="8dc4163b27f0ec44a22c6d7358323f5f">
   <xsd:schema xmlns:xsd="http://www.w3.org/2001/XMLSchema" xmlns:xs="http://www.w3.org/2001/XMLSchema" xmlns:p="http://schemas.microsoft.com/office/2006/metadata/properties" xmlns:ns2="aa802c90-64f7-4260-a678-c5c09559402a" xmlns:ns3="d4025935-85eb-43e8-ab32-734675053e7f" targetNamespace="http://schemas.microsoft.com/office/2006/metadata/properties" ma:root="true" ma:fieldsID="a1176a965c39d1ac1c7d6ef690b32559" ns2:_="" ns3:_="">
     <xsd:import namespace="aa802c90-64f7-4260-a678-c5c09559402a"/>
@@ -26946,10 +29486,41 @@
 </ct:contentTypeSchema>
 </file>
 
+<file path=customXml/item2.xml><?xml version="1.0" encoding="utf-8"?>
+<p:properties xmlns:p="http://schemas.microsoft.com/office/2006/metadata/properties" xmlns:xsi="http://www.w3.org/2001/XMLSchema-instance" xmlns:pc="http://schemas.microsoft.com/office/infopath/2007/PartnerControls">
+  <documentManagement>
+    <TaxCatchAll xmlns="d4025935-85eb-43e8-ab32-734675053e7f" xsi:nil="true"/>
+    <lcf76f155ced4ddcb4097134ff3c332f xmlns="aa802c90-64f7-4260-a678-c5c09559402a">
+      <Terms xmlns="http://schemas.microsoft.com/office/infopath/2007/PartnerControls"/>
+    </lcf76f155ced4ddcb4097134ff3c332f>
+  </documentManagement>
+</p:properties>
+</file>
+
+<file path=customXml/item3.xml><?xml version="1.0" encoding="utf-8"?>
+<?mso-contentType ?>
+<FormTemplates xmlns="http://schemas.microsoft.com/sharepoint/v3/contenttype/forms">
+  <Display>DocumentLibraryForm</Display>
+  <Edit>DocumentLibraryForm</Edit>
+  <New>DocumentLibraryForm</New>
+</FormTemplates>
+</file>
+
 <file path=customXml/itemProps1.xml><?xml version="1.0" encoding="utf-8"?>
-<ds:datastoreItem xmlns:ds="http://schemas.openxmlformats.org/officeDocument/2006/customXml" ds:itemID="{529E81E1-445C-4E91-8E35-C5BD736A3B77}">
+<ds:datastoreItem xmlns:ds="http://schemas.openxmlformats.org/officeDocument/2006/customXml" ds:itemID="{C54E5144-405F-49D2-89C0-6C01A508B471}">
   <ds:schemaRefs>
-    <ds:schemaRef ds:uri="http://schemas.microsoft.com/sharepoint/v3/contenttype/forms"/>
+    <ds:schemaRef ds:uri="http://schemas.microsoft.com/office/2006/metadata/contentType"/>
+    <ds:schemaRef ds:uri="http://schemas.microsoft.com/office/2006/metadata/properties/metaAttributes"/>
+    <ds:schemaRef ds:uri="http://www.w3.org/2001/XMLSchema"/>
+    <ds:schemaRef ds:uri="http://schemas.microsoft.com/office/2006/metadata/properties"/>
+    <ds:schemaRef ds:uri="aa802c90-64f7-4260-a678-c5c09559402a"/>
+    <ds:schemaRef ds:uri="d4025935-85eb-43e8-ab32-734675053e7f"/>
+    <ds:schemaRef ds:uri="http://schemas.microsoft.com/office/2006/documentManagement/types"/>
+    <ds:schemaRef ds:uri="http://schemas.microsoft.com/office/infopath/2007/PartnerControls"/>
+    <ds:schemaRef ds:uri="http://schemas.openxmlformats.org/package/2006/metadata/core-properties"/>
+    <ds:schemaRef ds:uri="http://purl.org/dc/elements/1.1/"/>
+    <ds:schemaRef ds:uri="http://purl.org/dc/terms/"/>
+    <ds:schemaRef ds:uri="http://schemas.microsoft.com/internal/obd"/>
   </ds:schemaRefs>
 </ds:datastoreItem>
 </file>
@@ -26972,20 +29543,9 @@
 </file>
 
 <file path=customXml/itemProps3.xml><?xml version="1.0" encoding="utf-8"?>
-<ds:datastoreItem xmlns:ds="http://schemas.openxmlformats.org/officeDocument/2006/customXml" ds:itemID="{C54E5144-405F-49D2-89C0-6C01A508B471}">
+<ds:datastoreItem xmlns:ds="http://schemas.openxmlformats.org/officeDocument/2006/customXml" ds:itemID="{529E81E1-445C-4E91-8E35-C5BD736A3B77}">
   <ds:schemaRefs>
-    <ds:schemaRef ds:uri="http://schemas.microsoft.com/office/2006/metadata/contentType"/>
-    <ds:schemaRef ds:uri="http://schemas.microsoft.com/office/2006/metadata/properties/metaAttributes"/>
-    <ds:schemaRef ds:uri="http://www.w3.org/2001/XMLSchema"/>
-    <ds:schemaRef ds:uri="http://schemas.microsoft.com/office/2006/metadata/properties"/>
-    <ds:schemaRef ds:uri="aa802c90-64f7-4260-a678-c5c09559402a"/>
-    <ds:schemaRef ds:uri="d4025935-85eb-43e8-ab32-734675053e7f"/>
-    <ds:schemaRef ds:uri="http://schemas.microsoft.com/office/2006/documentManagement/types"/>
-    <ds:schemaRef ds:uri="http://schemas.microsoft.com/office/infopath/2007/PartnerControls"/>
-    <ds:schemaRef ds:uri="http://schemas.openxmlformats.org/package/2006/metadata/core-properties"/>
-    <ds:schemaRef ds:uri="http://purl.org/dc/elements/1.1/"/>
-    <ds:schemaRef ds:uri="http://purl.org/dc/terms/"/>
-    <ds:schemaRef ds:uri="http://schemas.microsoft.com/internal/obd"/>
+    <ds:schemaRef ds:uri="http://schemas.microsoft.com/sharepoint/v3/contenttype/forms"/>
   </ds:schemaRefs>
 </ds:datastoreItem>
 </file>